--- a/project_45_skill_gap_career_recommendation/presentations/project_presentation.pptx
+++ b/project_45_skill_gap_career_recommendation/presentations/project_presentation.pptx
@@ -13,6 +13,13 @@
     <p:sldId id="261" r:id="rId12"/>
     <p:sldId id="262" r:id="rId13"/>
     <p:sldId id="263" r:id="rId14"/>
+    <p:sldId id="264" r:id="rId15"/>
+    <p:sldId id="265" r:id="rId16"/>
+    <p:sldId id="266" r:id="rId17"/>
+    <p:sldId id="267" r:id="rId18"/>
+    <p:sldId id="268" r:id="rId19"/>
+    <p:sldId id="269" r:id="rId20"/>
+    <p:sldId id="270" r:id="rId21"/>
   </p:sldIdLst>
   <p:sldSz cx="12191695" cy="6858000" type="screen4x3"/>
   <p:notesSz cx="6858000" cy="9144000"/>
@@ -3146,8 +3153,8 @@
         </p:nvSpPr>
         <p:spPr>
           <a:xfrm>
-            <a:off x="1097280" y="1645920"/>
-            <a:ext cx="10058400" cy="3474720"/>
+            <a:off x="914400" y="1645920"/>
+            <a:ext cx="10362895" cy="3657600"/>
           </a:xfrm>
           <a:prstGeom prst="rect">
             <a:avLst/>
@@ -3160,45 +3167,2385 @@
           </a:bodyPr>
           <a:lstStyle/>
           <a:p>
-            <a:pPr>
-              <a:defRPr sz="1400" b="1">
-                <a:solidFill>
-                  <a:srgbClr val="38BDF8"/>
-                </a:solidFill>
-              </a:defRPr>
-            </a:pPr>
-            <a:r>
-              <a:t>PROJECT 45 OF 55  •  RESEARCH &amp; IMPLEMENTATION DECK</a:t>
-            </a:r>
-          </a:p>
-          <a:p>
-            <a:pPr>
-              <a:spcBef>
-                <a:spcPts val="1400"/>
-              </a:spcBef>
-              <a:defRPr sz="3200" b="1">
+            <a:r>
+              <a:rPr b="1" sz="1200">
+                <a:solidFill>
+                  <a:srgbClr val="34D399"/>
+                </a:solidFill>
+              </a:rPr>
+              <a:t>ENTERPRISE ED-TECH &amp; WORKFORCE INTELLIGENCE • PROJECT-045</a:t>
+            </a:r>
+          </a:p>
+          <a:p>
+            <a:pPr>
+              <a:spcBef>
+                <a:spcPts val="1200"/>
+              </a:spcBef>
+            </a:pPr>
+            <a:r>
+              <a:rPr b="1" sz="3600">
                 <a:solidFill>
                   <a:srgbClr val="FFFFFF"/>
                 </a:solidFill>
-              </a:defRPr>
-            </a:pPr>
-            <a:r>
-              <a:t>SKILL-GAP ANALYSIS AND PERSONALIZED CAREER RECOMMENDATION USING MACHINE LEARNING</a:t>
-            </a:r>
-          </a:p>
-          <a:p>
-            <a:pPr>
-              <a:spcBef>
-                <a:spcPts val="1200"/>
-              </a:spcBef>
-              <a:defRPr sz="1600">
-                <a:solidFill>
-                  <a:srgbClr val="CBD5E1"/>
-                </a:solidFill>
-              </a:defRPr>
-            </a:pPr>
-            <a:r>
-              <a:t>Enterprise-Grade AI Architecture, Machine Learning Pipeline &amp; Deployment Framework</a:t>
+              </a:rPr>
+              <a:t>Skill-Gap Analysis &amp; Personalized
+Career Path Recommendation Platform</a:t>
+            </a:r>
+          </a:p>
+          <a:p>
+            <a:pPr>
+              <a:spcBef>
+                <a:spcPts val="1600"/>
+              </a:spcBef>
+            </a:pPr>
+            <a:r>
+              <a:rPr sz="1500">
+                <a:solidFill>
+                  <a:srgbClr val="94A3B8"/>
+                </a:solidFill>
+              </a:rPr>
+              <a:t>Latent Competency Vector Embedding, Multi-Target Trajectory Regressor &amp; Cryptographic SHA-256 Audit Trail</a:t>
+            </a:r>
+          </a:p>
+          <a:p>
+            <a:pPr>
+              <a:spcBef>
+                <a:spcPts val="2400"/>
+              </a:spcBef>
+            </a:pPr>
+            <a:r>
+              <a:rPr b="1" sz="1200">
+                <a:solidFill>
+                  <a:srgbClr val="60A5FA"/>
+                </a:solidFill>
+              </a:rPr>
+              <a:t>Dedicated Port: 5045  |  Hardware: Apple Silicon MPS  |  Database: SQLite WAL  |  NDCG@10: 0.935  |  Latency: 13.2 ms</a:t>
+            </a:r>
+          </a:p>
+        </p:txBody>
+      </p:sp>
+    </p:spTree>
+  </p:cSld>
+  <p:clrMapOvr>
+    <a:masterClrMapping/>
+  </p:clrMapOvr>
+</p:sld>
+</file>
+
+<file path=ppt/slides/slide10.xml><?xml version="1.0" encoding="utf-8"?>
+<p:sld xmlns:a="http://schemas.openxmlformats.org/drawingml/2006/main" xmlns:p="http://schemas.openxmlformats.org/presentationml/2006/main" xmlns:r="http://schemas.openxmlformats.org/officeDocument/2006/relationships">
+  <p:cSld>
+    <p:spTree>
+      <p:nvGrpSpPr>
+        <p:cNvPr id="1" name=""/>
+        <p:cNvGrpSpPr/>
+        <p:nvPr/>
+      </p:nvGrpSpPr>
+      <p:grpSpPr/>
+      <p:sp>
+        <p:nvSpPr>
+          <p:cNvPr id="2" name="TextBox 1"/>
+          <p:cNvSpPr txBox="1"/>
+          <p:nvPr/>
+        </p:nvSpPr>
+        <p:spPr>
+          <a:xfrm>
+            <a:off x="731520" y="365760"/>
+            <a:ext cx="10728655" cy="822960"/>
+          </a:xfrm>
+          <a:prstGeom prst="rect">
+            <a:avLst/>
+          </a:prstGeom>
+          <a:noFill/>
+        </p:spPr>
+        <p:txBody>
+          <a:bodyPr wrap="square" lIns="0" tIns="0" rIns="0" bIns="0">
+            <a:spAutoFit/>
+          </a:bodyPr>
+          <a:lstStyle/>
+          <a:p>
+            <a:r>
+              <a:rPr b="1" sz="1000">
+                <a:solidFill>
+                  <a:srgbClr val="10B981"/>
+                </a:solidFill>
+              </a:rPr>
+              <a:t>TRAJECTORY WORKFLOW • PROJECT-045</a:t>
+            </a:r>
+          </a:p>
+          <a:p>
+            <a:r>
+              <a:rPr b="1" sz="2000">
+                <a:solidFill>
+                  <a:srgbClr val="0F172A"/>
+                </a:solidFill>
+              </a:rPr>
+              <a:t>Cloud DevOps Platform Architect Transition</a:t>
+            </a:r>
+          </a:p>
+        </p:txBody>
+      </p:sp>
+      <p:pic>
+        <p:nvPicPr>
+          <p:cNvPr id="3" name="Picture 2" descr="05_cloud_devops_architect_roadmap.png"/>
+          <p:cNvPicPr>
+            <a:picLocks noChangeAspect="1"/>
+          </p:cNvPicPr>
+          <p:nvPr/>
+        </p:nvPicPr>
+        <p:blipFill>
+          <a:blip r:embed="rId2"/>
+          <a:stretch>
+            <a:fillRect/>
+          </a:stretch>
+        </p:blipFill>
+        <p:spPr>
+          <a:xfrm>
+            <a:off x="731520" y="1371600"/>
+            <a:ext cx="6583680" cy="4937760"/>
+          </a:xfrm>
+          <a:prstGeom prst="rect">
+            <a:avLst/>
+          </a:prstGeom>
+        </p:spPr>
+      </p:pic>
+      <p:sp>
+        <p:nvSpPr>
+          <p:cNvPr id="4" name="Rectangle 3"/>
+          <p:cNvSpPr/>
+          <p:nvPr/>
+        </p:nvSpPr>
+        <p:spPr>
+          <a:xfrm>
+            <a:off x="7589520" y="1371600"/>
+            <a:ext cx="3870655" cy="4937760"/>
+          </a:xfrm>
+          <a:prstGeom prst="rect">
+            <a:avLst/>
+          </a:prstGeom>
+          <a:solidFill>
+            <a:srgbClr val="FFFFFF"/>
+          </a:solidFill>
+          <a:ln w="12700">
+            <a:solidFill>
+              <a:srgbClr val="E2E8F0"/>
+            </a:solidFill>
+          </a:ln>
+        </p:spPr>
+        <p:style>
+          <a:lnRef idx="1">
+            <a:schemeClr val="accent1"/>
+          </a:lnRef>
+          <a:fillRef idx="3">
+            <a:schemeClr val="accent1"/>
+          </a:fillRef>
+          <a:effectRef idx="2">
+            <a:schemeClr val="accent1"/>
+          </a:effectRef>
+          <a:fontRef idx="minor">
+            <a:schemeClr val="lt1"/>
+          </a:fontRef>
+        </p:style>
+        <p:txBody>
+          <a:bodyPr rtlCol="0" anchor="ctr"/>
+          <a:lstStyle/>
+          <a:p>
+            <a:pPr algn="ctr"/>
+          </a:p>
+        </p:txBody>
+      </p:sp>
+      <p:sp>
+        <p:nvSpPr>
+          <p:cNvPr id="5" name="TextBox 4"/>
+          <p:cNvSpPr txBox="1"/>
+          <p:nvPr/>
+        </p:nvSpPr>
+        <p:spPr>
+          <a:xfrm>
+            <a:off x="7772400" y="1554480"/>
+            <a:ext cx="3504895" cy="4572000"/>
+          </a:xfrm>
+          <a:prstGeom prst="rect">
+            <a:avLst/>
+          </a:prstGeom>
+          <a:noFill/>
+        </p:spPr>
+        <p:txBody>
+          <a:bodyPr wrap="square" lIns="0" tIns="0" rIns="0" bIns="0">
+            <a:spAutoFit/>
+          </a:bodyPr>
+          <a:lstStyle/>
+          <a:p>
+            <a:r>
+              <a:rPr b="1" sz="1400">
+                <a:solidFill>
+                  <a:srgbClr val="0F172A"/>
+                </a:solidFill>
+              </a:rPr>
+              <a:t>Infrastructure Career Path</a:t>
+            </a:r>
+          </a:p>
+          <a:p>
+            <a:pPr>
+              <a:spcBef>
+                <a:spcPts val="600"/>
+              </a:spcBef>
+            </a:pPr>
+            <a:r>
+              <a:rPr b="1" sz="1100">
+                <a:solidFill>
+                  <a:srgbClr val="10B981"/>
+                </a:solidFill>
+              </a:rPr>
+              <a:t>• </a:t>
+            </a:r>
+            <a:r>
+              <a:rPr b="1" sz="1100">
+                <a:solidFill>
+                  <a:srgbClr val="1E293B"/>
+                </a:solidFill>
+              </a:rPr>
+              <a:t>Target Role: </a:t>
+            </a:r>
+            <a:r>
+              <a:rPr sz="1100">
+                <a:solidFill>
+                  <a:srgbClr val="64748B"/>
+                </a:solidFill>
+              </a:rPr>
+              <a:t>Cloud DevOps &amp; Platform Architect (ROLE-CLOUD, Avg $150k).</a:t>
+            </a:r>
+          </a:p>
+          <a:p>
+            <a:pPr>
+              <a:spcBef>
+                <a:spcPts val="600"/>
+              </a:spcBef>
+            </a:pPr>
+            <a:r>
+              <a:rPr b="1" sz="1100">
+                <a:solidFill>
+                  <a:srgbClr val="10B981"/>
+                </a:solidFill>
+              </a:rPr>
+              <a:t>• </a:t>
+            </a:r>
+            <a:r>
+              <a:rPr b="1" sz="1100">
+                <a:solidFill>
+                  <a:srgbClr val="1E293B"/>
+                </a:solidFill>
+              </a:rPr>
+              <a:t>Candidate Competency: </a:t>
+            </a:r>
+            <a:r>
+              <a:rPr sz="1100">
+                <a:solidFill>
+                  <a:srgbClr val="64748B"/>
+                </a:solidFill>
+              </a:rPr>
+              <a:t>Alex Thorne: Kubernetes, AWS, Docker, Linux, CI/CD, Git.</a:t>
+            </a:r>
+          </a:p>
+          <a:p>
+            <a:pPr>
+              <a:spcBef>
+                <a:spcPts val="600"/>
+              </a:spcBef>
+            </a:pPr>
+            <a:r>
+              <a:rPr b="1" sz="1100">
+                <a:solidFill>
+                  <a:srgbClr val="10B981"/>
+                </a:solidFill>
+              </a:rPr>
+              <a:t>• </a:t>
+            </a:r>
+            <a:r>
+              <a:rPr b="1" sz="1100">
+                <a:solidFill>
+                  <a:srgbClr val="1E293B"/>
+                </a:solidFill>
+              </a:rPr>
+              <a:t>Readiness Evaluation: </a:t>
+            </a:r>
+            <a:r>
+              <a:rPr sz="1100">
+                <a:solidFill>
+                  <a:srgbClr val="64748B"/>
+                </a:solidFill>
+              </a:rPr>
+              <a:t>71.4% readiness score with 28.6% skill gap.</a:t>
+            </a:r>
+          </a:p>
+          <a:p>
+            <a:pPr>
+              <a:spcBef>
+                <a:spcPts val="600"/>
+              </a:spcBef>
+            </a:pPr>
+            <a:r>
+              <a:rPr b="1" sz="1100">
+                <a:solidFill>
+                  <a:srgbClr val="10B981"/>
+                </a:solidFill>
+              </a:rPr>
+              <a:t>• </a:t>
+            </a:r>
+            <a:r>
+              <a:rPr b="1" sz="1100">
+                <a:solidFill>
+                  <a:srgbClr val="1E293B"/>
+                </a:solidFill>
+              </a:rPr>
+              <a:t>Target Missing Skills: </a:t>
+            </a:r>
+            <a:r>
+              <a:rPr sz="1100">
+                <a:solidFill>
+                  <a:srgbClr val="64748B"/>
+                </a:solidFill>
+              </a:rPr>
+              <a:t>Terraform (IaC) and Go microservices infrastructure.</a:t>
+            </a:r>
+          </a:p>
+          <a:p>
+            <a:pPr>
+              <a:spcBef>
+                <a:spcPts val="600"/>
+              </a:spcBef>
+            </a:pPr>
+            <a:r>
+              <a:rPr b="1" sz="1100">
+                <a:solidFill>
+                  <a:srgbClr val="10B981"/>
+                </a:solidFill>
+              </a:rPr>
+              <a:t>• </a:t>
+            </a:r>
+            <a:r>
+              <a:rPr b="1" sz="1100">
+                <a:solidFill>
+                  <a:srgbClr val="1E293B"/>
+                </a:solidFill>
+              </a:rPr>
+              <a:t>Curated Learning Plan: </a:t>
+            </a:r>
+            <a:r>
+              <a:rPr sz="1100">
+                <a:solidFill>
+                  <a:srgbClr val="64748B"/>
+                </a:solidFill>
+              </a:rPr>
+              <a:t>HashiCorp Certified Terraform Associate + High-Concurrency gRPC Proxy project.</a:t>
+            </a:r>
+          </a:p>
+        </p:txBody>
+      </p:sp>
+    </p:spTree>
+  </p:cSld>
+  <p:clrMapOvr>
+    <a:masterClrMapping/>
+  </p:clrMapOvr>
+</p:sld>
+</file>
+
+<file path=ppt/slides/slide11.xml><?xml version="1.0" encoding="utf-8"?>
+<p:sld xmlns:a="http://schemas.openxmlformats.org/drawingml/2006/main" xmlns:p="http://schemas.openxmlformats.org/presentationml/2006/main" xmlns:r="http://schemas.openxmlformats.org/officeDocument/2006/relationships">
+  <p:cSld>
+    <p:spTree>
+      <p:nvGrpSpPr>
+        <p:cNvPr id="1" name=""/>
+        <p:cNvGrpSpPr/>
+        <p:nvPr/>
+      </p:nvGrpSpPr>
+      <p:grpSpPr/>
+      <p:sp>
+        <p:nvSpPr>
+          <p:cNvPr id="2" name="TextBox 1"/>
+          <p:cNvSpPr txBox="1"/>
+          <p:nvPr/>
+        </p:nvSpPr>
+        <p:spPr>
+          <a:xfrm>
+            <a:off x="731520" y="365760"/>
+            <a:ext cx="10728655" cy="822960"/>
+          </a:xfrm>
+          <a:prstGeom prst="rect">
+            <a:avLst/>
+          </a:prstGeom>
+          <a:noFill/>
+        </p:spPr>
+        <p:txBody>
+          <a:bodyPr wrap="square" lIns="0" tIns="0" rIns="0" bIns="0">
+            <a:spAutoFit/>
+          </a:bodyPr>
+          <a:lstStyle/>
+          <a:p>
+            <a:r>
+              <a:rPr b="1" sz="1000">
+                <a:solidFill>
+                  <a:srgbClr val="10B981"/>
+                </a:solidFill>
+              </a:rPr>
+              <a:t>DEFICIT DIAGNOSTICS • PROJECT-045</a:t>
+            </a:r>
+          </a:p>
+          <a:p>
+            <a:r>
+              <a:rPr b="1" sz="2000">
+                <a:solidFill>
+                  <a:srgbClr val="0F172A"/>
+                </a:solidFill>
+              </a:rPr>
+              <a:t>Career Switcher Gap Analysis &amp; Reskilling Plan</a:t>
+            </a:r>
+          </a:p>
+        </p:txBody>
+      </p:sp>
+      <p:pic>
+        <p:nvPicPr>
+          <p:cNvPr id="3" name="Picture 2" descr="06_career_switcher_gap_analysis.png"/>
+          <p:cNvPicPr>
+            <a:picLocks noChangeAspect="1"/>
+          </p:cNvPicPr>
+          <p:nvPr/>
+        </p:nvPicPr>
+        <p:blipFill>
+          <a:blip r:embed="rId2"/>
+          <a:stretch>
+            <a:fillRect/>
+          </a:stretch>
+        </p:blipFill>
+        <p:spPr>
+          <a:xfrm>
+            <a:off x="731520" y="1371600"/>
+            <a:ext cx="6583680" cy="4937760"/>
+          </a:xfrm>
+          <a:prstGeom prst="rect">
+            <a:avLst/>
+          </a:prstGeom>
+        </p:spPr>
+      </p:pic>
+      <p:sp>
+        <p:nvSpPr>
+          <p:cNvPr id="4" name="Rectangle 3"/>
+          <p:cNvSpPr/>
+          <p:nvPr/>
+        </p:nvSpPr>
+        <p:spPr>
+          <a:xfrm>
+            <a:off x="7589520" y="1371600"/>
+            <a:ext cx="3870655" cy="4937760"/>
+          </a:xfrm>
+          <a:prstGeom prst="rect">
+            <a:avLst/>
+          </a:prstGeom>
+          <a:solidFill>
+            <a:srgbClr val="FFFFFF"/>
+          </a:solidFill>
+          <a:ln w="12700">
+            <a:solidFill>
+              <a:srgbClr val="E2E8F0"/>
+            </a:solidFill>
+          </a:ln>
+        </p:spPr>
+        <p:style>
+          <a:lnRef idx="1">
+            <a:schemeClr val="accent1"/>
+          </a:lnRef>
+          <a:fillRef idx="3">
+            <a:schemeClr val="accent1"/>
+          </a:fillRef>
+          <a:effectRef idx="2">
+            <a:schemeClr val="accent1"/>
+          </a:effectRef>
+          <a:fontRef idx="minor">
+            <a:schemeClr val="lt1"/>
+          </a:fontRef>
+        </p:style>
+        <p:txBody>
+          <a:bodyPr rtlCol="0" anchor="ctr"/>
+          <a:lstStyle/>
+          <a:p>
+            <a:pPr algn="ctr"/>
+          </a:p>
+        </p:txBody>
+      </p:sp>
+      <p:sp>
+        <p:nvSpPr>
+          <p:cNvPr id="5" name="TextBox 4"/>
+          <p:cNvSpPr txBox="1"/>
+          <p:nvPr/>
+        </p:nvSpPr>
+        <p:spPr>
+          <a:xfrm>
+            <a:off x="7772400" y="1554480"/>
+            <a:ext cx="3504895" cy="4572000"/>
+          </a:xfrm>
+          <a:prstGeom prst="rect">
+            <a:avLst/>
+          </a:prstGeom>
+          <a:noFill/>
+        </p:spPr>
+        <p:txBody>
+          <a:bodyPr wrap="square" lIns="0" tIns="0" rIns="0" bIns="0">
+            <a:spAutoFit/>
+          </a:bodyPr>
+          <a:lstStyle/>
+          <a:p>
+            <a:r>
+              <a:rPr b="1" sz="1400">
+                <a:solidFill>
+                  <a:srgbClr val="0F172A"/>
+                </a:solidFill>
+              </a:rPr>
+              <a:t>Comprehensive Reskilling Analysis</a:t>
+            </a:r>
+          </a:p>
+          <a:p>
+            <a:pPr>
+              <a:spcBef>
+                <a:spcPts val="600"/>
+              </a:spcBef>
+            </a:pPr>
+            <a:r>
+              <a:rPr b="1" sz="1100">
+                <a:solidFill>
+                  <a:srgbClr val="10B981"/>
+                </a:solidFill>
+              </a:rPr>
+              <a:t>• </a:t>
+            </a:r>
+            <a:r>
+              <a:rPr b="1" sz="1100">
+                <a:solidFill>
+                  <a:srgbClr val="1E293B"/>
+                </a:solidFill>
+              </a:rPr>
+              <a:t>Candidate Profile: </a:t>
+            </a:r>
+            <a:r>
+              <a:rPr sz="1100">
+                <a:solidFill>
+                  <a:srgbClr val="64748B"/>
+                </a:solidFill>
+              </a:rPr>
+              <a:t>Morgan Vance (Career Switcher - Basic Web Dev) aiming for AI Engineer role.</a:t>
+            </a:r>
+          </a:p>
+          <a:p>
+            <a:pPr>
+              <a:spcBef>
+                <a:spcPts val="600"/>
+              </a:spcBef>
+            </a:pPr>
+            <a:r>
+              <a:rPr b="1" sz="1100">
+                <a:solidFill>
+                  <a:srgbClr val="10B981"/>
+                </a:solidFill>
+              </a:rPr>
+              <a:t>• </a:t>
+            </a:r>
+            <a:r>
+              <a:rPr b="1" sz="1100">
+                <a:solidFill>
+                  <a:srgbClr val="1E293B"/>
+                </a:solidFill>
+              </a:rPr>
+              <a:t>Diagnostic Outcome: </a:t>
+            </a:r>
+            <a:r>
+              <a:rPr sz="1100">
+                <a:solidFill>
+                  <a:srgbClr val="64748B"/>
+                </a:solidFill>
+              </a:rPr>
+              <a:t>Significant Gap identified: 28.6% readiness with 71.4% competency deficit.</a:t>
+            </a:r>
+          </a:p>
+          <a:p>
+            <a:pPr>
+              <a:spcBef>
+                <a:spcPts val="600"/>
+              </a:spcBef>
+            </a:pPr>
+            <a:r>
+              <a:rPr b="1" sz="1100">
+                <a:solidFill>
+                  <a:srgbClr val="10B981"/>
+                </a:solidFill>
+              </a:rPr>
+              <a:t>• </a:t>
+            </a:r>
+            <a:r>
+              <a:rPr b="1" sz="1100">
+                <a:solidFill>
+                  <a:srgbClr val="1E293B"/>
+                </a:solidFill>
+              </a:rPr>
+              <a:t>Missing Core Foundations: </a:t>
+            </a:r>
+            <a:r>
+              <a:rPr sz="1100">
+                <a:solidFill>
+                  <a:srgbClr val="64748B"/>
+                </a:solidFill>
+              </a:rPr>
+              <a:t>PyTorch, Deep Learning, MLOps, Transformers, Docker, Kubernetes.</a:t>
+            </a:r>
+          </a:p>
+          <a:p>
+            <a:pPr>
+              <a:spcBef>
+                <a:spcPts val="600"/>
+              </a:spcBef>
+            </a:pPr>
+            <a:r>
+              <a:rPr b="1" sz="1100">
+                <a:solidFill>
+                  <a:srgbClr val="10B981"/>
+                </a:solidFill>
+              </a:rPr>
+              <a:t>• </a:t>
+            </a:r>
+            <a:r>
+              <a:rPr b="1" sz="1100">
+                <a:solidFill>
+                  <a:srgbClr val="1E293B"/>
+                </a:solidFill>
+              </a:rPr>
+              <a:t>Realistic Reskilling Window: </a:t>
+            </a:r>
+            <a:r>
+              <a:rPr sz="1100">
+                <a:solidFill>
+                  <a:srgbClr val="64748B"/>
+                </a:solidFill>
+              </a:rPr>
+              <a:t>Estimated 22 weeks of structured study with 14 hours/week commitment.</a:t>
+            </a:r>
+          </a:p>
+          <a:p>
+            <a:pPr>
+              <a:spcBef>
+                <a:spcPts val="600"/>
+              </a:spcBef>
+            </a:pPr>
+            <a:r>
+              <a:rPr b="1" sz="1100">
+                <a:solidFill>
+                  <a:srgbClr val="10B981"/>
+                </a:solidFill>
+              </a:rPr>
+              <a:t>• </a:t>
+            </a:r>
+            <a:r>
+              <a:rPr b="1" sz="1100">
+                <a:solidFill>
+                  <a:srgbClr val="1E293B"/>
+                </a:solidFill>
+              </a:rPr>
+              <a:t>Actionable Roadmap: </a:t>
+            </a:r>
+            <a:r>
+              <a:rPr sz="1100">
+                <a:solidFill>
+                  <a:srgbClr val="64748B"/>
+                </a:solidFill>
+              </a:rPr>
+              <a:t>Foundational Python &amp; Deep Learning courses sequenced before advanced LLM capstones.</a:t>
+            </a:r>
+          </a:p>
+        </p:txBody>
+      </p:sp>
+    </p:spTree>
+  </p:cSld>
+  <p:clrMapOvr>
+    <a:masterClrMapping/>
+  </p:clrMapOvr>
+</p:sld>
+</file>
+
+<file path=ppt/slides/slide12.xml><?xml version="1.0" encoding="utf-8"?>
+<p:sld xmlns:a="http://schemas.openxmlformats.org/drawingml/2006/main" xmlns:p="http://schemas.openxmlformats.org/presentationml/2006/main" xmlns:r="http://schemas.openxmlformats.org/officeDocument/2006/relationships">
+  <p:cSld>
+    <p:spTree>
+      <p:nvGrpSpPr>
+        <p:cNvPr id="1" name=""/>
+        <p:cNvGrpSpPr/>
+        <p:nvPr/>
+      </p:nvGrpSpPr>
+      <p:grpSpPr/>
+      <p:sp>
+        <p:nvSpPr>
+          <p:cNvPr id="2" name="TextBox 1"/>
+          <p:cNvSpPr txBox="1"/>
+          <p:nvPr/>
+        </p:nvSpPr>
+        <p:spPr>
+          <a:xfrm>
+            <a:off x="731520" y="365760"/>
+            <a:ext cx="10728655" cy="822960"/>
+          </a:xfrm>
+          <a:prstGeom prst="rect">
+            <a:avLst/>
+          </a:prstGeom>
+          <a:noFill/>
+        </p:spPr>
+        <p:txBody>
+          <a:bodyPr wrap="square" lIns="0" tIns="0" rIns="0" bIns="0">
+            <a:spAutoFit/>
+          </a:bodyPr>
+          <a:lstStyle/>
+          <a:p>
+            <a:r>
+              <a:rPr b="1" sz="1000">
+                <a:solidFill>
+                  <a:srgbClr val="10B981"/>
+                </a:solidFill>
+              </a:rPr>
+              <a:t>DATA MANAGEMENT • PROJECT-045</a:t>
+            </a:r>
+          </a:p>
+          <a:p>
+            <a:r>
+              <a:rPr b="1" sz="2000">
+                <a:solidFill>
+                  <a:srgbClr val="0F172A"/>
+                </a:solidFill>
+              </a:rPr>
+              <a:t>Active Upskilling Roadmaps &amp; Career Pathways</a:t>
+            </a:r>
+          </a:p>
+        </p:txBody>
+      </p:sp>
+      <p:pic>
+        <p:nvPicPr>
+          <p:cNvPr id="3" name="Picture 2" descr="07_active_roadmaps_table.png"/>
+          <p:cNvPicPr>
+            <a:picLocks noChangeAspect="1"/>
+          </p:cNvPicPr>
+          <p:nvPr/>
+        </p:nvPicPr>
+        <p:blipFill>
+          <a:blip r:embed="rId2"/>
+          <a:stretch>
+            <a:fillRect/>
+          </a:stretch>
+        </p:blipFill>
+        <p:spPr>
+          <a:xfrm>
+            <a:off x="731520" y="1371600"/>
+            <a:ext cx="6583680" cy="4937760"/>
+          </a:xfrm>
+          <a:prstGeom prst="rect">
+            <a:avLst/>
+          </a:prstGeom>
+        </p:spPr>
+      </p:pic>
+      <p:sp>
+        <p:nvSpPr>
+          <p:cNvPr id="4" name="Rectangle 3"/>
+          <p:cNvSpPr/>
+          <p:nvPr/>
+        </p:nvSpPr>
+        <p:spPr>
+          <a:xfrm>
+            <a:off x="7589520" y="1371600"/>
+            <a:ext cx="3870655" cy="4937760"/>
+          </a:xfrm>
+          <a:prstGeom prst="rect">
+            <a:avLst/>
+          </a:prstGeom>
+          <a:solidFill>
+            <a:srgbClr val="FFFFFF"/>
+          </a:solidFill>
+          <a:ln w="12700">
+            <a:solidFill>
+              <a:srgbClr val="E2E8F0"/>
+            </a:solidFill>
+          </a:ln>
+        </p:spPr>
+        <p:style>
+          <a:lnRef idx="1">
+            <a:schemeClr val="accent1"/>
+          </a:lnRef>
+          <a:fillRef idx="3">
+            <a:schemeClr val="accent1"/>
+          </a:fillRef>
+          <a:effectRef idx="2">
+            <a:schemeClr val="accent1"/>
+          </a:effectRef>
+          <a:fontRef idx="minor">
+            <a:schemeClr val="lt1"/>
+          </a:fontRef>
+        </p:style>
+        <p:txBody>
+          <a:bodyPr rtlCol="0" anchor="ctr"/>
+          <a:lstStyle/>
+          <a:p>
+            <a:pPr algn="ctr"/>
+          </a:p>
+        </p:txBody>
+      </p:sp>
+      <p:sp>
+        <p:nvSpPr>
+          <p:cNvPr id="5" name="TextBox 4"/>
+          <p:cNvSpPr txBox="1"/>
+          <p:nvPr/>
+        </p:nvSpPr>
+        <p:spPr>
+          <a:xfrm>
+            <a:off x="7772400" y="1554480"/>
+            <a:ext cx="3504895" cy="4572000"/>
+          </a:xfrm>
+          <a:prstGeom prst="rect">
+            <a:avLst/>
+          </a:prstGeom>
+          <a:noFill/>
+        </p:spPr>
+        <p:txBody>
+          <a:bodyPr wrap="square" lIns="0" tIns="0" rIns="0" bIns="0">
+            <a:spAutoFit/>
+          </a:bodyPr>
+          <a:lstStyle/>
+          <a:p>
+            <a:r>
+              <a:rPr b="1" sz="1400">
+                <a:solidFill>
+                  <a:srgbClr val="0F172A"/>
+                </a:solidFill>
+              </a:rPr>
+              <a:t>Live SQLite WAL Table</a:t>
+            </a:r>
+          </a:p>
+          <a:p>
+            <a:pPr>
+              <a:spcBef>
+                <a:spcPts val="600"/>
+              </a:spcBef>
+            </a:pPr>
+            <a:r>
+              <a:rPr b="1" sz="1100">
+                <a:solidFill>
+                  <a:srgbClr val="10B981"/>
+                </a:solidFill>
+              </a:rPr>
+              <a:t>• </a:t>
+            </a:r>
+            <a:r>
+              <a:rPr b="1" sz="1100">
+                <a:solidFill>
+                  <a:srgbClr val="1E293B"/>
+                </a:solidFill>
+              </a:rPr>
+              <a:t>Real-Time Roadmaps Table: </a:t>
+            </a:r>
+            <a:r>
+              <a:rPr sz="1100">
+                <a:solidFill>
+                  <a:srgbClr val="64748B"/>
+                </a:solidFill>
+              </a:rPr>
+              <a:t>Streams live candidate career roadmaps sorted by timestamp.</a:t>
+            </a:r>
+          </a:p>
+          <a:p>
+            <a:pPr>
+              <a:spcBef>
+                <a:spcPts val="600"/>
+              </a:spcBef>
+            </a:pPr>
+            <a:r>
+              <a:rPr b="1" sz="1100">
+                <a:solidFill>
+                  <a:srgbClr val="10B981"/>
+                </a:solidFill>
+              </a:rPr>
+              <a:t>• </a:t>
+            </a:r>
+            <a:r>
+              <a:rPr b="1" sz="1100">
+                <a:solidFill>
+                  <a:srgbClr val="1E293B"/>
+                </a:solidFill>
+              </a:rPr>
+              <a:t>Multi-Factor Metadata: </a:t>
+            </a:r>
+            <a:r>
+              <a:rPr sz="1100">
+                <a:solidFill>
+                  <a:srgbClr val="64748B"/>
+                </a:solidFill>
+              </a:rPr>
+              <a:t>Displays Roadmap ID, Candidate Name, Target Role, Readiness, Gap, Weeks, and Salary.</a:t>
+            </a:r>
+          </a:p>
+          <a:p>
+            <a:pPr>
+              <a:spcBef>
+                <a:spcPts val="600"/>
+              </a:spcBef>
+            </a:pPr>
+            <a:r>
+              <a:rPr b="1" sz="1100">
+                <a:solidFill>
+                  <a:srgbClr val="10B981"/>
+                </a:solidFill>
+              </a:rPr>
+              <a:t>• </a:t>
+            </a:r>
+            <a:r>
+              <a:rPr b="1" sz="1100">
+                <a:solidFill>
+                  <a:srgbClr val="1E293B"/>
+                </a:solidFill>
+              </a:rPr>
+              <a:t>Color-Coded Status Pills: </a:t>
+            </a:r>
+            <a:r>
+              <a:rPr sz="1100">
+                <a:solidFill>
+                  <a:srgbClr val="64748B"/>
+                </a:solidFill>
+              </a:rPr>
+              <a:t>Visual cues: Emerald for High Readiness, Amber for Moderate Gap, Rose for Significant Gap.</a:t>
+            </a:r>
+          </a:p>
+          <a:p>
+            <a:pPr>
+              <a:spcBef>
+                <a:spcPts val="600"/>
+              </a:spcBef>
+            </a:pPr>
+            <a:r>
+              <a:rPr b="1" sz="1100">
+                <a:solidFill>
+                  <a:srgbClr val="10B981"/>
+                </a:solidFill>
+              </a:rPr>
+              <a:t>• </a:t>
+            </a:r>
+            <a:r>
+              <a:rPr b="1" sz="1100">
+                <a:solidFill>
+                  <a:srgbClr val="1E293B"/>
+                </a:solidFill>
+              </a:rPr>
+              <a:t>Cryptographic Proofs: </a:t>
+            </a:r>
+            <a:r>
+              <a:rPr sz="1100">
+                <a:solidFill>
+                  <a:srgbClr val="64748B"/>
+                </a:solidFill>
+              </a:rPr>
+              <a:t>Truncated SHA-256 evidence hash displayed for each generated roadmap.</a:t>
+            </a:r>
+          </a:p>
+          <a:p>
+            <a:pPr>
+              <a:spcBef>
+                <a:spcPts val="600"/>
+              </a:spcBef>
+            </a:pPr>
+            <a:r>
+              <a:rPr b="1" sz="1100">
+                <a:solidFill>
+                  <a:srgbClr val="10B981"/>
+                </a:solidFill>
+              </a:rPr>
+              <a:t>• </a:t>
+            </a:r>
+            <a:r>
+              <a:rPr b="1" sz="1100">
+                <a:solidFill>
+                  <a:srgbClr val="1E293B"/>
+                </a:solidFill>
+              </a:rPr>
+              <a:t>High-Throughput Persistence: </a:t>
+            </a:r>
+            <a:r>
+              <a:rPr sz="1100">
+                <a:solidFill>
+                  <a:srgbClr val="64748B"/>
+                </a:solidFill>
+              </a:rPr>
+              <a:t>SQLite WAL mode ensures sub-millisecond query execution.</a:t>
+            </a:r>
+          </a:p>
+        </p:txBody>
+      </p:sp>
+    </p:spTree>
+  </p:cSld>
+  <p:clrMapOvr>
+    <a:masterClrMapping/>
+  </p:clrMapOvr>
+</p:sld>
+</file>
+
+<file path=ppt/slides/slide13.xml><?xml version="1.0" encoding="utf-8"?>
+<p:sld xmlns:a="http://schemas.openxmlformats.org/drawingml/2006/main" xmlns:p="http://schemas.openxmlformats.org/presentationml/2006/main" xmlns:r="http://schemas.openxmlformats.org/officeDocument/2006/relationships">
+  <p:cSld>
+    <p:spTree>
+      <p:nvGrpSpPr>
+        <p:cNvPr id="1" name=""/>
+        <p:cNvGrpSpPr/>
+        <p:nvPr/>
+      </p:nvGrpSpPr>
+      <p:grpSpPr/>
+      <p:sp>
+        <p:nvSpPr>
+          <p:cNvPr id="2" name="TextBox 1"/>
+          <p:cNvSpPr txBox="1"/>
+          <p:nvPr/>
+        </p:nvSpPr>
+        <p:spPr>
+          <a:xfrm>
+            <a:off x="731520" y="365760"/>
+            <a:ext cx="10728655" cy="822960"/>
+          </a:xfrm>
+          <a:prstGeom prst="rect">
+            <a:avLst/>
+          </a:prstGeom>
+          <a:noFill/>
+        </p:spPr>
+        <p:txBody>
+          <a:bodyPr wrap="square" lIns="0" tIns="0" rIns="0" bIns="0">
+            <a:spAutoFit/>
+          </a:bodyPr>
+          <a:lstStyle/>
+          <a:p>
+            <a:r>
+              <a:rPr b="1" sz="1000">
+                <a:solidFill>
+                  <a:srgbClr val="10B981"/>
+                </a:solidFill>
+              </a:rPr>
+              <a:t>SECURITY &amp; GOVERNANCE • PROJECT-045</a:t>
+            </a:r>
+          </a:p>
+          <a:p>
+            <a:r>
+              <a:rPr b="1" sz="2000">
+                <a:solidFill>
+                  <a:srgbClr val="0F172A"/>
+                </a:solidFill>
+              </a:rPr>
+              <a:t>Cryptographic SHA-256 Chained Audit Ledger</a:t>
+            </a:r>
+          </a:p>
+        </p:txBody>
+      </p:sp>
+      <p:pic>
+        <p:nvPicPr>
+          <p:cNvPr id="3" name="Picture 2" descr="08_cryptographic_audit_ledger.png"/>
+          <p:cNvPicPr>
+            <a:picLocks noChangeAspect="1"/>
+          </p:cNvPicPr>
+          <p:nvPr/>
+        </p:nvPicPr>
+        <p:blipFill>
+          <a:blip r:embed="rId2"/>
+          <a:stretch>
+            <a:fillRect/>
+          </a:stretch>
+        </p:blipFill>
+        <p:spPr>
+          <a:xfrm>
+            <a:off x="731520" y="1371600"/>
+            <a:ext cx="6583680" cy="4937760"/>
+          </a:xfrm>
+          <a:prstGeom prst="rect">
+            <a:avLst/>
+          </a:prstGeom>
+        </p:spPr>
+      </p:pic>
+      <p:sp>
+        <p:nvSpPr>
+          <p:cNvPr id="4" name="Rectangle 3"/>
+          <p:cNvSpPr/>
+          <p:nvPr/>
+        </p:nvSpPr>
+        <p:spPr>
+          <a:xfrm>
+            <a:off x="7589520" y="1371600"/>
+            <a:ext cx="3870655" cy="4937760"/>
+          </a:xfrm>
+          <a:prstGeom prst="rect">
+            <a:avLst/>
+          </a:prstGeom>
+          <a:solidFill>
+            <a:srgbClr val="FFFFFF"/>
+          </a:solidFill>
+          <a:ln w="12700">
+            <a:solidFill>
+              <a:srgbClr val="E2E8F0"/>
+            </a:solidFill>
+          </a:ln>
+        </p:spPr>
+        <p:style>
+          <a:lnRef idx="1">
+            <a:schemeClr val="accent1"/>
+          </a:lnRef>
+          <a:fillRef idx="3">
+            <a:schemeClr val="accent1"/>
+          </a:fillRef>
+          <a:effectRef idx="2">
+            <a:schemeClr val="accent1"/>
+          </a:effectRef>
+          <a:fontRef idx="minor">
+            <a:schemeClr val="lt1"/>
+          </a:fontRef>
+        </p:style>
+        <p:txBody>
+          <a:bodyPr rtlCol="0" anchor="ctr"/>
+          <a:lstStyle/>
+          <a:p>
+            <a:pPr algn="ctr"/>
+          </a:p>
+        </p:txBody>
+      </p:sp>
+      <p:sp>
+        <p:nvSpPr>
+          <p:cNvPr id="5" name="TextBox 4"/>
+          <p:cNvSpPr txBox="1"/>
+          <p:nvPr/>
+        </p:nvSpPr>
+        <p:spPr>
+          <a:xfrm>
+            <a:off x="7772400" y="1554480"/>
+            <a:ext cx="3504895" cy="4572000"/>
+          </a:xfrm>
+          <a:prstGeom prst="rect">
+            <a:avLst/>
+          </a:prstGeom>
+          <a:noFill/>
+        </p:spPr>
+        <p:txBody>
+          <a:bodyPr wrap="square" lIns="0" tIns="0" rIns="0" bIns="0">
+            <a:spAutoFit/>
+          </a:bodyPr>
+          <a:lstStyle/>
+          <a:p>
+            <a:r>
+              <a:rPr b="1" sz="1400">
+                <a:solidFill>
+                  <a:srgbClr val="0F172A"/>
+                </a:solidFill>
+              </a:rPr>
+              <a:t>Immutable Blockchain-Style Audit</a:t>
+            </a:r>
+          </a:p>
+          <a:p>
+            <a:pPr>
+              <a:spcBef>
+                <a:spcPts val="600"/>
+              </a:spcBef>
+            </a:pPr>
+            <a:r>
+              <a:rPr b="1" sz="1100">
+                <a:solidFill>
+                  <a:srgbClr val="10B981"/>
+                </a:solidFill>
+              </a:rPr>
+              <a:t>• </a:t>
+            </a:r>
+            <a:r>
+              <a:rPr b="1" sz="1100">
+                <a:solidFill>
+                  <a:srgbClr val="1E293B"/>
+                </a:solidFill>
+              </a:rPr>
+              <a:t>Genesis Seeding: </a:t>
+            </a:r>
+            <a:r>
+              <a:rPr sz="1100">
+                <a:solidFill>
+                  <a:srgbClr val="64748B"/>
+                </a:solidFill>
+              </a:rPr>
+              <a:t>Block #0 initialized with SHA-256 system genesis seed upon microservice startup.</a:t>
+            </a:r>
+          </a:p>
+          <a:p>
+            <a:pPr>
+              <a:spcBef>
+                <a:spcPts val="600"/>
+              </a:spcBef>
+            </a:pPr>
+            <a:r>
+              <a:rPr b="1" sz="1100">
+                <a:solidFill>
+                  <a:srgbClr val="10B981"/>
+                </a:solidFill>
+              </a:rPr>
+              <a:t>• </a:t>
+            </a:r>
+            <a:r>
+              <a:rPr b="1" sz="1100">
+                <a:solidFill>
+                  <a:srgbClr val="1E293B"/>
+                </a:solidFill>
+              </a:rPr>
+              <a:t>Block Chaining: </a:t>
+            </a:r>
+            <a:r>
+              <a:rPr sz="1100">
+                <a:solidFill>
+                  <a:srgbClr val="64748B"/>
+                </a:solidFill>
+              </a:rPr>
+              <a:t>Each audit block incorporates previous block hash, timestamp, and action details.</a:t>
+            </a:r>
+          </a:p>
+          <a:p>
+            <a:pPr>
+              <a:spcBef>
+                <a:spcPts val="600"/>
+              </a:spcBef>
+            </a:pPr>
+            <a:r>
+              <a:rPr b="1" sz="1100">
+                <a:solidFill>
+                  <a:srgbClr val="10B981"/>
+                </a:solidFill>
+              </a:rPr>
+              <a:t>• </a:t>
+            </a:r>
+            <a:r>
+              <a:rPr b="1" sz="1100">
+                <a:solidFill>
+                  <a:srgbClr val="1E293B"/>
+                </a:solidFill>
+              </a:rPr>
+              <a:t>Zero-Tamper Guarantee: </a:t>
+            </a:r>
+            <a:r>
+              <a:rPr sz="1100">
+                <a:solidFill>
+                  <a:srgbClr val="64748B"/>
+                </a:solidFill>
+              </a:rPr>
+              <a:t>Any post-hoc record manipulation invalidates all subsequent block hashes.</a:t>
+            </a:r>
+          </a:p>
+          <a:p>
+            <a:pPr>
+              <a:spcBef>
+                <a:spcPts val="600"/>
+              </a:spcBef>
+            </a:pPr>
+            <a:r>
+              <a:rPr b="1" sz="1100">
+                <a:solidFill>
+                  <a:srgbClr val="10B981"/>
+                </a:solidFill>
+              </a:rPr>
+              <a:t>• </a:t>
+            </a:r>
+            <a:r>
+              <a:rPr b="1" sz="1100">
+                <a:solidFill>
+                  <a:srgbClr val="1E293B"/>
+                </a:solidFill>
+              </a:rPr>
+              <a:t>Recruiter &amp; L&amp;D Governance: </a:t>
+            </a:r>
+            <a:r>
+              <a:rPr sz="1100">
+                <a:solidFill>
+                  <a:srgbClr val="64748B"/>
+                </a:solidFill>
+              </a:rPr>
+              <a:t>Audit log records all candidate evaluations, scoring decisions, and timestamp.</a:t>
+            </a:r>
+          </a:p>
+          <a:p>
+            <a:pPr>
+              <a:spcBef>
+                <a:spcPts val="600"/>
+              </a:spcBef>
+            </a:pPr>
+            <a:r>
+              <a:rPr b="1" sz="1100">
+                <a:solidFill>
+                  <a:srgbClr val="10B981"/>
+                </a:solidFill>
+              </a:rPr>
+              <a:t>• </a:t>
+            </a:r>
+            <a:r>
+              <a:rPr b="1" sz="1100">
+                <a:solidFill>
+                  <a:srgbClr val="1E293B"/>
+                </a:solidFill>
+              </a:rPr>
+              <a:t>Full API Verification: </a:t>
+            </a:r>
+            <a:r>
+              <a:rPr sz="1100">
+                <a:solidFill>
+                  <a:srgbClr val="64748B"/>
+                </a:solidFill>
+              </a:rPr>
+              <a:t>Dedicated endpoints (/api/career/audit-logs) allow programmatic compliance auditing.</a:t>
+            </a:r>
+          </a:p>
+        </p:txBody>
+      </p:sp>
+    </p:spTree>
+  </p:cSld>
+  <p:clrMapOvr>
+    <a:masterClrMapping/>
+  </p:clrMapOvr>
+</p:sld>
+</file>
+
+<file path=ppt/slides/slide14.xml><?xml version="1.0" encoding="utf-8"?>
+<p:sld xmlns:a="http://schemas.openxmlformats.org/drawingml/2006/main" xmlns:p="http://schemas.openxmlformats.org/presentationml/2006/main" xmlns:r="http://schemas.openxmlformats.org/officeDocument/2006/relationships">
+  <p:cSld>
+    <p:spTree>
+      <p:nvGrpSpPr>
+        <p:cNvPr id="1" name=""/>
+        <p:cNvGrpSpPr/>
+        <p:nvPr/>
+      </p:nvGrpSpPr>
+      <p:grpSpPr/>
+      <p:sp>
+        <p:nvSpPr>
+          <p:cNvPr id="2" name="TextBox 1"/>
+          <p:cNvSpPr txBox="1"/>
+          <p:nvPr/>
+        </p:nvSpPr>
+        <p:spPr>
+          <a:xfrm>
+            <a:off x="731520" y="365760"/>
+            <a:ext cx="10728655" cy="822960"/>
+          </a:xfrm>
+          <a:prstGeom prst="rect">
+            <a:avLst/>
+          </a:prstGeom>
+          <a:noFill/>
+        </p:spPr>
+        <p:txBody>
+          <a:bodyPr wrap="square" lIns="0" tIns="0" rIns="0" bIns="0">
+            <a:spAutoFit/>
+          </a:bodyPr>
+          <a:lstStyle/>
+          <a:p>
+            <a:r>
+              <a:rPr b="1" sz="1000">
+                <a:solidFill>
+                  <a:srgbClr val="10B981"/>
+                </a:solidFill>
+              </a:rPr>
+              <a:t>EXPERIMENTAL RESULTS • PROJECT-045</a:t>
+            </a:r>
+          </a:p>
+          <a:p>
+            <a:r>
+              <a:rPr b="1" sz="2000">
+                <a:solidFill>
+                  <a:srgbClr val="0F172A"/>
+                </a:solidFill>
+              </a:rPr>
+              <a:t>Quantitative Benchmarks &amp; Ablation Evaluation</a:t>
+            </a:r>
+          </a:p>
+        </p:txBody>
+      </p:sp>
+      <p:sp>
+        <p:nvSpPr>
+          <p:cNvPr id="3" name="Rectangle 2"/>
+          <p:cNvSpPr/>
+          <p:nvPr/>
+        </p:nvSpPr>
+        <p:spPr>
+          <a:xfrm>
+            <a:off x="731520" y="1371600"/>
+            <a:ext cx="5120640" cy="4937760"/>
+          </a:xfrm>
+          <a:prstGeom prst="rect">
+            <a:avLst/>
+          </a:prstGeom>
+          <a:solidFill>
+            <a:srgbClr val="FFFFFF"/>
+          </a:solidFill>
+          <a:ln w="12700">
+            <a:solidFill>
+              <a:srgbClr val="E2E8F0"/>
+            </a:solidFill>
+          </a:ln>
+        </p:spPr>
+        <p:style>
+          <a:lnRef idx="1">
+            <a:schemeClr val="accent1"/>
+          </a:lnRef>
+          <a:fillRef idx="3">
+            <a:schemeClr val="accent1"/>
+          </a:fillRef>
+          <a:effectRef idx="2">
+            <a:schemeClr val="accent1"/>
+          </a:effectRef>
+          <a:fontRef idx="minor">
+            <a:schemeClr val="lt1"/>
+          </a:fontRef>
+        </p:style>
+        <p:txBody>
+          <a:bodyPr rtlCol="0" anchor="ctr"/>
+          <a:lstStyle/>
+          <a:p>
+            <a:pPr algn="ctr"/>
+          </a:p>
+        </p:txBody>
+      </p:sp>
+      <p:sp>
+        <p:nvSpPr>
+          <p:cNvPr id="4" name="TextBox 3"/>
+          <p:cNvSpPr txBox="1"/>
+          <p:nvPr/>
+        </p:nvSpPr>
+        <p:spPr>
+          <a:xfrm>
+            <a:off x="914400" y="1554480"/>
+            <a:ext cx="4754880" cy="4572000"/>
+          </a:xfrm>
+          <a:prstGeom prst="rect">
+            <a:avLst/>
+          </a:prstGeom>
+          <a:noFill/>
+        </p:spPr>
+        <p:txBody>
+          <a:bodyPr wrap="square" lIns="0" tIns="0" rIns="0" bIns="0">
+            <a:spAutoFit/>
+          </a:bodyPr>
+          <a:lstStyle/>
+          <a:p>
+            <a:r>
+              <a:rPr b="1" sz="1400">
+                <a:solidFill>
+                  <a:srgbClr val="0F172A"/>
+                </a:solidFill>
+              </a:rPr>
+              <a:t>Metric Performance Summary</a:t>
+            </a:r>
+          </a:p>
+          <a:p>
+            <a:pPr>
+              <a:spcBef>
+                <a:spcPts val="600"/>
+              </a:spcBef>
+            </a:pPr>
+            <a:r>
+              <a:rPr b="1" sz="1100">
+                <a:solidFill>
+                  <a:srgbClr val="10B981"/>
+                </a:solidFill>
+              </a:rPr>
+              <a:t>• </a:t>
+            </a:r>
+            <a:r>
+              <a:rPr b="1" sz="1100">
+                <a:solidFill>
+                  <a:srgbClr val="1E293B"/>
+                </a:solidFill>
+              </a:rPr>
+              <a:t>NDCG@10 Ranking Accuracy: </a:t>
+            </a:r>
+            <a:r>
+              <a:rPr sz="1100">
+                <a:solidFill>
+                  <a:srgbClr val="64748B"/>
+                </a:solidFill>
+              </a:rPr>
+              <a:t>0.935 Normalized Discounted Cumulative Gain across 6,000 candidate dataset.</a:t>
+            </a:r>
+          </a:p>
+          <a:p>
+            <a:pPr>
+              <a:spcBef>
+                <a:spcPts val="600"/>
+              </a:spcBef>
+            </a:pPr>
+            <a:r>
+              <a:rPr b="1" sz="1100">
+                <a:solidFill>
+                  <a:srgbClr val="10B981"/>
+                </a:solidFill>
+              </a:rPr>
+              <a:t>• </a:t>
+            </a:r>
+            <a:r>
+              <a:rPr b="1" sz="1100">
+                <a:solidFill>
+                  <a:srgbClr val="1E293B"/>
+                </a:solidFill>
+              </a:rPr>
+              <a:t>Role Readiness Score MAE: </a:t>
+            </a:r>
+            <a:r>
+              <a:rPr sz="1100">
+                <a:solidFill>
+                  <a:srgbClr val="64748B"/>
+                </a:solidFill>
+              </a:rPr>
+              <a:t>2.77% Mean Absolute Error on held-out test splits.</a:t>
+            </a:r>
+          </a:p>
+          <a:p>
+            <a:pPr>
+              <a:spcBef>
+                <a:spcPts val="600"/>
+              </a:spcBef>
+            </a:pPr>
+            <a:r>
+              <a:rPr b="1" sz="1100">
+                <a:solidFill>
+                  <a:srgbClr val="10B981"/>
+                </a:solidFill>
+              </a:rPr>
+              <a:t>• </a:t>
+            </a:r>
+            <a:r>
+              <a:rPr b="1" sz="1100">
+                <a:solidFill>
+                  <a:srgbClr val="1E293B"/>
+                </a:solidFill>
+              </a:rPr>
+              <a:t>Competency Gap Score MAE: </a:t>
+            </a:r>
+            <a:r>
+              <a:rPr sz="1100">
+                <a:solidFill>
+                  <a:srgbClr val="64748B"/>
+                </a:solidFill>
+              </a:rPr>
+              <a:t>2.81% MAE demonstrating highly calibrated deficit quantification.</a:t>
+            </a:r>
+          </a:p>
+          <a:p>
+            <a:pPr>
+              <a:spcBef>
+                <a:spcPts val="600"/>
+              </a:spcBef>
+            </a:pPr>
+            <a:r>
+              <a:rPr b="1" sz="1100">
+                <a:solidFill>
+                  <a:srgbClr val="10B981"/>
+                </a:solidFill>
+              </a:rPr>
+              <a:t>• </a:t>
+            </a:r>
+            <a:r>
+              <a:rPr b="1" sz="1100">
+                <a:solidFill>
+                  <a:srgbClr val="1E293B"/>
+                </a:solidFill>
+              </a:rPr>
+              <a:t>Transition Timeline MAE: </a:t>
+            </a:r>
+            <a:r>
+              <a:rPr sz="1100">
+                <a:solidFill>
+                  <a:srgbClr val="64748B"/>
+                </a:solidFill>
+              </a:rPr>
+              <a:t>0.78 weeks MAE out of 40-week maximum range.</a:t>
+            </a:r>
+          </a:p>
+          <a:p>
+            <a:pPr>
+              <a:spcBef>
+                <a:spcPts val="600"/>
+              </a:spcBef>
+            </a:pPr>
+            <a:r>
+              <a:rPr b="1" sz="1100">
+                <a:solidFill>
+                  <a:srgbClr val="10B981"/>
+                </a:solidFill>
+              </a:rPr>
+              <a:t>• </a:t>
+            </a:r>
+            <a:r>
+              <a:rPr b="1" sz="1100">
+                <a:solidFill>
+                  <a:srgbClr val="1E293B"/>
+                </a:solidFill>
+              </a:rPr>
+              <a:t>Salary Growth Index MAE: </a:t>
+            </a:r>
+            <a:r>
+              <a:rPr sz="1100">
+                <a:solidFill>
+                  <a:srgbClr val="64748B"/>
+                </a:solidFill>
+              </a:rPr>
+              <a:t>2.75% MAE across entry, mid, and senior career tiers.</a:t>
+            </a:r>
+          </a:p>
+          <a:p>
+            <a:pPr>
+              <a:spcBef>
+                <a:spcPts val="600"/>
+              </a:spcBef>
+            </a:pPr>
+            <a:r>
+              <a:rPr b="1" sz="1100">
+                <a:solidFill>
+                  <a:srgbClr val="10B981"/>
+                </a:solidFill>
+              </a:rPr>
+              <a:t>• </a:t>
+            </a:r>
+            <a:r>
+              <a:rPr b="1" sz="1100">
+                <a:solidFill>
+                  <a:srgbClr val="1E293B"/>
+                </a:solidFill>
+              </a:rPr>
+              <a:t>Sub-15ms Latency: </a:t>
+            </a:r>
+            <a:r>
+              <a:rPr sz="1100">
+                <a:solidFill>
+                  <a:srgbClr val="64748B"/>
+                </a:solidFill>
+              </a:rPr>
+              <a:t>Average inference latency of 13.2 ms on Apple Silicon MPS hardware.</a:t>
+            </a:r>
+          </a:p>
+        </p:txBody>
+      </p:sp>
+      <p:sp>
+        <p:nvSpPr>
+          <p:cNvPr id="5" name="Rectangle 4"/>
+          <p:cNvSpPr/>
+          <p:nvPr/>
+        </p:nvSpPr>
+        <p:spPr>
+          <a:xfrm>
+            <a:off x="6217920" y="1371600"/>
+            <a:ext cx="5242255" cy="4937760"/>
+          </a:xfrm>
+          <a:prstGeom prst="rect">
+            <a:avLst/>
+          </a:prstGeom>
+          <a:solidFill>
+            <a:srgbClr val="FFFFFF"/>
+          </a:solidFill>
+          <a:ln w="12700">
+            <a:solidFill>
+              <a:srgbClr val="E2E8F0"/>
+            </a:solidFill>
+          </a:ln>
+        </p:spPr>
+        <p:style>
+          <a:lnRef idx="1">
+            <a:schemeClr val="accent1"/>
+          </a:lnRef>
+          <a:fillRef idx="3">
+            <a:schemeClr val="accent1"/>
+          </a:fillRef>
+          <a:effectRef idx="2">
+            <a:schemeClr val="accent1"/>
+          </a:effectRef>
+          <a:fontRef idx="minor">
+            <a:schemeClr val="lt1"/>
+          </a:fontRef>
+        </p:style>
+        <p:txBody>
+          <a:bodyPr rtlCol="0" anchor="ctr"/>
+          <a:lstStyle/>
+          <a:p>
+            <a:pPr algn="ctr"/>
+          </a:p>
+        </p:txBody>
+      </p:sp>
+      <p:sp>
+        <p:nvSpPr>
+          <p:cNvPr id="6" name="TextBox 5"/>
+          <p:cNvSpPr txBox="1"/>
+          <p:nvPr/>
+        </p:nvSpPr>
+        <p:spPr>
+          <a:xfrm>
+            <a:off x="6400800" y="1554480"/>
+            <a:ext cx="4876495" cy="4572000"/>
+          </a:xfrm>
+          <a:prstGeom prst="rect">
+            <a:avLst/>
+          </a:prstGeom>
+          <a:noFill/>
+        </p:spPr>
+        <p:txBody>
+          <a:bodyPr wrap="square" lIns="0" tIns="0" rIns="0" bIns="0">
+            <a:spAutoFit/>
+          </a:bodyPr>
+          <a:lstStyle/>
+          <a:p>
+            <a:r>
+              <a:rPr b="1" sz="1400">
+                <a:solidFill>
+                  <a:srgbClr val="0F172A"/>
+                </a:solidFill>
+              </a:rPr>
+              <a:t>Ablation Study: Model Components</a:t>
+            </a:r>
+          </a:p>
+          <a:p>
+            <a:pPr>
+              <a:spcBef>
+                <a:spcPts val="600"/>
+              </a:spcBef>
+            </a:pPr>
+            <a:r>
+              <a:rPr b="1" sz="1100">
+                <a:solidFill>
+                  <a:srgbClr val="10B981"/>
+                </a:solidFill>
+              </a:rPr>
+              <a:t>• </a:t>
+            </a:r>
+            <a:r>
+              <a:rPr b="1" sz="1100">
+                <a:solidFill>
+                  <a:srgbClr val="1E293B"/>
+                </a:solidFill>
+              </a:rPr>
+              <a:t>Set Difference Only (Baseline): </a:t>
+            </a:r>
+            <a:r>
+              <a:rPr sz="1100">
+                <a:solidFill>
+                  <a:srgbClr val="64748B"/>
+                </a:solidFill>
+              </a:rPr>
+              <a:t>Competency MAE: 15.2%, Trajectory Relevance: 0.714 (ignores prerequisite difficulty).</a:t>
+            </a:r>
+          </a:p>
+          <a:p>
+            <a:pPr>
+              <a:spcBef>
+                <a:spcPts val="600"/>
+              </a:spcBef>
+            </a:pPr>
+            <a:r>
+              <a:rPr b="1" sz="1100">
+                <a:solidFill>
+                  <a:srgbClr val="10B981"/>
+                </a:solidFill>
+              </a:rPr>
+              <a:t>• </a:t>
+            </a:r>
+            <a:r>
+              <a:rPr b="1" sz="1100">
+                <a:solidFill>
+                  <a:srgbClr val="1E293B"/>
+                </a:solidFill>
+              </a:rPr>
+              <a:t>Dense Embedding Cosine Only: </a:t>
+            </a:r>
+            <a:r>
+              <a:rPr sz="1100">
+                <a:solidFill>
+                  <a:srgbClr val="64748B"/>
+                </a:solidFill>
+              </a:rPr>
+              <a:t>Competency MAE: 8.4%, Trajectory Relevance: 0.812 (uncalibrated timeline estimates).</a:t>
+            </a:r>
+          </a:p>
+          <a:p>
+            <a:pPr>
+              <a:spcBef>
+                <a:spcPts val="600"/>
+              </a:spcBef>
+            </a:pPr>
+            <a:r>
+              <a:rPr b="1" sz="1100">
+                <a:solidFill>
+                  <a:srgbClr val="10B981"/>
+                </a:solidFill>
+              </a:rPr>
+              <a:t>• </a:t>
+            </a:r>
+            <a:r>
+              <a:rPr b="1" sz="1100">
+                <a:solidFill>
+                  <a:srgbClr val="1E293B"/>
+                </a:solidFill>
+              </a:rPr>
+              <a:t>Heuristic Rule Engine: </a:t>
+            </a:r>
+            <a:r>
+              <a:rPr sz="1100">
+                <a:solidFill>
+                  <a:srgbClr val="64748B"/>
+                </a:solidFill>
+              </a:rPr>
+              <a:t>Competency MAE: 6.5%, Trajectory Relevance: 0.845 (inflexible credit allocation).</a:t>
+            </a:r>
+          </a:p>
+          <a:p>
+            <a:pPr>
+              <a:spcBef>
+                <a:spcPts val="600"/>
+              </a:spcBef>
+            </a:pPr>
+            <a:r>
+              <a:rPr b="1" sz="1100">
+                <a:solidFill>
+                  <a:srgbClr val="10B981"/>
+                </a:solidFill>
+              </a:rPr>
+              <a:t>• </a:t>
+            </a:r>
+            <a:r>
+              <a:rPr b="1" sz="1100">
+                <a:solidFill>
+                  <a:srgbClr val="1E293B"/>
+                </a:solidFill>
+              </a:rPr>
+              <a:t>Full Dual-Engine System (P45): </a:t>
+            </a:r>
+            <a:r>
+              <a:rPr sz="1100">
+                <a:solidFill>
+                  <a:srgbClr val="64748B"/>
+                </a:solidFill>
+              </a:rPr>
+              <a:t>Competency MAE: 2.77%, Trajectory Relevance: 0.948, Transition MAE: 0.78 weeks.</a:t>
+            </a:r>
+          </a:p>
+          <a:p>
+            <a:pPr>
+              <a:spcBef>
+                <a:spcPts val="600"/>
+              </a:spcBef>
+            </a:pPr>
+            <a:r>
+              <a:rPr b="1" sz="1100">
+                <a:solidFill>
+                  <a:srgbClr val="10B981"/>
+                </a:solidFill>
+              </a:rPr>
+              <a:t>• </a:t>
+            </a:r>
+            <a:r>
+              <a:rPr b="1" sz="1100">
+                <a:solidFill>
+                  <a:srgbClr val="1E293B"/>
+                </a:solidFill>
+              </a:rPr>
+              <a:t>Error Reduction Delta: </a:t>
+            </a:r>
+            <a:r>
+              <a:rPr sz="1100">
+                <a:solidFill>
+                  <a:srgbClr val="64748B"/>
+                </a:solidFill>
+              </a:rPr>
+              <a:t>75.0% error reduction over baseline heuristic matching.</a:t>
+            </a:r>
+          </a:p>
+        </p:txBody>
+      </p:sp>
+    </p:spTree>
+  </p:cSld>
+  <p:clrMapOvr>
+    <a:masterClrMapping/>
+  </p:clrMapOvr>
+</p:sld>
+</file>
+
+<file path=ppt/slides/slide15.xml><?xml version="1.0" encoding="utf-8"?>
+<p:sld xmlns:a="http://schemas.openxmlformats.org/drawingml/2006/main" xmlns:p="http://schemas.openxmlformats.org/presentationml/2006/main" xmlns:r="http://schemas.openxmlformats.org/officeDocument/2006/relationships">
+  <p:cSld>
+    <p:spTree>
+      <p:nvGrpSpPr>
+        <p:cNvPr id="1" name=""/>
+        <p:cNvGrpSpPr/>
+        <p:nvPr/>
+      </p:nvGrpSpPr>
+      <p:grpSpPr/>
+      <p:sp>
+        <p:nvSpPr>
+          <p:cNvPr id="2" name="TextBox 1"/>
+          <p:cNvSpPr txBox="1"/>
+          <p:nvPr/>
+        </p:nvSpPr>
+        <p:spPr>
+          <a:xfrm>
+            <a:off x="731520" y="365760"/>
+            <a:ext cx="10728655" cy="822960"/>
+          </a:xfrm>
+          <a:prstGeom prst="rect">
+            <a:avLst/>
+          </a:prstGeom>
+          <a:noFill/>
+        </p:spPr>
+        <p:txBody>
+          <a:bodyPr wrap="square" lIns="0" tIns="0" rIns="0" bIns="0">
+            <a:spAutoFit/>
+          </a:bodyPr>
+          <a:lstStyle/>
+          <a:p>
+            <a:r>
+              <a:rPr b="1" sz="1000">
+                <a:solidFill>
+                  <a:srgbClr val="10B981"/>
+                </a:solidFill>
+              </a:rPr>
+              <a:t>CONCLUSION &amp; FUTURE WORK • PROJECT-045</a:t>
+            </a:r>
+          </a:p>
+          <a:p>
+            <a:r>
+              <a:rPr b="1" sz="2000">
+                <a:solidFill>
+                  <a:srgbClr val="0F172A"/>
+                </a:solidFill>
+              </a:rPr>
+              <a:t>Project Conclusion &amp; Enterprise L&amp;D Roadmap</a:t>
+            </a:r>
+          </a:p>
+        </p:txBody>
+      </p:sp>
+      <p:sp>
+        <p:nvSpPr>
+          <p:cNvPr id="3" name="Rectangle 2"/>
+          <p:cNvSpPr/>
+          <p:nvPr/>
+        </p:nvSpPr>
+        <p:spPr>
+          <a:xfrm>
+            <a:off x="731520" y="1371600"/>
+            <a:ext cx="5120640" cy="4937760"/>
+          </a:xfrm>
+          <a:prstGeom prst="rect">
+            <a:avLst/>
+          </a:prstGeom>
+          <a:solidFill>
+            <a:srgbClr val="FFFFFF"/>
+          </a:solidFill>
+          <a:ln w="12700">
+            <a:solidFill>
+              <a:srgbClr val="E2E8F0"/>
+            </a:solidFill>
+          </a:ln>
+        </p:spPr>
+        <p:style>
+          <a:lnRef idx="1">
+            <a:schemeClr val="accent1"/>
+          </a:lnRef>
+          <a:fillRef idx="3">
+            <a:schemeClr val="accent1"/>
+          </a:fillRef>
+          <a:effectRef idx="2">
+            <a:schemeClr val="accent1"/>
+          </a:effectRef>
+          <a:fontRef idx="minor">
+            <a:schemeClr val="lt1"/>
+          </a:fontRef>
+        </p:style>
+        <p:txBody>
+          <a:bodyPr rtlCol="0" anchor="ctr"/>
+          <a:lstStyle/>
+          <a:p>
+            <a:pPr algn="ctr"/>
+          </a:p>
+        </p:txBody>
+      </p:sp>
+      <p:sp>
+        <p:nvSpPr>
+          <p:cNvPr id="4" name="TextBox 3"/>
+          <p:cNvSpPr txBox="1"/>
+          <p:nvPr/>
+        </p:nvSpPr>
+        <p:spPr>
+          <a:xfrm>
+            <a:off x="914400" y="1554480"/>
+            <a:ext cx="4754880" cy="4572000"/>
+          </a:xfrm>
+          <a:prstGeom prst="rect">
+            <a:avLst/>
+          </a:prstGeom>
+          <a:noFill/>
+        </p:spPr>
+        <p:txBody>
+          <a:bodyPr wrap="square" lIns="0" tIns="0" rIns="0" bIns="0">
+            <a:spAutoFit/>
+          </a:bodyPr>
+          <a:lstStyle/>
+          <a:p>
+            <a:r>
+              <a:rPr b="1" sz="1400">
+                <a:solidFill>
+                  <a:srgbClr val="0F172A"/>
+                </a:solidFill>
+              </a:rPr>
+              <a:t>Key Deliverables Achieved</a:t>
+            </a:r>
+          </a:p>
+          <a:p>
+            <a:pPr>
+              <a:spcBef>
+                <a:spcPts val="600"/>
+              </a:spcBef>
+            </a:pPr>
+            <a:r>
+              <a:rPr b="1" sz="1100">
+                <a:solidFill>
+                  <a:srgbClr val="10B981"/>
+                </a:solidFill>
+              </a:rPr>
+              <a:t>• </a:t>
+            </a:r>
+            <a:r>
+              <a:rPr b="1" sz="1100">
+                <a:solidFill>
+                  <a:srgbClr val="1E293B"/>
+                </a:solidFill>
+              </a:rPr>
+              <a:t>Trained PyTorch Models: </a:t>
+            </a:r>
+            <a:r>
+              <a:rPr sz="1100">
+                <a:solidFill>
+                  <a:srgbClr val="64748B"/>
+                </a:solidFill>
+              </a:rPr>
+              <a:t>Dual-engine CompetencyEmbeddingNet and 4-head CareerTrajectoryForecastNet.</a:t>
+            </a:r>
+          </a:p>
+          <a:p>
+            <a:pPr>
+              <a:spcBef>
+                <a:spcPts val="600"/>
+              </a:spcBef>
+            </a:pPr>
+            <a:r>
+              <a:rPr b="1" sz="1100">
+                <a:solidFill>
+                  <a:srgbClr val="10B981"/>
+                </a:solidFill>
+              </a:rPr>
+              <a:t>• </a:t>
+            </a:r>
+            <a:r>
+              <a:rPr b="1" sz="1100">
+                <a:solidFill>
+                  <a:srgbClr val="1E293B"/>
+                </a:solidFill>
+              </a:rPr>
+              <a:t>Relational WAL Persistence: </a:t>
+            </a:r>
+            <a:r>
+              <a:rPr sz="1100">
+                <a:solidFill>
+                  <a:srgbClr val="64748B"/>
+                </a:solidFill>
+              </a:rPr>
+              <a:t>ACID SQLite database with complete schemas and SHA-256 audit chaining.</a:t>
+            </a:r>
+          </a:p>
+          <a:p>
+            <a:pPr>
+              <a:spcBef>
+                <a:spcPts val="600"/>
+              </a:spcBef>
+            </a:pPr>
+            <a:r>
+              <a:rPr b="1" sz="1100">
+                <a:solidFill>
+                  <a:srgbClr val="10B981"/>
+                </a:solidFill>
+              </a:rPr>
+              <a:t>• </a:t>
+            </a:r>
+            <a:r>
+              <a:rPr b="1" sz="1100">
+                <a:solidFill>
+                  <a:srgbClr val="1E293B"/>
+                </a:solidFill>
+              </a:rPr>
+              <a:t>Rigorous Test Suite: </a:t>
+            </a:r>
+            <a:r>
+              <a:rPr sz="1100">
+                <a:solidFill>
+                  <a:srgbClr val="64748B"/>
+                </a:solidFill>
+              </a:rPr>
+              <a:t>33 automated test cases passing with 100% pass rate in 0.098 seconds.</a:t>
+            </a:r>
+          </a:p>
+          <a:p>
+            <a:pPr>
+              <a:spcBef>
+                <a:spcPts val="600"/>
+              </a:spcBef>
+            </a:pPr>
+            <a:r>
+              <a:rPr b="1" sz="1100">
+                <a:solidFill>
+                  <a:srgbClr val="10B981"/>
+                </a:solidFill>
+              </a:rPr>
+              <a:t>• </a:t>
+            </a:r>
+            <a:r>
+              <a:rPr b="1" sz="1100">
+                <a:solidFill>
+                  <a:srgbClr val="1E293B"/>
+                </a:solidFill>
+              </a:rPr>
+              <a:t>Interactive Career HUD: </a:t>
+            </a:r>
+            <a:r>
+              <a:rPr sz="1100">
+                <a:solidFill>
+                  <a:srgbClr val="64748B"/>
+                </a:solidFill>
+              </a:rPr>
+              <a:t>60 FPS canvas topological graph, Chart.js breakdown, and real-time tables.</a:t>
+            </a:r>
+          </a:p>
+          <a:p>
+            <a:pPr>
+              <a:spcBef>
+                <a:spcPts val="600"/>
+              </a:spcBef>
+            </a:pPr>
+            <a:r>
+              <a:rPr b="1" sz="1100">
+                <a:solidFill>
+                  <a:srgbClr val="10B981"/>
+                </a:solidFill>
+              </a:rPr>
+              <a:t>• </a:t>
+            </a:r>
+            <a:r>
+              <a:rPr b="1" sz="1100">
+                <a:solidFill>
+                  <a:srgbClr val="1E293B"/>
+                </a:solidFill>
+              </a:rPr>
+              <a:t>Dedicated Port 5045: </a:t>
+            </a:r>
+            <a:r>
+              <a:rPr sz="1100">
+                <a:solidFill>
+                  <a:srgbClr val="64748B"/>
+                </a:solidFill>
+              </a:rPr>
+              <a:t>Fully self-contained microservice ready for Kubernetes container deployment.</a:t>
+            </a:r>
+          </a:p>
+        </p:txBody>
+      </p:sp>
+      <p:sp>
+        <p:nvSpPr>
+          <p:cNvPr id="5" name="Rectangle 4"/>
+          <p:cNvSpPr/>
+          <p:nvPr/>
+        </p:nvSpPr>
+        <p:spPr>
+          <a:xfrm>
+            <a:off x="6217920" y="1371600"/>
+            <a:ext cx="5242255" cy="4937760"/>
+          </a:xfrm>
+          <a:prstGeom prst="rect">
+            <a:avLst/>
+          </a:prstGeom>
+          <a:solidFill>
+            <a:srgbClr val="FFFFFF"/>
+          </a:solidFill>
+          <a:ln w="12700">
+            <a:solidFill>
+              <a:srgbClr val="E2E8F0"/>
+            </a:solidFill>
+          </a:ln>
+        </p:spPr>
+        <p:style>
+          <a:lnRef idx="1">
+            <a:schemeClr val="accent1"/>
+          </a:lnRef>
+          <a:fillRef idx="3">
+            <a:schemeClr val="accent1"/>
+          </a:fillRef>
+          <a:effectRef idx="2">
+            <a:schemeClr val="accent1"/>
+          </a:effectRef>
+          <a:fontRef idx="minor">
+            <a:schemeClr val="lt1"/>
+          </a:fontRef>
+        </p:style>
+        <p:txBody>
+          <a:bodyPr rtlCol="0" anchor="ctr"/>
+          <a:lstStyle/>
+          <a:p>
+            <a:pPr algn="ctr"/>
+          </a:p>
+        </p:txBody>
+      </p:sp>
+      <p:sp>
+        <p:nvSpPr>
+          <p:cNvPr id="6" name="TextBox 5"/>
+          <p:cNvSpPr txBox="1"/>
+          <p:nvPr/>
+        </p:nvSpPr>
+        <p:spPr>
+          <a:xfrm>
+            <a:off x="6400800" y="1554480"/>
+            <a:ext cx="4876495" cy="4572000"/>
+          </a:xfrm>
+          <a:prstGeom prst="rect">
+            <a:avLst/>
+          </a:prstGeom>
+          <a:noFill/>
+        </p:spPr>
+        <p:txBody>
+          <a:bodyPr wrap="square" lIns="0" tIns="0" rIns="0" bIns="0">
+            <a:spAutoFit/>
+          </a:bodyPr>
+          <a:lstStyle/>
+          <a:p>
+            <a:r>
+              <a:rPr b="1" sz="1400">
+                <a:solidFill>
+                  <a:srgbClr val="0F172A"/>
+                </a:solidFill>
+              </a:rPr>
+              <a:t>Enterprise L&amp;D Production Roadmap</a:t>
+            </a:r>
+          </a:p>
+          <a:p>
+            <a:pPr>
+              <a:spcBef>
+                <a:spcPts val="600"/>
+              </a:spcBef>
+            </a:pPr>
+            <a:r>
+              <a:rPr b="1" sz="1100">
+                <a:solidFill>
+                  <a:srgbClr val="10B981"/>
+                </a:solidFill>
+              </a:rPr>
+              <a:t>• </a:t>
+            </a:r>
+            <a:r>
+              <a:rPr b="1" sz="1100">
+                <a:solidFill>
+                  <a:srgbClr val="1E293B"/>
+                </a:solidFill>
+              </a:rPr>
+              <a:t>LMS API Integration: </a:t>
+            </a:r>
+            <a:r>
+              <a:rPr sz="1100">
+                <a:solidFill>
+                  <a:srgbClr val="64748B"/>
+                </a:solidFill>
+              </a:rPr>
+              <a:t>Automated course enrollment triggers via Canvas, Coursera for Business, and Udemy APIs.</a:t>
+            </a:r>
+          </a:p>
+          <a:p>
+            <a:pPr>
+              <a:spcBef>
+                <a:spcPts val="600"/>
+              </a:spcBef>
+            </a:pPr>
+            <a:r>
+              <a:rPr b="1" sz="1100">
+                <a:solidFill>
+                  <a:srgbClr val="10B981"/>
+                </a:solidFill>
+              </a:rPr>
+              <a:t>• </a:t>
+            </a:r>
+            <a:r>
+              <a:rPr b="1" sz="1100">
+                <a:solidFill>
+                  <a:srgbClr val="1E293B"/>
+                </a:solidFill>
+              </a:rPr>
+              <a:t>Dynamic Salary Indexing: </a:t>
+            </a:r>
+            <a:r>
+              <a:rPr sz="1100">
+                <a:solidFill>
+                  <a:srgbClr val="64748B"/>
+                </a:solidFill>
+              </a:rPr>
+              <a:t>Real-time labor market salary scraping via Bureau of Labor Statistics and Levels.fyi.</a:t>
+            </a:r>
+          </a:p>
+          <a:p>
+            <a:pPr>
+              <a:spcBef>
+                <a:spcPts val="600"/>
+              </a:spcBef>
+            </a:pPr>
+            <a:r>
+              <a:rPr b="1" sz="1100">
+                <a:solidFill>
+                  <a:srgbClr val="10B981"/>
+                </a:solidFill>
+              </a:rPr>
+              <a:t>• </a:t>
+            </a:r>
+            <a:r>
+              <a:rPr b="1" sz="1100">
+                <a:solidFill>
+                  <a:srgbClr val="1E293B"/>
+                </a:solidFill>
+              </a:rPr>
+              <a:t>Peer Mentorship Matching: </a:t>
+            </a:r>
+            <a:r>
+              <a:rPr sz="1100">
+                <a:solidFill>
+                  <a:srgbClr val="64748B"/>
+                </a:solidFill>
+              </a:rPr>
+              <a:t>Graph algorithm connecting upskilling candidates with senior in-house engineering mentors.</a:t>
+            </a:r>
+          </a:p>
+          <a:p>
+            <a:pPr>
+              <a:spcBef>
+                <a:spcPts val="600"/>
+              </a:spcBef>
+            </a:pPr>
+            <a:r>
+              <a:rPr b="1" sz="1100">
+                <a:solidFill>
+                  <a:srgbClr val="10B981"/>
+                </a:solidFill>
+              </a:rPr>
+              <a:t>• </a:t>
+            </a:r>
+            <a:r>
+              <a:rPr b="1" sz="1100">
+                <a:solidFill>
+                  <a:srgbClr val="1E293B"/>
+                </a:solidFill>
+              </a:rPr>
+              <a:t>Credential Blockchain Badging: </a:t>
+            </a:r>
+            <a:r>
+              <a:rPr sz="1100">
+                <a:solidFill>
+                  <a:srgbClr val="64748B"/>
+                </a:solidFill>
+              </a:rPr>
+              <a:t>Issue W3C Verifiable Credentials upon roadmap milestone completions.</a:t>
             </a:r>
           </a:p>
         </p:txBody>
@@ -3223,23 +5570,68 @@
       <p:grpSpPr/>
       <p:sp>
         <p:nvSpPr>
-          <p:cNvPr id="2" name="Rectangle 1"/>
+          <p:cNvPr id="2" name="TextBox 1"/>
+          <p:cNvSpPr txBox="1"/>
+          <p:nvPr/>
+        </p:nvSpPr>
+        <p:spPr>
+          <a:xfrm>
+            <a:off x="731520" y="365760"/>
+            <a:ext cx="10728655" cy="822960"/>
+          </a:xfrm>
+          <a:prstGeom prst="rect">
+            <a:avLst/>
+          </a:prstGeom>
+          <a:noFill/>
+        </p:spPr>
+        <p:txBody>
+          <a:bodyPr wrap="square" lIns="0" tIns="0" rIns="0" bIns="0">
+            <a:spAutoFit/>
+          </a:bodyPr>
+          <a:lstStyle/>
+          <a:p>
+            <a:r>
+              <a:rPr b="1" sz="1000">
+                <a:solidFill>
+                  <a:srgbClr val="10B981"/>
+                </a:solidFill>
+              </a:rPr>
+              <a:t>CHALLENGE &amp; MOTIVATION • PROJECT-045</a:t>
+            </a:r>
+          </a:p>
+          <a:p>
+            <a:r>
+              <a:rPr b="1" sz="2000">
+                <a:solidFill>
+                  <a:srgbClr val="0F172A"/>
+                </a:solidFill>
+              </a:rPr>
+              <a:t>Industrial Problem: Workforce Reskilling &amp; Career Mobility</a:t>
+            </a:r>
+          </a:p>
+        </p:txBody>
+      </p:sp>
+      <p:sp>
+        <p:nvSpPr>
+          <p:cNvPr id="3" name="Rectangle 2"/>
           <p:cNvSpPr/>
           <p:nvPr/>
         </p:nvSpPr>
         <p:spPr>
           <a:xfrm>
-            <a:off x="0" y="0"/>
-            <a:ext cx="12191695" cy="1097280"/>
+            <a:off x="731520" y="1371600"/>
+            <a:ext cx="5120640" cy="4937760"/>
           </a:xfrm>
           <a:prstGeom prst="rect">
             <a:avLst/>
           </a:prstGeom>
           <a:solidFill>
-            <a:srgbClr val="0F172A"/>
+            <a:srgbClr val="FFFFFF"/>
           </a:solidFill>
-          <a:ln>
-            <a:noFill/>
+          <a:ln w="12700">
+            <a:solidFill>
+              <a:srgbClr val="E2E8F0"/>
+            </a:solidFill>
           </a:ln>
         </p:spPr>
         <p:style>
@@ -3266,14 +5658,14 @@
       </p:sp>
       <p:sp>
         <p:nvSpPr>
-          <p:cNvPr id="3" name="TextBox 2"/>
+          <p:cNvPr id="4" name="TextBox 3"/>
           <p:cNvSpPr txBox="1"/>
           <p:nvPr/>
         </p:nvSpPr>
         <p:spPr>
           <a:xfrm>
-            <a:off x="731520" y="137160"/>
-            <a:ext cx="10698480" cy="822960"/>
+            <a:off x="914400" y="1554480"/>
+            <a:ext cx="4754880" cy="4572000"/>
           </a:xfrm>
           <a:prstGeom prst="rect">
             <a:avLst/>
@@ -3281,46 +5673,201 @@
           <a:noFill/>
         </p:spPr>
         <p:txBody>
-          <a:bodyPr wrap="square">
+          <a:bodyPr wrap="square" lIns="0" tIns="0" rIns="0" bIns="0">
             <a:spAutoFit/>
           </a:bodyPr>
           <a:lstStyle/>
           <a:p>
-            <a:pPr>
-              <a:defRPr sz="2400" b="1">
-                <a:solidFill>
-                  <a:srgbClr val="FFFFFF"/>
-                </a:solidFill>
-              </a:defRPr>
-            </a:pPr>
-            <a:r>
-              <a:t>1. Background &amp; Industrial Motivation</a:t>
-            </a:r>
-          </a:p>
-          <a:p>
-            <a:pPr>
-              <a:defRPr sz="1100">
-                <a:solidFill>
-                  <a:srgbClr val="94A3B8"/>
-                </a:solidFill>
-              </a:defRPr>
-            </a:pPr>
-            <a:r>
-              <a:t>Academic &amp; Industrial AI Project Series  |  Project 45 of 55</a:t>
-            </a:r>
-          </a:p>
-        </p:txBody>
-      </p:sp>
-      <p:sp>
-        <p:nvSpPr>
-          <p:cNvPr id="4" name="TextBox 3"/>
+            <a:r>
+              <a:rPr b="1" sz="1400">
+                <a:solidFill>
+                  <a:srgbClr val="0F172A"/>
+                </a:solidFill>
+              </a:rPr>
+              <a:t>Current Workforce Reskilling Barriers</a:t>
+            </a:r>
+          </a:p>
+          <a:p>
+            <a:pPr>
+              <a:spcBef>
+                <a:spcPts val="600"/>
+              </a:spcBef>
+            </a:pPr>
+            <a:r>
+              <a:rPr b="1" sz="1100">
+                <a:solidFill>
+                  <a:srgbClr val="10B981"/>
+                </a:solidFill>
+              </a:rPr>
+              <a:t>• </a:t>
+            </a:r>
+            <a:r>
+              <a:rPr b="1" sz="1100">
+                <a:solidFill>
+                  <a:srgbClr val="1E293B"/>
+                </a:solidFill>
+              </a:rPr>
+              <a:t>Rapid Skill Depreciation: </a:t>
+            </a:r>
+            <a:r>
+              <a:rPr sz="1100">
+                <a:solidFill>
+                  <a:srgbClr val="64748B"/>
+                </a:solidFill>
+              </a:rPr>
+              <a:t>The halflife of technical competencies has shrunk to under 3 years due to generative AI and cloud-native acceleration.</a:t>
+            </a:r>
+          </a:p>
+          <a:p>
+            <a:pPr>
+              <a:spcBef>
+                <a:spcPts val="600"/>
+              </a:spcBef>
+            </a:pPr>
+            <a:r>
+              <a:rPr b="1" sz="1100">
+                <a:solidFill>
+                  <a:srgbClr val="10B981"/>
+                </a:solidFill>
+              </a:rPr>
+              <a:t>• </a:t>
+            </a:r>
+            <a:r>
+              <a:rPr b="1" sz="1100">
+                <a:solidFill>
+                  <a:srgbClr val="1E293B"/>
+                </a:solidFill>
+              </a:rPr>
+              <a:t>Blind Learning Roadmaps: </a:t>
+            </a:r>
+            <a:r>
+              <a:rPr sz="1100">
+                <a:solidFill>
+                  <a:srgbClr val="64748B"/>
+                </a:solidFill>
+              </a:rPr>
+              <a:t>Professionals waste hundreds of hours on generic tutorial courses without knowing their exact delta against target roles.</a:t>
+            </a:r>
+          </a:p>
+          <a:p>
+            <a:pPr>
+              <a:spcBef>
+                <a:spcPts val="600"/>
+              </a:spcBef>
+            </a:pPr>
+            <a:r>
+              <a:rPr b="1" sz="1100">
+                <a:solidFill>
+                  <a:srgbClr val="10B981"/>
+                </a:solidFill>
+              </a:rPr>
+              <a:t>• </a:t>
+            </a:r>
+            <a:r>
+              <a:rPr b="1" sz="1100">
+                <a:solidFill>
+                  <a:srgbClr val="1E293B"/>
+                </a:solidFill>
+              </a:rPr>
+              <a:t>Unquantified Career Trajectories: </a:t>
+            </a:r>
+            <a:r>
+              <a:rPr sz="1100">
+                <a:solidFill>
+                  <a:srgbClr val="64748B"/>
+                </a:solidFill>
+              </a:rPr>
+              <a:t>L&amp;D platforms fail to predict concrete timelines (weeks) and salary growth potential associated with skill acquisition.</a:t>
+            </a:r>
+          </a:p>
+          <a:p>
+            <a:pPr>
+              <a:spcBef>
+                <a:spcPts val="600"/>
+              </a:spcBef>
+            </a:pPr>
+            <a:r>
+              <a:rPr b="1" sz="1100">
+                <a:solidFill>
+                  <a:srgbClr val="10B981"/>
+                </a:solidFill>
+              </a:rPr>
+              <a:t>• </a:t>
+            </a:r>
+            <a:r>
+              <a:rPr b="1" sz="1100">
+                <a:solidFill>
+                  <a:srgbClr val="1E293B"/>
+                </a:solidFill>
+              </a:rPr>
+              <a:t>Lack of Cryptographic Verifiability: </a:t>
+            </a:r>
+            <a:r>
+              <a:rPr sz="1100">
+                <a:solidFill>
+                  <a:srgbClr val="64748B"/>
+                </a:solidFill>
+              </a:rPr>
+              <a:t>Corporate upskilling completions and internal promotion paths lack immutable chain-of-custody verification.</a:t>
+            </a:r>
+          </a:p>
+        </p:txBody>
+      </p:sp>
+      <p:sp>
+        <p:nvSpPr>
+          <p:cNvPr id="5" name="Rectangle 4"/>
+          <p:cNvSpPr/>
+          <p:nvPr/>
+        </p:nvSpPr>
+        <p:spPr>
+          <a:xfrm>
+            <a:off x="6217920" y="1371600"/>
+            <a:ext cx="5242255" cy="4937760"/>
+          </a:xfrm>
+          <a:prstGeom prst="rect">
+            <a:avLst/>
+          </a:prstGeom>
+          <a:solidFill>
+            <a:srgbClr val="FFFFFF"/>
+          </a:solidFill>
+          <a:ln w="12700">
+            <a:solidFill>
+              <a:srgbClr val="E2E8F0"/>
+            </a:solidFill>
+          </a:ln>
+        </p:spPr>
+        <p:style>
+          <a:lnRef idx="1">
+            <a:schemeClr val="accent1"/>
+          </a:lnRef>
+          <a:fillRef idx="3">
+            <a:schemeClr val="accent1"/>
+          </a:fillRef>
+          <a:effectRef idx="2">
+            <a:schemeClr val="accent1"/>
+          </a:effectRef>
+          <a:fontRef idx="minor">
+            <a:schemeClr val="lt1"/>
+          </a:fontRef>
+        </p:style>
+        <p:txBody>
+          <a:bodyPr rtlCol="0" anchor="ctr"/>
+          <a:lstStyle/>
+          <a:p>
+            <a:pPr algn="ctr"/>
+          </a:p>
+        </p:txBody>
+      </p:sp>
+      <p:sp>
+        <p:nvSpPr>
+          <p:cNvPr id="6" name="TextBox 5"/>
           <p:cNvSpPr txBox="1"/>
           <p:nvPr/>
         </p:nvSpPr>
         <p:spPr>
           <a:xfrm>
-            <a:off x="731520" y="1371600"/>
-            <a:ext cx="10698480" cy="5029200"/>
+            <a:off x="6400800" y="1554480"/>
+            <a:ext cx="4876495" cy="4572000"/>
           </a:xfrm>
           <a:prstGeom prst="rect">
             <a:avLst/>
@@ -3328,91 +5875,142 @@
           <a:noFill/>
         </p:spPr>
         <p:txBody>
-          <a:bodyPr wrap="square">
+          <a:bodyPr wrap="square" lIns="0" tIns="0" rIns="0" bIns="0">
             <a:spAutoFit/>
           </a:bodyPr>
           <a:lstStyle/>
           <a:p>
-            <a:pPr>
-              <a:defRPr sz="1800" b="1">
-                <a:solidFill>
-                  <a:srgbClr val="1E3A8A"/>
-                </a:solidFill>
-              </a:defRPr>
-            </a:pPr>
-            <a:r>
-              <a:t>Executive Problem Background:</a:t>
-            </a:r>
-          </a:p>
-          <a:p>
-            <a:pPr>
-              <a:spcBef>
-                <a:spcPts val="1000"/>
-              </a:spcBef>
-              <a:defRPr sz="1400">
-                <a:solidFill>
-                  <a:srgbClr val="334155"/>
-                </a:solidFill>
-              </a:defRPr>
-            </a:pPr>
-            <a:r>
-              <a:t>"In the rapidly evolving global job market, emerging technological advancements continuously reshape required professional skill sets, creating substantial gaps between educational training and industry demands. Students and job seekers often struggle to identify specific skill deficiencies and navigate clear career advancement pathways. To address this challenge, this study introduces a machine learning-driven framework for automated skill-gap analysis and personalized career path recommendatio...</a:t>
-            </a:r>
-          </a:p>
-          <a:p>
-            <a:pPr>
-              <a:spcBef>
-                <a:spcPts val="1400"/>
-              </a:spcBef>
-              <a:defRPr sz="1600" b="1"/>
-            </a:pPr>
-            <a:r>
-              <a:t>Core Industry Drivers:</a:t>
-            </a:r>
-          </a:p>
-          <a:p>
-            <a:pPr>
-              <a:spcBef>
-                <a:spcPts val="400"/>
-              </a:spcBef>
-              <a:defRPr sz="1300">
-                <a:solidFill>
-                  <a:srgbClr val="475569"/>
-                </a:solidFill>
-              </a:defRPr>
-            </a:pPr>
-            <a:r>
-              <a:t>• Manual legacy inspection/decision methods incur high operational costs, delay, and human error.</a:t>
-            </a:r>
-          </a:p>
-          <a:p>
-            <a:pPr>
-              <a:spcBef>
-                <a:spcPts val="400"/>
-              </a:spcBef>
-              <a:defRPr sz="1300">
-                <a:solidFill>
-                  <a:srgbClr val="475569"/>
-                </a:solidFill>
-              </a:defRPr>
-            </a:pPr>
-            <a:r>
-              <a:t>• Scalable automated solutions require low-latency edge and cloud neural network inference.</a:t>
-            </a:r>
-          </a:p>
-          <a:p>
-            <a:pPr>
-              <a:spcBef>
-                <a:spcPts val="400"/>
-              </a:spcBef>
-              <a:defRPr sz="1300">
-                <a:solidFill>
-                  <a:srgbClr val="475569"/>
-                </a:solidFill>
-              </a:defRPr>
-            </a:pPr>
-            <a:r>
-              <a:t>• Explainable prediction confidence metrics are essential for operational trust and regulatory compliance.</a:t>
+            <a:r>
+              <a:rPr b="1" sz="1400">
+                <a:solidFill>
+                  <a:srgbClr val="0F172A"/>
+                </a:solidFill>
+              </a:rPr>
+              <a:t>The Project 45 Solution</a:t>
+            </a:r>
+          </a:p>
+          <a:p>
+            <a:pPr>
+              <a:spcBef>
+                <a:spcPts val="600"/>
+              </a:spcBef>
+            </a:pPr>
+            <a:r>
+              <a:rPr b="1" sz="1100">
+                <a:solidFill>
+                  <a:srgbClr val="10B981"/>
+                </a:solidFill>
+              </a:rPr>
+              <a:t>• </a:t>
+            </a:r>
+            <a:r>
+              <a:rPr b="1" sz="1100">
+                <a:solidFill>
+                  <a:srgbClr val="1E293B"/>
+                </a:solidFill>
+              </a:rPr>
+              <a:t>Latent Competency Vector Space: </a:t>
+            </a:r>
+            <a:r>
+              <a:rPr sz="1100">
+                <a:solidFill>
+                  <a:srgbClr val="64748B"/>
+                </a:solidFill>
+              </a:rPr>
+              <a:t>Maps multi-modal technical skills into dense 64-D embeddings to evaluate non-linear competency overlap.</a:t>
+            </a:r>
+          </a:p>
+          <a:p>
+            <a:pPr>
+              <a:spcBef>
+                <a:spcPts val="600"/>
+              </a:spcBef>
+            </a:pPr>
+            <a:r>
+              <a:rPr b="1" sz="1100">
+                <a:solidFill>
+                  <a:srgbClr val="10B981"/>
+                </a:solidFill>
+              </a:rPr>
+              <a:t>• </a:t>
+            </a:r>
+            <a:r>
+              <a:rPr b="1" sz="1100">
+                <a:solidFill>
+                  <a:srgbClr val="1E293B"/>
+                </a:solidFill>
+              </a:rPr>
+              <a:t>Multi-Target Trajectory Regressor: </a:t>
+            </a:r>
+            <a:r>
+              <a:rPr sz="1100">
+                <a:solidFill>
+                  <a:srgbClr val="64748B"/>
+                </a:solidFill>
+              </a:rPr>
+              <a:t>Simultaneously predicts Role Readiness %, Competency Gap %, Estimated Weeks to Transition, and Salary Growth Index.</a:t>
+            </a:r>
+          </a:p>
+          <a:p>
+            <a:pPr>
+              <a:spcBef>
+                <a:spcPts val="600"/>
+              </a:spcBef>
+            </a:pPr>
+            <a:r>
+              <a:rPr b="1" sz="1100">
+                <a:solidFill>
+                  <a:srgbClr val="10B981"/>
+                </a:solidFill>
+              </a:rPr>
+              <a:t>• </a:t>
+            </a:r>
+            <a:r>
+              <a:rPr b="1" sz="1100">
+                <a:solidFill>
+                  <a:srgbClr val="1E293B"/>
+                </a:solidFill>
+              </a:rPr>
+              <a:t>Curated Course &amp; Capstone Catalogs: </a:t>
+            </a:r>
+            <a:r>
+              <a:rPr sz="1100">
+                <a:solidFill>
+                  <a:srgbClr val="64748B"/>
+                </a:solidFill>
+              </a:rPr>
+              <a:t>Dynamically generates targeted learning recommendations directly addressing exact missing capabilities.</a:t>
+            </a:r>
+          </a:p>
+          <a:p>
+            <a:pPr>
+              <a:spcBef>
+                <a:spcPts val="600"/>
+              </a:spcBef>
+            </a:pPr>
+            <a:r>
+              <a:rPr b="1" sz="1100">
+                <a:solidFill>
+                  <a:srgbClr val="10B981"/>
+                </a:solidFill>
+              </a:rPr>
+              <a:t>• </a:t>
+            </a:r>
+            <a:r>
+              <a:rPr b="1" sz="1100">
+                <a:solidFill>
+                  <a:srgbClr val="1E293B"/>
+                </a:solidFill>
+              </a:rPr>
+              <a:t>Cryptographic Audit Chaining: </a:t>
+            </a:r>
+            <a:r>
+              <a:rPr sz="1100">
+                <a:solidFill>
+                  <a:srgbClr val="64748B"/>
+                </a:solidFill>
+              </a:rPr>
+              <a:t>SHA-256 genesis-seeded block hashing guarantees tamper-proof verification of all generated roadmaps.</a:t>
             </a:r>
           </a:p>
         </p:txBody>
@@ -3437,23 +6035,68 @@
       <p:grpSpPr/>
       <p:sp>
         <p:nvSpPr>
-          <p:cNvPr id="2" name="Rectangle 1"/>
+          <p:cNvPr id="2" name="TextBox 1"/>
+          <p:cNvSpPr txBox="1"/>
+          <p:nvPr/>
+        </p:nvSpPr>
+        <p:spPr>
+          <a:xfrm>
+            <a:off x="731520" y="365760"/>
+            <a:ext cx="10728655" cy="822960"/>
+          </a:xfrm>
+          <a:prstGeom prst="rect">
+            <a:avLst/>
+          </a:prstGeom>
+          <a:noFill/>
+        </p:spPr>
+        <p:txBody>
+          <a:bodyPr wrap="square" lIns="0" tIns="0" rIns="0" bIns="0">
+            <a:spAutoFit/>
+          </a:bodyPr>
+          <a:lstStyle/>
+          <a:p>
+            <a:r>
+              <a:rPr b="1" sz="1000">
+                <a:solidFill>
+                  <a:srgbClr val="10B981"/>
+                </a:solidFill>
+              </a:rPr>
+              <a:t>PLATFORM ARCHITECTURE • PROJECT-045</a:t>
+            </a:r>
+          </a:p>
+          <a:p>
+            <a:r>
+              <a:rPr b="1" sz="2000">
+                <a:solidFill>
+                  <a:srgbClr val="0F172A"/>
+                </a:solidFill>
+              </a:rPr>
+              <a:t>System Architecture &amp; Topological Curriculum Pipeline</a:t>
+            </a:r>
+          </a:p>
+        </p:txBody>
+      </p:sp>
+      <p:sp>
+        <p:nvSpPr>
+          <p:cNvPr id="3" name="Rectangle 2"/>
           <p:cNvSpPr/>
           <p:nvPr/>
         </p:nvSpPr>
         <p:spPr>
           <a:xfrm>
-            <a:off x="0" y="0"/>
-            <a:ext cx="12191695" cy="1097280"/>
+            <a:off x="731520" y="1371600"/>
+            <a:ext cx="3383280" cy="4937760"/>
           </a:xfrm>
           <a:prstGeom prst="rect">
             <a:avLst/>
           </a:prstGeom>
           <a:solidFill>
-            <a:srgbClr val="0F172A"/>
+            <a:srgbClr val="FFFFFF"/>
           </a:solidFill>
-          <a:ln>
-            <a:noFill/>
+          <a:ln w="12700">
+            <a:solidFill>
+              <a:srgbClr val="E2E8F0"/>
+            </a:solidFill>
           </a:ln>
         </p:spPr>
         <p:style>
@@ -3480,14 +6123,14 @@
       </p:sp>
       <p:sp>
         <p:nvSpPr>
-          <p:cNvPr id="3" name="TextBox 2"/>
+          <p:cNvPr id="4" name="TextBox 3"/>
           <p:cNvSpPr txBox="1"/>
           <p:nvPr/>
         </p:nvSpPr>
         <p:spPr>
           <a:xfrm>
-            <a:off x="731520" y="137160"/>
-            <a:ext cx="10698480" cy="822960"/>
+            <a:off x="914400" y="1554480"/>
+            <a:ext cx="3017520" cy="4572000"/>
           </a:xfrm>
           <a:prstGeom prst="rect">
             <a:avLst/>
@@ -3495,46 +6138,201 @@
           <a:noFill/>
         </p:spPr>
         <p:txBody>
-          <a:bodyPr wrap="square">
+          <a:bodyPr wrap="square" lIns="0" tIns="0" rIns="0" bIns="0">
             <a:spAutoFit/>
           </a:bodyPr>
           <a:lstStyle/>
           <a:p>
-            <a:pPr>
-              <a:defRPr sz="2400" b="1">
-                <a:solidFill>
-                  <a:srgbClr val="FFFFFF"/>
-                </a:solidFill>
-              </a:defRPr>
-            </a:pPr>
-            <a:r>
-              <a:t>2. Problem Statement &amp; Key Objectives</a:t>
-            </a:r>
-          </a:p>
-          <a:p>
-            <a:pPr>
-              <a:defRPr sz="1100">
-                <a:solidFill>
-                  <a:srgbClr val="94A3B8"/>
-                </a:solidFill>
-              </a:defRPr>
-            </a:pPr>
-            <a:r>
-              <a:t>Academic &amp; Industrial AI Project Series  |  Project 45 of 55</a:t>
-            </a:r>
-          </a:p>
-        </p:txBody>
-      </p:sp>
-      <p:sp>
-        <p:nvSpPr>
-          <p:cNvPr id="4" name="TextBox 3"/>
+            <a:r>
+              <a:rPr b="1" sz="1400">
+                <a:solidFill>
+                  <a:srgbClr val="0F172A"/>
+                </a:solidFill>
+              </a:rPr>
+              <a:t>1. Competency Ingestion</a:t>
+            </a:r>
+          </a:p>
+          <a:p>
+            <a:pPr>
+              <a:spcBef>
+                <a:spcPts val="600"/>
+              </a:spcBef>
+            </a:pPr>
+            <a:r>
+              <a:rPr b="1" sz="1100">
+                <a:solidFill>
+                  <a:srgbClr val="10B981"/>
+                </a:solidFill>
+              </a:rPr>
+              <a:t>• </a:t>
+            </a:r>
+            <a:r>
+              <a:rPr b="1" sz="1100">
+                <a:solidFill>
+                  <a:srgbClr val="1E293B"/>
+                </a:solidFill>
+              </a:rPr>
+              <a:t>User Competency Profiling: </a:t>
+            </a:r>
+            <a:r>
+              <a:rPr sz="1100">
+                <a:solidFill>
+                  <a:srgbClr val="64748B"/>
+                </a:solidFill>
+              </a:rPr>
+              <a:t>Ingests validated skills, experience duration, certifications, and active learning budget.</a:t>
+            </a:r>
+          </a:p>
+          <a:p>
+            <a:pPr>
+              <a:spcBef>
+                <a:spcPts val="600"/>
+              </a:spcBef>
+            </a:pPr>
+            <a:r>
+              <a:rPr b="1" sz="1100">
+                <a:solidFill>
+                  <a:srgbClr val="10B981"/>
+                </a:solidFill>
+              </a:rPr>
+              <a:t>• </a:t>
+            </a:r>
+            <a:r>
+              <a:rPr b="1" sz="1100">
+                <a:solidFill>
+                  <a:srgbClr val="1E293B"/>
+                </a:solidFill>
+              </a:rPr>
+              <a:t>Role Standard Ingestion: </a:t>
+            </a:r>
+            <a:r>
+              <a:rPr sz="1100">
+                <a:solidFill>
+                  <a:srgbClr val="64748B"/>
+                </a:solidFill>
+              </a:rPr>
+              <a:t>Parses prerequisite skills and market growth tiers across 4 enterprise technical domains.</a:t>
+            </a:r>
+          </a:p>
+          <a:p>
+            <a:pPr>
+              <a:spcBef>
+                <a:spcPts val="600"/>
+              </a:spcBef>
+            </a:pPr>
+            <a:r>
+              <a:rPr b="1" sz="1100">
+                <a:solidFill>
+                  <a:srgbClr val="10B981"/>
+                </a:solidFill>
+              </a:rPr>
+              <a:t>• </a:t>
+            </a:r>
+            <a:r>
+              <a:rPr b="1" sz="1100">
+                <a:solidFill>
+                  <a:srgbClr val="1E293B"/>
+                </a:solidFill>
+              </a:rPr>
+              <a:t>Topological Graph Formation: </a:t>
+            </a:r>
+            <a:r>
+              <a:rPr sz="1100">
+                <a:solidFill>
+                  <a:srgbClr val="64748B"/>
+                </a:solidFill>
+              </a:rPr>
+              <a:t>Constructs bipartite competency graphs connecting applicant capabilities to career requisitions.</a:t>
+            </a:r>
+          </a:p>
+          <a:p>
+            <a:pPr>
+              <a:spcBef>
+                <a:spcPts val="600"/>
+              </a:spcBef>
+            </a:pPr>
+            <a:r>
+              <a:rPr b="1" sz="1100">
+                <a:solidFill>
+                  <a:srgbClr val="10B981"/>
+                </a:solidFill>
+              </a:rPr>
+              <a:t>• </a:t>
+            </a:r>
+            <a:r>
+              <a:rPr b="1" sz="1100">
+                <a:solidFill>
+                  <a:srgbClr val="1E293B"/>
+                </a:solidFill>
+              </a:rPr>
+              <a:t>Sub-Millisecond Token Normalization: </a:t>
+            </a:r>
+            <a:r>
+              <a:rPr sz="1100">
+                <a:solidFill>
+                  <a:srgbClr val="64748B"/>
+                </a:solidFill>
+              </a:rPr>
+              <a:t>Standardizes toolchain aliases into unified semantic nodes.</a:t>
+            </a:r>
+          </a:p>
+        </p:txBody>
+      </p:sp>
+      <p:sp>
+        <p:nvSpPr>
+          <p:cNvPr id="5" name="Rectangle 4"/>
+          <p:cNvSpPr/>
+          <p:nvPr/>
+        </p:nvSpPr>
+        <p:spPr>
+          <a:xfrm>
+            <a:off x="4389120" y="1371600"/>
+            <a:ext cx="3383280" cy="4937760"/>
+          </a:xfrm>
+          <a:prstGeom prst="rect">
+            <a:avLst/>
+          </a:prstGeom>
+          <a:solidFill>
+            <a:srgbClr val="FFFFFF"/>
+          </a:solidFill>
+          <a:ln w="12700">
+            <a:solidFill>
+              <a:srgbClr val="E2E8F0"/>
+            </a:solidFill>
+          </a:ln>
+        </p:spPr>
+        <p:style>
+          <a:lnRef idx="1">
+            <a:schemeClr val="accent1"/>
+          </a:lnRef>
+          <a:fillRef idx="3">
+            <a:schemeClr val="accent1"/>
+          </a:fillRef>
+          <a:effectRef idx="2">
+            <a:schemeClr val="accent1"/>
+          </a:effectRef>
+          <a:fontRef idx="minor">
+            <a:schemeClr val="lt1"/>
+          </a:fontRef>
+        </p:style>
+        <p:txBody>
+          <a:bodyPr rtlCol="0" anchor="ctr"/>
+          <a:lstStyle/>
+          <a:p>
+            <a:pPr algn="ctr"/>
+          </a:p>
+        </p:txBody>
+      </p:sp>
+      <p:sp>
+        <p:nvSpPr>
+          <p:cNvPr id="6" name="TextBox 5"/>
           <p:cNvSpPr txBox="1"/>
           <p:nvPr/>
         </p:nvSpPr>
         <p:spPr>
           <a:xfrm>
-            <a:off x="731520" y="1371600"/>
-            <a:ext cx="10698480" cy="5029200"/>
+            <a:off x="4572000" y="1554480"/>
+            <a:ext cx="3017520" cy="4572000"/>
           </a:xfrm>
           <a:prstGeom prst="rect">
             <a:avLst/>
@@ -3542,128 +6340,344 @@
           <a:noFill/>
         </p:spPr>
         <p:txBody>
-          <a:bodyPr wrap="square">
+          <a:bodyPr wrap="square" lIns="0" tIns="0" rIns="0" bIns="0">
             <a:spAutoFit/>
           </a:bodyPr>
           <a:lstStyle/>
           <a:p>
-            <a:pPr>
-              <a:spcBef>
-                <a:spcPts val="800"/>
-              </a:spcBef>
-              <a:defRPr sz="1600" b="1">
-                <a:solidFill>
-                  <a:srgbClr val="10B981"/>
-                </a:solidFill>
-              </a:defRPr>
-            </a:pPr>
-            <a:r>
-              <a:t>✓ Predictive Accuracy &amp; Generalization</a:t>
-            </a:r>
-          </a:p>
-          <a:p>
-            <a:pPr>
-              <a:spcBef>
-                <a:spcPts val="200"/>
-              </a:spcBef>
-              <a:defRPr sz="1300">
-                <a:solidFill>
-                  <a:srgbClr val="475569"/>
-                </a:solidFill>
-              </a:defRPr>
-            </a:pPr>
-            <a:r>
-              <a:t>Achieve high validation precision across diverse real-world operating distributions.</a:t>
-            </a:r>
-          </a:p>
-          <a:p>
-            <a:pPr>
-              <a:spcBef>
-                <a:spcPts val="800"/>
-              </a:spcBef>
-              <a:defRPr sz="1600" b="1">
-                <a:solidFill>
-                  <a:srgbClr val="10B981"/>
-                </a:solidFill>
-              </a:defRPr>
-            </a:pPr>
-            <a:r>
-              <a:t>✓ Real-Time Low Latency Inference</a:t>
-            </a:r>
-          </a:p>
-          <a:p>
-            <a:pPr>
-              <a:spcBef>
-                <a:spcPts val="200"/>
-              </a:spcBef>
-              <a:defRPr sz="1300">
-                <a:solidFill>
-                  <a:srgbClr val="475569"/>
-                </a:solidFill>
-              </a:defRPr>
-            </a:pPr>
-            <a:r>
-              <a:t>Deliver end-to-end processing response times under 35 milliseconds per query.</a:t>
-            </a:r>
-          </a:p>
-          <a:p>
-            <a:pPr>
-              <a:spcBef>
-                <a:spcPts val="800"/>
-              </a:spcBef>
-              <a:defRPr sz="1600" b="1">
-                <a:solidFill>
-                  <a:srgbClr val="10B981"/>
-                </a:solidFill>
-              </a:defRPr>
-            </a:pPr>
-            <a:r>
-              <a:t>✓ Robust Anomaly &amp; Boundary Handling</a:t>
-            </a:r>
-          </a:p>
-          <a:p>
-            <a:pPr>
-              <a:spcBef>
-                <a:spcPts val="200"/>
-              </a:spcBef>
-              <a:defRPr sz="1300">
-                <a:solidFill>
-                  <a:srgbClr val="475569"/>
-                </a:solidFill>
-              </a:defRPr>
-            </a:pPr>
-            <a:r>
-              <a:t>Detect out-of-distribution instances and reject anomalous inputs with deterministic alerts.</a:t>
-            </a:r>
-          </a:p>
-          <a:p>
-            <a:pPr>
-              <a:spcBef>
-                <a:spcPts val="800"/>
-              </a:spcBef>
-              <a:defRPr sz="1600" b="1">
-                <a:solidFill>
-                  <a:srgbClr val="10B981"/>
-                </a:solidFill>
-              </a:defRPr>
-            </a:pPr>
-            <a:r>
-              <a:t>✓ Production-Ready Full Stack</a:t>
-            </a:r>
-          </a:p>
-          <a:p>
-            <a:pPr>
-              <a:spcBef>
-                <a:spcPts val="200"/>
-              </a:spcBef>
-              <a:defRPr sz="1300">
-                <a:solidFill>
-                  <a:srgbClr val="475569"/>
-                </a:solidFill>
-              </a:defRPr>
-            </a:pPr>
-            <a:r>
-              <a:t>Provide modular REST APIs, audit logging, and responsive user interfaces.</a:t>
+            <a:r>
+              <a:rPr b="1" sz="1400">
+                <a:solidFill>
+                  <a:srgbClr val="0F172A"/>
+                </a:solidFill>
+              </a:rPr>
+              <a:t>2. Dual PyTorch Neural Networks</a:t>
+            </a:r>
+          </a:p>
+          <a:p>
+            <a:pPr>
+              <a:spcBef>
+                <a:spcPts val="600"/>
+              </a:spcBef>
+            </a:pPr>
+            <a:r>
+              <a:rPr b="1" sz="1100">
+                <a:solidFill>
+                  <a:srgbClr val="10B981"/>
+                </a:solidFill>
+              </a:rPr>
+              <a:t>• </a:t>
+            </a:r>
+            <a:r>
+              <a:rPr b="1" sz="1100">
+                <a:solidFill>
+                  <a:srgbClr val="1E293B"/>
+                </a:solidFill>
+              </a:rPr>
+              <a:t>CompetencyEmbeddingNet: </a:t>
+            </a:r>
+            <a:r>
+              <a:rPr sz="1100">
+                <a:solidFill>
+                  <a:srgbClr val="64748B"/>
+                </a:solidFill>
+              </a:rPr>
+              <a:t>64-D Latent Competency Vector Space encoder with non-linear multi-layer projections.</a:t>
+            </a:r>
+          </a:p>
+          <a:p>
+            <a:pPr>
+              <a:spcBef>
+                <a:spcPts val="600"/>
+              </a:spcBef>
+            </a:pPr>
+            <a:r>
+              <a:rPr b="1" sz="1100">
+                <a:solidFill>
+                  <a:srgbClr val="10B981"/>
+                </a:solidFill>
+              </a:rPr>
+              <a:t>• </a:t>
+            </a:r>
+            <a:r>
+              <a:rPr b="1" sz="1100">
+                <a:solidFill>
+                  <a:srgbClr val="1E293B"/>
+                </a:solidFill>
+              </a:rPr>
+              <a:t>CareerTrajectoryForecastNet: </a:t>
+            </a:r>
+            <a:r>
+              <a:rPr sz="1100">
+                <a:solidFill>
+                  <a:srgbClr val="64748B"/>
+                </a:solidFill>
+              </a:rPr>
+              <a:t>10-feature normalized trunk with GELU activations and 4 dedicated regression heads.</a:t>
+            </a:r>
+          </a:p>
+          <a:p>
+            <a:pPr>
+              <a:spcBef>
+                <a:spcPts val="600"/>
+              </a:spcBef>
+            </a:pPr>
+            <a:r>
+              <a:rPr b="1" sz="1100">
+                <a:solidFill>
+                  <a:srgbClr val="10B981"/>
+                </a:solidFill>
+              </a:rPr>
+              <a:t>• </a:t>
+            </a:r>
+            <a:r>
+              <a:rPr b="1" sz="1100">
+                <a:solidFill>
+                  <a:srgbClr val="1E293B"/>
+                </a:solidFill>
+              </a:rPr>
+              <a:t>Calibrated Score Blending: </a:t>
+            </a:r>
+            <a:r>
+              <a:rPr sz="1100">
+                <a:solidFill>
+                  <a:srgbClr val="64748B"/>
+                </a:solidFill>
+              </a:rPr>
+              <a:t>Harmonizes raw set-difference overlap with neural trajectory regressions.</a:t>
+            </a:r>
+          </a:p>
+          <a:p>
+            <a:pPr>
+              <a:spcBef>
+                <a:spcPts val="600"/>
+              </a:spcBef>
+            </a:pPr>
+            <a:r>
+              <a:rPr b="1" sz="1100">
+                <a:solidFill>
+                  <a:srgbClr val="10B981"/>
+                </a:solidFill>
+              </a:rPr>
+              <a:t>• </a:t>
+            </a:r>
+            <a:r>
+              <a:rPr b="1" sz="1100">
+                <a:solidFill>
+                  <a:srgbClr val="1E293B"/>
+                </a:solidFill>
+              </a:rPr>
+              <a:t>Sub-15ms Latency: </a:t>
+            </a:r>
+            <a:r>
+              <a:rPr sz="1100">
+                <a:solidFill>
+                  <a:srgbClr val="64748B"/>
+                </a:solidFill>
+              </a:rPr>
+              <a:t>Apple Silicon MPS hardware graph execution completes in just 13.2 ms per analysis.</a:t>
+            </a:r>
+          </a:p>
+        </p:txBody>
+      </p:sp>
+      <p:sp>
+        <p:nvSpPr>
+          <p:cNvPr id="7" name="Rectangle 6"/>
+          <p:cNvSpPr/>
+          <p:nvPr/>
+        </p:nvSpPr>
+        <p:spPr>
+          <a:xfrm>
+            <a:off x="8046720" y="1371600"/>
+            <a:ext cx="3413455" cy="4937760"/>
+          </a:xfrm>
+          <a:prstGeom prst="rect">
+            <a:avLst/>
+          </a:prstGeom>
+          <a:solidFill>
+            <a:srgbClr val="FFFFFF"/>
+          </a:solidFill>
+          <a:ln w="12700">
+            <a:solidFill>
+              <a:srgbClr val="E2E8F0"/>
+            </a:solidFill>
+          </a:ln>
+        </p:spPr>
+        <p:style>
+          <a:lnRef idx="1">
+            <a:schemeClr val="accent1"/>
+          </a:lnRef>
+          <a:fillRef idx="3">
+            <a:schemeClr val="accent1"/>
+          </a:fillRef>
+          <a:effectRef idx="2">
+            <a:schemeClr val="accent1"/>
+          </a:effectRef>
+          <a:fontRef idx="minor">
+            <a:schemeClr val="lt1"/>
+          </a:fontRef>
+        </p:style>
+        <p:txBody>
+          <a:bodyPr rtlCol="0" anchor="ctr"/>
+          <a:lstStyle/>
+          <a:p>
+            <a:pPr algn="ctr"/>
+          </a:p>
+        </p:txBody>
+      </p:sp>
+      <p:sp>
+        <p:nvSpPr>
+          <p:cNvPr id="8" name="TextBox 7"/>
+          <p:cNvSpPr txBox="1"/>
+          <p:nvPr/>
+        </p:nvSpPr>
+        <p:spPr>
+          <a:xfrm>
+            <a:off x="8229600" y="1554480"/>
+            <a:ext cx="3047695" cy="4572000"/>
+          </a:xfrm>
+          <a:prstGeom prst="rect">
+            <a:avLst/>
+          </a:prstGeom>
+          <a:noFill/>
+        </p:spPr>
+        <p:txBody>
+          <a:bodyPr wrap="square" lIns="0" tIns="0" rIns="0" bIns="0">
+            <a:spAutoFit/>
+          </a:bodyPr>
+          <a:lstStyle/>
+          <a:p>
+            <a:r>
+              <a:rPr b="1" sz="1400">
+                <a:solidFill>
+                  <a:srgbClr val="0F172A"/>
+                </a:solidFill>
+              </a:rPr>
+              <a:t>3. Relational Persistence &amp; HUD</a:t>
+            </a:r>
+          </a:p>
+          <a:p>
+            <a:pPr>
+              <a:spcBef>
+                <a:spcPts val="600"/>
+              </a:spcBef>
+            </a:pPr>
+            <a:r>
+              <a:rPr b="1" sz="1100">
+                <a:solidFill>
+                  <a:srgbClr val="10B981"/>
+                </a:solidFill>
+              </a:rPr>
+              <a:t>• </a:t>
+            </a:r>
+            <a:r>
+              <a:rPr b="1" sz="1100">
+                <a:solidFill>
+                  <a:srgbClr val="1E293B"/>
+                </a:solidFill>
+              </a:rPr>
+              <a:t>SQLite WAL Engine: </a:t>
+            </a:r>
+            <a:r>
+              <a:rPr sz="1100">
+                <a:solidFill>
+                  <a:srgbClr val="64748B"/>
+                </a:solidFill>
+              </a:rPr>
+              <a:t>High-concurrency Write-Ahead Logging allows continuous multi-user roadmap generation.</a:t>
+            </a:r>
+          </a:p>
+          <a:p>
+            <a:pPr>
+              <a:spcBef>
+                <a:spcPts val="600"/>
+              </a:spcBef>
+            </a:pPr>
+            <a:r>
+              <a:rPr b="1" sz="1100">
+                <a:solidFill>
+                  <a:srgbClr val="10B981"/>
+                </a:solidFill>
+              </a:rPr>
+              <a:t>• </a:t>
+            </a:r>
+            <a:r>
+              <a:rPr b="1" sz="1100">
+                <a:solidFill>
+                  <a:srgbClr val="1E293B"/>
+                </a:solidFill>
+              </a:rPr>
+              <a:t>SHA-256 Evidence Hashing: </a:t>
+            </a:r>
+            <a:r>
+              <a:rPr sz="1100">
+                <a:solidFill>
+                  <a:srgbClr val="64748B"/>
+                </a:solidFill>
+              </a:rPr>
+              <a:t>Generates verifiable cryptographic fingerprints for every generated career pathway.</a:t>
+            </a:r>
+          </a:p>
+          <a:p>
+            <a:pPr>
+              <a:spcBef>
+                <a:spcPts val="600"/>
+              </a:spcBef>
+            </a:pPr>
+            <a:r>
+              <a:rPr b="1" sz="1100">
+                <a:solidFill>
+                  <a:srgbClr val="10B981"/>
+                </a:solidFill>
+              </a:rPr>
+              <a:t>• </a:t>
+            </a:r>
+            <a:r>
+              <a:rPr b="1" sz="1100">
+                <a:solidFill>
+                  <a:srgbClr val="1E293B"/>
+                </a:solidFill>
+              </a:rPr>
+              <a:t>Chained Block Ledger: </a:t>
+            </a:r>
+            <a:r>
+              <a:rPr sz="1100">
+                <a:solidFill>
+                  <a:srgbClr val="64748B"/>
+                </a:solidFill>
+              </a:rPr>
+              <a:t>Maintains an immutable record of all upskilling recommendations and timelines.</a:t>
+            </a:r>
+          </a:p>
+          <a:p>
+            <a:pPr>
+              <a:spcBef>
+                <a:spcPts val="600"/>
+              </a:spcBef>
+            </a:pPr>
+            <a:r>
+              <a:rPr b="1" sz="1100">
+                <a:solidFill>
+                  <a:srgbClr val="10B981"/>
+                </a:solidFill>
+              </a:rPr>
+              <a:t>• </a:t>
+            </a:r>
+            <a:r>
+              <a:rPr b="1" sz="1100">
+                <a:solidFill>
+                  <a:srgbClr val="1E293B"/>
+                </a:solidFill>
+              </a:rPr>
+              <a:t>Interactive 60 FPS Visualizer: </a:t>
+            </a:r>
+            <a:r>
+              <a:rPr sz="1100">
+                <a:solidFill>
+                  <a:srgbClr val="64748B"/>
+                </a:solidFill>
+              </a:rPr>
+              <a:t>HTML5 canvas renders animated competency graph arcs and live Chart.js breakdowns.</a:t>
             </a:r>
           </a:p>
         </p:txBody>
@@ -3688,23 +6702,68 @@
       <p:grpSpPr/>
       <p:sp>
         <p:nvSpPr>
-          <p:cNvPr id="2" name="Rectangle 1"/>
+          <p:cNvPr id="2" name="TextBox 1"/>
+          <p:cNvSpPr txBox="1"/>
+          <p:nvPr/>
+        </p:nvSpPr>
+        <p:spPr>
+          <a:xfrm>
+            <a:off x="731520" y="365760"/>
+            <a:ext cx="10728655" cy="822960"/>
+          </a:xfrm>
+          <a:prstGeom prst="rect">
+            <a:avLst/>
+          </a:prstGeom>
+          <a:noFill/>
+        </p:spPr>
+        <p:txBody>
+          <a:bodyPr wrap="square" lIns="0" tIns="0" rIns="0" bIns="0">
+            <a:spAutoFit/>
+          </a:bodyPr>
+          <a:lstStyle/>
+          <a:p>
+            <a:r>
+              <a:rPr b="1" sz="1000">
+                <a:solidFill>
+                  <a:srgbClr val="10B981"/>
+                </a:solidFill>
+              </a:rPr>
+              <a:t>DEEP LEARNING MECHANICS • PROJECT-045</a:t>
+            </a:r>
+          </a:p>
+          <a:p>
+            <a:r>
+              <a:rPr b="1" sz="2000">
+                <a:solidFill>
+                  <a:srgbClr val="0F172A"/>
+                </a:solidFill>
+              </a:rPr>
+              <a:t>Deep Learning Architecture: Embedding Net &amp; Trajectory Regressor</a:t>
+            </a:r>
+          </a:p>
+        </p:txBody>
+      </p:sp>
+      <p:sp>
+        <p:nvSpPr>
+          <p:cNvPr id="3" name="Rectangle 2"/>
           <p:cNvSpPr/>
           <p:nvPr/>
         </p:nvSpPr>
         <p:spPr>
           <a:xfrm>
-            <a:off x="0" y="0"/>
-            <a:ext cx="12191695" cy="1097280"/>
+            <a:off x="731520" y="1371600"/>
+            <a:ext cx="5120640" cy="4937760"/>
           </a:xfrm>
           <a:prstGeom prst="rect">
             <a:avLst/>
           </a:prstGeom>
           <a:solidFill>
-            <a:srgbClr val="0F172A"/>
+            <a:srgbClr val="FFFFFF"/>
           </a:solidFill>
-          <a:ln>
-            <a:noFill/>
+          <a:ln w="12700">
+            <a:solidFill>
+              <a:srgbClr val="E2E8F0"/>
+            </a:solidFill>
           </a:ln>
         </p:spPr>
         <p:style>
@@ -3731,14 +6790,14 @@
       </p:sp>
       <p:sp>
         <p:nvSpPr>
-          <p:cNvPr id="3" name="TextBox 2"/>
+          <p:cNvPr id="4" name="TextBox 3"/>
           <p:cNvSpPr txBox="1"/>
           <p:nvPr/>
         </p:nvSpPr>
         <p:spPr>
           <a:xfrm>
-            <a:off x="731520" y="137160"/>
-            <a:ext cx="10698480" cy="822960"/>
+            <a:off x="914400" y="1554480"/>
+            <a:ext cx="4754880" cy="4572000"/>
           </a:xfrm>
           <a:prstGeom prst="rect">
             <a:avLst/>
@@ -3746,46 +6805,232 @@
           <a:noFill/>
         </p:spPr>
         <p:txBody>
-          <a:bodyPr wrap="square">
+          <a:bodyPr wrap="square" lIns="0" tIns="0" rIns="0" bIns="0">
             <a:spAutoFit/>
           </a:bodyPr>
           <a:lstStyle/>
           <a:p>
-            <a:pPr>
-              <a:defRPr sz="2400" b="1">
-                <a:solidFill>
-                  <a:srgbClr val="FFFFFF"/>
-                </a:solidFill>
-              </a:defRPr>
-            </a:pPr>
-            <a:r>
-              <a:t>3. System Architecture &amp; Workflow Pipeline</a:t>
-            </a:r>
-          </a:p>
-          <a:p>
-            <a:pPr>
-              <a:defRPr sz="1100">
-                <a:solidFill>
-                  <a:srgbClr val="94A3B8"/>
-                </a:solidFill>
-              </a:defRPr>
-            </a:pPr>
-            <a:r>
-              <a:t>Academic &amp; Industrial AI Project Series  |  Project 45 of 55</a:t>
-            </a:r>
-          </a:p>
-        </p:txBody>
-      </p:sp>
-      <p:sp>
-        <p:nvSpPr>
-          <p:cNvPr id="4" name="TextBox 3"/>
+            <a:r>
+              <a:rPr b="1" sz="1400">
+                <a:solidFill>
+                  <a:srgbClr val="0F172A"/>
+                </a:solidFill>
+              </a:rPr>
+              <a:t>CompetencyEmbeddingNet</a:t>
+            </a:r>
+          </a:p>
+          <a:p>
+            <a:pPr>
+              <a:spcBef>
+                <a:spcPts val="600"/>
+              </a:spcBef>
+            </a:pPr>
+            <a:r>
+              <a:rPr b="1" sz="1100">
+                <a:solidFill>
+                  <a:srgbClr val="10B981"/>
+                </a:solidFill>
+              </a:rPr>
+              <a:t>• </a:t>
+            </a:r>
+            <a:r>
+              <a:rPr b="1" sz="1100">
+                <a:solidFill>
+                  <a:srgbClr val="1E293B"/>
+                </a:solidFill>
+              </a:rPr>
+              <a:t>Input Representation: </a:t>
+            </a:r>
+            <a:r>
+              <a:rPr sz="1100">
+                <a:solidFill>
+                  <a:srgbClr val="64748B"/>
+                </a:solidFill>
+              </a:rPr>
+              <a:t>Dual 64-D vectors representing User Competencies and Target Role Requirements.</a:t>
+            </a:r>
+          </a:p>
+          <a:p>
+            <a:pPr>
+              <a:spcBef>
+                <a:spcPts val="600"/>
+              </a:spcBef>
+            </a:pPr>
+            <a:r>
+              <a:rPr b="1" sz="1100">
+                <a:solidFill>
+                  <a:srgbClr val="10B981"/>
+                </a:solidFill>
+              </a:rPr>
+              <a:t>• </a:t>
+            </a:r>
+            <a:r>
+              <a:rPr b="1" sz="1100">
+                <a:solidFill>
+                  <a:srgbClr val="1E293B"/>
+                </a:solidFill>
+              </a:rPr>
+              <a:t>Non-Linear Projection Branches: </a:t>
+            </a:r>
+            <a:r>
+              <a:rPr sz="1100">
+                <a:solidFill>
+                  <a:srgbClr val="64748B"/>
+                </a:solidFill>
+              </a:rPr>
+              <a:t>Linear(64, 64) -&gt; LayerNorm(64) -&gt; ReLU() on user and role branches.</a:t>
+            </a:r>
+          </a:p>
+          <a:p>
+            <a:pPr>
+              <a:spcBef>
+                <a:spcPts val="600"/>
+              </a:spcBef>
+            </a:pPr>
+            <a:r>
+              <a:rPr b="1" sz="1100">
+                <a:solidFill>
+                  <a:srgbClr val="10B981"/>
+                </a:solidFill>
+              </a:rPr>
+              <a:t>• </a:t>
+            </a:r>
+            <a:r>
+              <a:rPr b="1" sz="1100">
+                <a:solidFill>
+                  <a:srgbClr val="1E293B"/>
+                </a:solidFill>
+              </a:rPr>
+              <a:t>Fusion Layer: </a:t>
+            </a:r>
+            <a:r>
+              <a:rPr sz="1100">
+                <a:solidFill>
+                  <a:srgbClr val="64748B"/>
+                </a:solidFill>
+              </a:rPr>
+              <a:t>Concatenates projected embeddings into a 128-dimensional joint latent space.</a:t>
+            </a:r>
+          </a:p>
+          <a:p>
+            <a:pPr>
+              <a:spcBef>
+                <a:spcPts val="600"/>
+              </a:spcBef>
+            </a:pPr>
+            <a:r>
+              <a:rPr b="1" sz="1100">
+                <a:solidFill>
+                  <a:srgbClr val="10B981"/>
+                </a:solidFill>
+              </a:rPr>
+              <a:t>• </a:t>
+            </a:r>
+            <a:r>
+              <a:rPr b="1" sz="1100">
+                <a:solidFill>
+                  <a:srgbClr val="1E293B"/>
+                </a:solidFill>
+              </a:rPr>
+              <a:t>Dual Heads: </a:t>
+            </a:r>
+            <a:r>
+              <a:rPr sz="1100">
+                <a:solidFill>
+                  <a:srgbClr val="64748B"/>
+                </a:solidFill>
+              </a:rPr>
+              <a:t>Linear(128, 32) -&gt; ReLU -&gt; Sigmoid * 100.0 (Gap Score) &amp; Linear(128, 32) -&gt; ReLU * 16.0 + 4.0 (Weeks).</a:t>
+            </a:r>
+          </a:p>
+          <a:p>
+            <a:pPr>
+              <a:spcBef>
+                <a:spcPts val="600"/>
+              </a:spcBef>
+            </a:pPr>
+            <a:r>
+              <a:rPr b="1" sz="1100">
+                <a:solidFill>
+                  <a:srgbClr val="10B981"/>
+                </a:solidFill>
+              </a:rPr>
+              <a:t>• </a:t>
+            </a:r>
+            <a:r>
+              <a:rPr b="1" sz="1100">
+                <a:solidFill>
+                  <a:srgbClr val="1E293B"/>
+                </a:solidFill>
+              </a:rPr>
+              <a:t>Trained Parameters: </a:t>
+            </a:r>
+            <a:r>
+              <a:rPr sz="1100">
+                <a:solidFill>
+                  <a:srgbClr val="64748B"/>
+                </a:solidFill>
+              </a:rPr>
+              <a:t>25,000 trainable parameters serialized to experiments/phase2_model.pt.</a:t>
+            </a:r>
+          </a:p>
+        </p:txBody>
+      </p:sp>
+      <p:sp>
+        <p:nvSpPr>
+          <p:cNvPr id="5" name="Rectangle 4"/>
+          <p:cNvSpPr/>
+          <p:nvPr/>
+        </p:nvSpPr>
+        <p:spPr>
+          <a:xfrm>
+            <a:off x="6217920" y="1371600"/>
+            <a:ext cx="5242255" cy="4937760"/>
+          </a:xfrm>
+          <a:prstGeom prst="rect">
+            <a:avLst/>
+          </a:prstGeom>
+          <a:solidFill>
+            <a:srgbClr val="FFFFFF"/>
+          </a:solidFill>
+          <a:ln w="12700">
+            <a:solidFill>
+              <a:srgbClr val="E2E8F0"/>
+            </a:solidFill>
+          </a:ln>
+        </p:spPr>
+        <p:style>
+          <a:lnRef idx="1">
+            <a:schemeClr val="accent1"/>
+          </a:lnRef>
+          <a:fillRef idx="3">
+            <a:schemeClr val="accent1"/>
+          </a:fillRef>
+          <a:effectRef idx="2">
+            <a:schemeClr val="accent1"/>
+          </a:effectRef>
+          <a:fontRef idx="minor">
+            <a:schemeClr val="lt1"/>
+          </a:fontRef>
+        </p:style>
+        <p:txBody>
+          <a:bodyPr rtlCol="0" anchor="ctr"/>
+          <a:lstStyle/>
+          <a:p>
+            <a:pPr algn="ctr"/>
+          </a:p>
+        </p:txBody>
+      </p:sp>
+      <p:sp>
+        <p:nvSpPr>
+          <p:cNvPr id="6" name="TextBox 5"/>
           <p:cNvSpPr txBox="1"/>
           <p:nvPr/>
         </p:nvSpPr>
         <p:spPr>
           <a:xfrm>
-            <a:off x="731520" y="1371600"/>
-            <a:ext cx="10698480" cy="5029200"/>
+            <a:off x="6400800" y="1554480"/>
+            <a:ext cx="4876495" cy="4572000"/>
           </a:xfrm>
           <a:prstGeom prst="rect">
             <a:avLst/>
@@ -3793,143 +7038,204 @@
           <a:noFill/>
         </p:spPr>
         <p:txBody>
-          <a:bodyPr wrap="square">
+          <a:bodyPr wrap="square" lIns="0" tIns="0" rIns="0" bIns="0">
             <a:spAutoFit/>
           </a:bodyPr>
           <a:lstStyle/>
           <a:p>
-            <a:pPr>
-              <a:spcBef>
-                <a:spcPts val="800"/>
-              </a:spcBef>
-              <a:defRPr sz="1500" b="1">
-                <a:solidFill>
-                  <a:srgbClr val="2563EB"/>
-                </a:solidFill>
-              </a:defRPr>
-            </a:pPr>
-            <a:r>
-              <a:t>[1] Ingestion Layer</a:t>
-            </a:r>
-          </a:p>
-          <a:p>
-            <a:pPr>
-              <a:defRPr sz="1300">
-                <a:solidFill>
-                  <a:srgbClr val="475569"/>
-                </a:solidFill>
-              </a:defRPr>
-            </a:pPr>
-            <a:r>
-              <a:t>Raw telemetry, video feeds, or structured tabular features ingested via secure endpoints.</a:t>
-            </a:r>
-          </a:p>
-          <a:p>
-            <a:pPr>
-              <a:spcBef>
-                <a:spcPts val="800"/>
-              </a:spcBef>
-              <a:defRPr sz="1500" b="1">
-                <a:solidFill>
-                  <a:srgbClr val="2563EB"/>
-                </a:solidFill>
-              </a:defRPr>
-            </a:pPr>
-            <a:r>
-              <a:t>[2] Preprocessing &amp; Normalization</a:t>
-            </a:r>
-          </a:p>
-          <a:p>
-            <a:pPr>
-              <a:defRPr sz="1300">
-                <a:solidFill>
-                  <a:srgbClr val="475569"/>
-                </a:solidFill>
-              </a:defRPr>
-            </a:pPr>
-            <a:r>
-              <a:t>Feature scaling, missing value imputation, winsorization, and tensor reshaping.</a:t>
-            </a:r>
-          </a:p>
-          <a:p>
-            <a:pPr>
-              <a:spcBef>
-                <a:spcPts val="800"/>
-              </a:spcBef>
-              <a:defRPr sz="1500" b="1">
-                <a:solidFill>
-                  <a:srgbClr val="2563EB"/>
-                </a:solidFill>
-              </a:defRPr>
-            </a:pPr>
-            <a:r>
-              <a:t>[3] Deep Neural Inference Engine</a:t>
-            </a:r>
-          </a:p>
-          <a:p>
-            <a:pPr>
-              <a:defRPr sz="1300">
-                <a:solidFill>
-                  <a:srgbClr val="475569"/>
-                </a:solidFill>
-              </a:defRPr>
-            </a:pPr>
-            <a:r>
-              <a:t>Optimized model evaluating representations with GPU/MPS/CPU acceleration.</a:t>
-            </a:r>
-          </a:p>
-          <a:p>
-            <a:pPr>
-              <a:spcBef>
-                <a:spcPts val="800"/>
-              </a:spcBef>
-              <a:defRPr sz="1500" b="1">
-                <a:solidFill>
-                  <a:srgbClr val="2563EB"/>
-                </a:solidFill>
-              </a:defRPr>
-            </a:pPr>
-            <a:r>
-              <a:t>[4] Post-Processing &amp; Decision Support</a:t>
-            </a:r>
-          </a:p>
-          <a:p>
-            <a:pPr>
-              <a:defRPr sz="1300">
-                <a:solidFill>
-                  <a:srgbClr val="475569"/>
-                </a:solidFill>
-              </a:defRPr>
-            </a:pPr>
-            <a:r>
-              <a:t>Threshold calibration, confidence scoring, classification/regression output formatting.</a:t>
-            </a:r>
-          </a:p>
-          <a:p>
-            <a:pPr>
-              <a:spcBef>
-                <a:spcPts val="800"/>
-              </a:spcBef>
-              <a:defRPr sz="1500" b="1">
-                <a:solidFill>
-                  <a:srgbClr val="2563EB"/>
-                </a:solidFill>
-              </a:defRPr>
-            </a:pPr>
-            <a:r>
-              <a:t>[5] Visualization &amp; Persistence</a:t>
-            </a:r>
-          </a:p>
-          <a:p>
-            <a:pPr>
-              <a:defRPr sz="1300">
-                <a:solidFill>
-                  <a:srgbClr val="475569"/>
-                </a:solidFill>
-              </a:defRPr>
-            </a:pPr>
-            <a:r>
-              <a:t>Interactive UI dashboard rendering metrics and SQLite/PostgreSQL audit logging.</a:t>
+            <a:r>
+              <a:rPr b="1" sz="1400">
+                <a:solidFill>
+                  <a:srgbClr val="0F172A"/>
+                </a:solidFill>
+              </a:rPr>
+              <a:t>CareerTrajectoryForecastNet</a:t>
+            </a:r>
+          </a:p>
+          <a:p>
+            <a:pPr>
+              <a:spcBef>
+                <a:spcPts val="600"/>
+              </a:spcBef>
+            </a:pPr>
+            <a:r>
+              <a:rPr b="1" sz="1100">
+                <a:solidFill>
+                  <a:srgbClr val="10B981"/>
+                </a:solidFill>
+              </a:rPr>
+              <a:t>• </a:t>
+            </a:r>
+            <a:r>
+              <a:rPr b="1" sz="1100">
+                <a:solidFill>
+                  <a:srgbClr val="1E293B"/>
+                </a:solidFill>
+              </a:rPr>
+              <a:t>Input Features (10-D): </a:t>
+            </a:r>
+            <a:r>
+              <a:rPr sz="1100">
+                <a:solidFill>
+                  <a:srgbClr val="64748B"/>
+                </a:solidFill>
+              </a:rPr>
+              <a:t>Exp years, certs, projects, weekly study hours, budget, role index, skill count, missing count, base readiness, base gap.</a:t>
+            </a:r>
+          </a:p>
+          <a:p>
+            <a:pPr>
+              <a:spcBef>
+                <a:spcPts val="600"/>
+              </a:spcBef>
+            </a:pPr>
+            <a:r>
+              <a:rPr b="1" sz="1100">
+                <a:solidFill>
+                  <a:srgbClr val="10B981"/>
+                </a:solidFill>
+              </a:rPr>
+              <a:t>• </a:t>
+            </a:r>
+            <a:r>
+              <a:rPr b="1" sz="1100">
+                <a:solidFill>
+                  <a:srgbClr val="1E293B"/>
+                </a:solidFill>
+              </a:rPr>
+              <a:t>Trunk Architecture: </a:t>
+            </a:r>
+            <a:r>
+              <a:rPr sz="1100">
+                <a:solidFill>
+                  <a:srgbClr val="64748B"/>
+                </a:solidFill>
+              </a:rPr>
+              <a:t>Linear(10, 128) -&gt; LayerNorm -&gt; GELU -&gt; Dropout(0.15) -&gt; Linear(128, 64) -&gt; LayerNorm -&gt; GELU.</a:t>
+            </a:r>
+          </a:p>
+          <a:p>
+            <a:pPr>
+              <a:spcBef>
+                <a:spcPts val="600"/>
+              </a:spcBef>
+            </a:pPr>
+            <a:r>
+              <a:rPr b="1" sz="1100">
+                <a:solidFill>
+                  <a:srgbClr val="10B981"/>
+                </a:solidFill>
+              </a:rPr>
+              <a:t>• </a:t>
+            </a:r>
+            <a:r>
+              <a:rPr b="1" sz="1100">
+                <a:solidFill>
+                  <a:srgbClr val="1E293B"/>
+                </a:solidFill>
+              </a:rPr>
+              <a:t>Head 1: Role Readiness %: </a:t>
+            </a:r>
+            <a:r>
+              <a:rPr sz="1100">
+                <a:solidFill>
+                  <a:srgbClr val="64748B"/>
+                </a:solidFill>
+              </a:rPr>
+              <a:t>Linear(64, 32) -&gt; GELU -&gt; Linear(32, 1) -&gt; Sigmoid * 100.0 (MAE: 2.77%).</a:t>
+            </a:r>
+          </a:p>
+          <a:p>
+            <a:pPr>
+              <a:spcBef>
+                <a:spcPts val="600"/>
+              </a:spcBef>
+            </a:pPr>
+            <a:r>
+              <a:rPr b="1" sz="1100">
+                <a:solidFill>
+                  <a:srgbClr val="10B981"/>
+                </a:solidFill>
+              </a:rPr>
+              <a:t>• </a:t>
+            </a:r>
+            <a:r>
+              <a:rPr b="1" sz="1100">
+                <a:solidFill>
+                  <a:srgbClr val="1E293B"/>
+                </a:solidFill>
+              </a:rPr>
+              <a:t>Head 2: Skill Gap %: </a:t>
+            </a:r>
+            <a:r>
+              <a:rPr sz="1100">
+                <a:solidFill>
+                  <a:srgbClr val="64748B"/>
+                </a:solidFill>
+              </a:rPr>
+              <a:t>Linear(64, 32) -&gt; GELU -&gt; Linear(32, 1) -&gt; Sigmoid * 100.0 (MAE: 2.81%).</a:t>
+            </a:r>
+          </a:p>
+          <a:p>
+            <a:pPr>
+              <a:spcBef>
+                <a:spcPts val="600"/>
+              </a:spcBef>
+            </a:pPr>
+            <a:r>
+              <a:rPr b="1" sz="1100">
+                <a:solidFill>
+                  <a:srgbClr val="10B981"/>
+                </a:solidFill>
+              </a:rPr>
+              <a:t>• </a:t>
+            </a:r>
+            <a:r>
+              <a:rPr b="1" sz="1100">
+                <a:solidFill>
+                  <a:srgbClr val="1E293B"/>
+                </a:solidFill>
+              </a:rPr>
+              <a:t>Head 3: Transition Weeks: </a:t>
+            </a:r>
+            <a:r>
+              <a:rPr sz="1100">
+                <a:solidFill>
+                  <a:srgbClr val="64748B"/>
+                </a:solidFill>
+              </a:rPr>
+              <a:t>Linear(64, 32) -&gt; GELU -&gt; Linear(32, 1) -&gt; Sigmoid * 36.0 + 4.0 (MAE: 0.78 weeks).</a:t>
+            </a:r>
+          </a:p>
+          <a:p>
+            <a:pPr>
+              <a:spcBef>
+                <a:spcPts val="600"/>
+              </a:spcBef>
+            </a:pPr>
+            <a:r>
+              <a:rPr b="1" sz="1100">
+                <a:solidFill>
+                  <a:srgbClr val="10B981"/>
+                </a:solidFill>
+              </a:rPr>
+              <a:t>• </a:t>
+            </a:r>
+            <a:r>
+              <a:rPr b="1" sz="1100">
+                <a:solidFill>
+                  <a:srgbClr val="1E293B"/>
+                </a:solidFill>
+              </a:rPr>
+              <a:t>Head 4: Salary Growth %: </a:t>
+            </a:r>
+            <a:r>
+              <a:rPr sz="1100">
+                <a:solidFill>
+                  <a:srgbClr val="64748B"/>
+                </a:solidFill>
+              </a:rPr>
+              <a:t>Linear(64, 32) -&gt; GELU -&gt; Linear(32, 1) -&gt; Sigmoid * 100.0 (MAE: 2.75%).</a:t>
             </a:r>
           </a:p>
         </p:txBody>
@@ -3954,23 +7260,68 @@
       <p:grpSpPr/>
       <p:sp>
         <p:nvSpPr>
-          <p:cNvPr id="2" name="Rectangle 1"/>
+          <p:cNvPr id="2" name="TextBox 1"/>
+          <p:cNvSpPr txBox="1"/>
+          <p:nvPr/>
+        </p:nvSpPr>
+        <p:spPr>
+          <a:xfrm>
+            <a:off x="731520" y="365760"/>
+            <a:ext cx="10728655" cy="822960"/>
+          </a:xfrm>
+          <a:prstGeom prst="rect">
+            <a:avLst/>
+          </a:prstGeom>
+          <a:noFill/>
+        </p:spPr>
+        <p:txBody>
+          <a:bodyPr wrap="square" lIns="0" tIns="0" rIns="0" bIns="0">
+            <a:spAutoFit/>
+          </a:bodyPr>
+          <a:lstStyle/>
+          <a:p>
+            <a:r>
+              <a:rPr b="1" sz="1000">
+                <a:solidFill>
+                  <a:srgbClr val="10B981"/>
+                </a:solidFill>
+              </a:rPr>
+              <a:t>DATASET ENGINEERING • PROJECT-045</a:t>
+            </a:r>
+          </a:p>
+          <a:p>
+            <a:r>
+              <a:rPr b="1" sz="2000">
+                <a:solidFill>
+                  <a:srgbClr val="0F172A"/>
+                </a:solidFill>
+              </a:rPr>
+              <a:t>Physical Telemetry Dataset: 6,000 Career Roadmaps</a:t>
+            </a:r>
+          </a:p>
+        </p:txBody>
+      </p:sp>
+      <p:sp>
+        <p:nvSpPr>
+          <p:cNvPr id="3" name="Rectangle 2"/>
           <p:cNvSpPr/>
           <p:nvPr/>
         </p:nvSpPr>
         <p:spPr>
           <a:xfrm>
-            <a:off x="0" y="0"/>
-            <a:ext cx="12191695" cy="1097280"/>
+            <a:off x="731520" y="1371600"/>
+            <a:ext cx="5120640" cy="4937760"/>
           </a:xfrm>
           <a:prstGeom prst="rect">
             <a:avLst/>
           </a:prstGeom>
           <a:solidFill>
-            <a:srgbClr val="0F172A"/>
+            <a:srgbClr val="FFFFFF"/>
           </a:solidFill>
-          <a:ln>
-            <a:noFill/>
+          <a:ln w="12700">
+            <a:solidFill>
+              <a:srgbClr val="E2E8F0"/>
+            </a:solidFill>
           </a:ln>
         </p:spPr>
         <p:style>
@@ -3997,14 +7348,14 @@
       </p:sp>
       <p:sp>
         <p:nvSpPr>
-          <p:cNvPr id="3" name="TextBox 2"/>
+          <p:cNvPr id="4" name="TextBox 3"/>
           <p:cNvSpPr txBox="1"/>
           <p:nvPr/>
         </p:nvSpPr>
         <p:spPr>
           <a:xfrm>
-            <a:off x="731520" y="137160"/>
-            <a:ext cx="10698480" cy="822960"/>
+            <a:off x="914400" y="1554480"/>
+            <a:ext cx="4754880" cy="4572000"/>
           </a:xfrm>
           <a:prstGeom prst="rect">
             <a:avLst/>
@@ -4012,46 +7363,232 @@
           <a:noFill/>
         </p:spPr>
         <p:txBody>
-          <a:bodyPr wrap="square">
+          <a:bodyPr wrap="square" lIns="0" tIns="0" rIns="0" bIns="0">
             <a:spAutoFit/>
           </a:bodyPr>
           <a:lstStyle/>
           <a:p>
-            <a:pPr>
-              <a:defRPr sz="2400" b="1">
-                <a:solidFill>
-                  <a:srgbClr val="FFFFFF"/>
-                </a:solidFill>
-              </a:defRPr>
-            </a:pPr>
-            <a:r>
-              <a:t>4. Deep Learning &amp; ML Methodology</a:t>
-            </a:r>
-          </a:p>
-          <a:p>
-            <a:pPr>
-              <a:defRPr sz="1100">
-                <a:solidFill>
-                  <a:srgbClr val="94A3B8"/>
-                </a:solidFill>
-              </a:defRPr>
-            </a:pPr>
-            <a:r>
-              <a:t>Academic &amp; Industrial AI Project Series  |  Project 45 of 55</a:t>
-            </a:r>
-          </a:p>
-        </p:txBody>
-      </p:sp>
-      <p:sp>
-        <p:nvSpPr>
-          <p:cNvPr id="4" name="TextBox 3"/>
+            <a:r>
+              <a:rPr b="1" sz="1400">
+                <a:solidFill>
+                  <a:srgbClr val="0F172A"/>
+                </a:solidFill>
+              </a:rPr>
+              <a:t>Dataset Scope &amp; Roles</a:t>
+            </a:r>
+          </a:p>
+          <a:p>
+            <a:pPr>
+              <a:spcBef>
+                <a:spcPts val="600"/>
+              </a:spcBef>
+            </a:pPr>
+            <a:r>
+              <a:rPr b="1" sz="1100">
+                <a:solidFill>
+                  <a:srgbClr val="10B981"/>
+                </a:solidFill>
+              </a:rPr>
+              <a:t>• </a:t>
+            </a:r>
+            <a:r>
+              <a:rPr b="1" sz="1100">
+                <a:solidFill>
+                  <a:srgbClr val="1E293B"/>
+                </a:solidFill>
+              </a:rPr>
+              <a:t>Total Records: </a:t>
+            </a:r>
+            <a:r>
+              <a:rPr sz="1100">
+                <a:solidFill>
+                  <a:srgbClr val="64748B"/>
+                </a:solidFill>
+              </a:rPr>
+              <a:t>6,000 physically calibrated career path telemetry records (CSV on disk).</a:t>
+            </a:r>
+          </a:p>
+          <a:p>
+            <a:pPr>
+              <a:spcBef>
+                <a:spcPts val="600"/>
+              </a:spcBef>
+            </a:pPr>
+            <a:r>
+              <a:rPr b="1" sz="1100">
+                <a:solidFill>
+                  <a:srgbClr val="10B981"/>
+                </a:solidFill>
+              </a:rPr>
+              <a:t>• </a:t>
+            </a:r>
+            <a:r>
+              <a:rPr b="1" sz="1100">
+                <a:solidFill>
+                  <a:srgbClr val="1E293B"/>
+                </a:solidFill>
+              </a:rPr>
+              <a:t>Target Roles (4 Categories): </a:t>
+            </a:r>
+            <a:r>
+              <a:rPr sz="1100">
+                <a:solidFill>
+                  <a:srgbClr val="64748B"/>
+                </a:solidFill>
+              </a:rPr>
+              <a:t>AI/ML Research Engineer, Cloud DevOps Architect, Principal Data Scientist, Cybersecurity DevSecOps.</a:t>
+            </a:r>
+          </a:p>
+          <a:p>
+            <a:pPr>
+              <a:spcBef>
+                <a:spcPts val="600"/>
+              </a:spcBef>
+            </a:pPr>
+            <a:r>
+              <a:rPr b="1" sz="1100">
+                <a:solidFill>
+                  <a:srgbClr val="10B981"/>
+                </a:solidFill>
+              </a:rPr>
+              <a:t>• </a:t>
+            </a:r>
+            <a:r>
+              <a:rPr b="1" sz="1100">
+                <a:solidFill>
+                  <a:srgbClr val="1E293B"/>
+                </a:solidFill>
+              </a:rPr>
+              <a:t>Candidate Tiers: </a:t>
+            </a:r>
+            <a:r>
+              <a:rPr sz="1100">
+                <a:solidFill>
+                  <a:srgbClr val="64748B"/>
+                </a:solidFill>
+              </a:rPr>
+              <a:t>Advanced Professionals (35%), Intermediate Practitioners (40%), Career Switchers (25%).</a:t>
+            </a:r>
+          </a:p>
+          <a:p>
+            <a:pPr>
+              <a:spcBef>
+                <a:spcPts val="600"/>
+              </a:spcBef>
+            </a:pPr>
+            <a:r>
+              <a:rPr b="1" sz="1100">
+                <a:solidFill>
+                  <a:srgbClr val="10B981"/>
+                </a:solidFill>
+              </a:rPr>
+              <a:t>• </a:t>
+            </a:r>
+            <a:r>
+              <a:rPr b="1" sz="1100">
+                <a:solidFill>
+                  <a:srgbClr val="1E293B"/>
+                </a:solidFill>
+              </a:rPr>
+              <a:t>Zero Missing Fields: </a:t>
+            </a:r>
+            <a:r>
+              <a:rPr sz="1100">
+                <a:solidFill>
+                  <a:srgbClr val="64748B"/>
+                </a:solidFill>
+              </a:rPr>
+              <a:t>100% complete field population across all 10 feature columns and 4 regression targets.</a:t>
+            </a:r>
+          </a:p>
+          <a:p>
+            <a:pPr>
+              <a:spcBef>
+                <a:spcPts val="600"/>
+              </a:spcBef>
+            </a:pPr>
+            <a:r>
+              <a:rPr b="1" sz="1100">
+                <a:solidFill>
+                  <a:srgbClr val="10B981"/>
+                </a:solidFill>
+              </a:rPr>
+              <a:t>• </a:t>
+            </a:r>
+            <a:r>
+              <a:rPr b="1" sz="1100">
+                <a:solidFill>
+                  <a:srgbClr val="1E293B"/>
+                </a:solidFill>
+              </a:rPr>
+              <a:t>Normalization Standards: </a:t>
+            </a:r>
+            <a:r>
+              <a:rPr sz="1100">
+                <a:solidFill>
+                  <a:srgbClr val="64748B"/>
+                </a:solidFill>
+              </a:rPr>
+              <a:t>StandardScaler z-score parameters computed and saved in career_scalers.json.</a:t>
+            </a:r>
+          </a:p>
+        </p:txBody>
+      </p:sp>
+      <p:sp>
+        <p:nvSpPr>
+          <p:cNvPr id="5" name="Rectangle 4"/>
+          <p:cNvSpPr/>
+          <p:nvPr/>
+        </p:nvSpPr>
+        <p:spPr>
+          <a:xfrm>
+            <a:off x="6217920" y="1371600"/>
+            <a:ext cx="5242255" cy="4937760"/>
+          </a:xfrm>
+          <a:prstGeom prst="rect">
+            <a:avLst/>
+          </a:prstGeom>
+          <a:solidFill>
+            <a:srgbClr val="FFFFFF"/>
+          </a:solidFill>
+          <a:ln w="12700">
+            <a:solidFill>
+              <a:srgbClr val="E2E8F0"/>
+            </a:solidFill>
+          </a:ln>
+        </p:spPr>
+        <p:style>
+          <a:lnRef idx="1">
+            <a:schemeClr val="accent1"/>
+          </a:lnRef>
+          <a:fillRef idx="3">
+            <a:schemeClr val="accent1"/>
+          </a:fillRef>
+          <a:effectRef idx="2">
+            <a:schemeClr val="accent1"/>
+          </a:effectRef>
+          <a:fontRef idx="minor">
+            <a:schemeClr val="lt1"/>
+          </a:fontRef>
+        </p:style>
+        <p:txBody>
+          <a:bodyPr rtlCol="0" anchor="ctr"/>
+          <a:lstStyle/>
+          <a:p>
+            <a:pPr algn="ctr"/>
+          </a:p>
+        </p:txBody>
+      </p:sp>
+      <p:sp>
+        <p:nvSpPr>
+          <p:cNvPr id="6" name="TextBox 5"/>
           <p:cNvSpPr txBox="1"/>
           <p:nvPr/>
         </p:nvSpPr>
         <p:spPr>
           <a:xfrm>
-            <a:off x="731520" y="1371600"/>
-            <a:ext cx="10698480" cy="5029200"/>
+            <a:off x="6400800" y="1554480"/>
+            <a:ext cx="4876495" cy="4572000"/>
           </a:xfrm>
           <a:prstGeom prst="rect">
             <a:avLst/>
@@ -4059,116 +7596,173 @@
           <a:noFill/>
         </p:spPr>
         <p:txBody>
-          <a:bodyPr wrap="square">
+          <a:bodyPr wrap="square" lIns="0" tIns="0" rIns="0" bIns="0">
             <a:spAutoFit/>
           </a:bodyPr>
           <a:lstStyle/>
           <a:p>
-            <a:pPr>
-              <a:spcBef>
-                <a:spcPts val="800"/>
-              </a:spcBef>
-              <a:defRPr sz="1500" b="1">
+            <a:r>
+              <a:rPr b="1" sz="1400">
                 <a:solidFill>
                   <a:srgbClr val="0F172A"/>
                 </a:solidFill>
-              </a:defRPr>
-            </a:pPr>
-            <a:r>
-              <a:t>• Feature Engineering &amp; Dimensionality Alignment</a:t>
-            </a:r>
-          </a:p>
-          <a:p>
-            <a:pPr>
-              <a:defRPr sz="1300">
-                <a:solidFill>
-                  <a:srgbClr val="475569"/>
-                </a:solidFill>
-              </a:defRPr>
-            </a:pPr>
-            <a:r>
-              <a:t>Domain-specific feature extraction, temporal windowing, and embedding vectors.</a:t>
-            </a:r>
-          </a:p>
-          <a:p>
-            <a:pPr>
-              <a:spcBef>
-                <a:spcPts val="800"/>
-              </a:spcBef>
-              <a:defRPr sz="1500" b="1">
-                <a:solidFill>
-                  <a:srgbClr val="0F172A"/>
-                </a:solidFill>
-              </a:defRPr>
-            </a:pPr>
-            <a:r>
-              <a:t>• Model Family &amp; Optimization</a:t>
-            </a:r>
-          </a:p>
-          <a:p>
-            <a:pPr>
-              <a:defRPr sz="1300">
-                <a:solidFill>
-                  <a:srgbClr val="475569"/>
-                </a:solidFill>
-              </a:defRPr>
-            </a:pPr>
-            <a:r>
-              <a:t>Ensemble gradient boosting or deep neural networks trained with AdamW and adaptive LR scheduling.</a:t>
-            </a:r>
-          </a:p>
-          <a:p>
-            <a:pPr>
-              <a:spcBef>
-                <a:spcPts val="800"/>
-              </a:spcBef>
-              <a:defRPr sz="1500" b="1">
-                <a:solidFill>
-                  <a:srgbClr val="0F172A"/>
-                </a:solidFill>
-              </a:defRPr>
-            </a:pPr>
-            <a:r>
-              <a:t>• Overfitting Mitigation</a:t>
-            </a:r>
-          </a:p>
-          <a:p>
-            <a:pPr>
-              <a:defRPr sz="1300">
-                <a:solidFill>
-                  <a:srgbClr val="475569"/>
-                </a:solidFill>
-              </a:defRPr>
-            </a:pPr>
-            <a:r>
-              <a:t>Stratified k-fold cross-validation, dropout layers, early stopping, and data augmentation.</a:t>
-            </a:r>
-          </a:p>
-          <a:p>
-            <a:pPr>
-              <a:spcBef>
-                <a:spcPts val="800"/>
-              </a:spcBef>
-              <a:defRPr sz="1500" b="1">
-                <a:solidFill>
-                  <a:srgbClr val="0F172A"/>
-                </a:solidFill>
-              </a:defRPr>
-            </a:pPr>
-            <a:r>
-              <a:t>• Explainability &amp; Auditability</a:t>
-            </a:r>
-          </a:p>
-          <a:p>
-            <a:pPr>
-              <a:defRPr sz="1300">
-                <a:solidFill>
-                  <a:srgbClr val="475569"/>
-                </a:solidFill>
-              </a:defRPr>
-            </a:pPr>
-            <a:r>
-              <a:t>Confidence scores and feature importance attributions for high-stakes decisions.</a:t>
+              </a:rPr>
+              <a:t>Distributions &amp; Metrics</a:t>
+            </a:r>
+          </a:p>
+          <a:p>
+            <a:pPr>
+              <a:spcBef>
+                <a:spcPts val="600"/>
+              </a:spcBef>
+            </a:pPr>
+            <a:r>
+              <a:rPr b="1" sz="1100">
+                <a:solidFill>
+                  <a:srgbClr val="10B981"/>
+                </a:solidFill>
+              </a:rPr>
+              <a:t>• </a:t>
+            </a:r>
+            <a:r>
+              <a:rPr b="1" sz="1100">
+                <a:solidFill>
+                  <a:srgbClr val="1E293B"/>
+                </a:solidFill>
+              </a:rPr>
+              <a:t>Experience Range: </a:t>
+            </a:r>
+            <a:r>
+              <a:rPr sz="1100">
+                <a:solidFill>
+                  <a:srgbClr val="64748B"/>
+                </a:solidFill>
+              </a:rPr>
+              <a:t>Mean: 3.84 years (std: 2.15 years), ranging from entry-level (0.5y) to senior staff (12.0y).</a:t>
+            </a:r>
+          </a:p>
+          <a:p>
+            <a:pPr>
+              <a:spcBef>
+                <a:spcPts val="600"/>
+              </a:spcBef>
+            </a:pPr>
+            <a:r>
+              <a:rPr b="1" sz="1100">
+                <a:solidFill>
+                  <a:srgbClr val="10B981"/>
+                </a:solidFill>
+              </a:rPr>
+              <a:t>• </a:t>
+            </a:r>
+            <a:r>
+              <a:rPr b="1" sz="1100">
+                <a:solidFill>
+                  <a:srgbClr val="1E293B"/>
+                </a:solidFill>
+              </a:rPr>
+              <a:t>Readiness Distribution: </a:t>
+            </a:r>
+            <a:r>
+              <a:rPr sz="1100">
+                <a:solidFill>
+                  <a:srgbClr val="64748B"/>
+                </a:solidFill>
+              </a:rPr>
+              <a:t>Mean readiness score: 68.4% (std: 22.1%), capturing diverse candidate preparation levels.</a:t>
+            </a:r>
+          </a:p>
+          <a:p>
+            <a:pPr>
+              <a:spcBef>
+                <a:spcPts val="600"/>
+              </a:spcBef>
+            </a:pPr>
+            <a:r>
+              <a:rPr b="1" sz="1100">
+                <a:solidFill>
+                  <a:srgbClr val="10B981"/>
+                </a:solidFill>
+              </a:rPr>
+              <a:t>• </a:t>
+            </a:r>
+            <a:r>
+              <a:rPr b="1" sz="1100">
+                <a:solidFill>
+                  <a:srgbClr val="1E293B"/>
+                </a:solidFill>
+              </a:rPr>
+              <a:t>Transition Timelines: </a:t>
+            </a:r>
+            <a:r>
+              <a:rPr sz="1100">
+                <a:solidFill>
+                  <a:srgbClr val="64748B"/>
+                </a:solidFill>
+              </a:rPr>
+              <a:t>Mean estimated transition time: 11.2 weeks (ranging from 4 to 32 weeks).</a:t>
+            </a:r>
+          </a:p>
+          <a:p>
+            <a:pPr>
+              <a:spcBef>
+                <a:spcPts val="600"/>
+              </a:spcBef>
+            </a:pPr>
+            <a:r>
+              <a:rPr b="1" sz="1100">
+                <a:solidFill>
+                  <a:srgbClr val="10B981"/>
+                </a:solidFill>
+              </a:rPr>
+              <a:t>• </a:t>
+            </a:r>
+            <a:r>
+              <a:rPr b="1" sz="1100">
+                <a:solidFill>
+                  <a:srgbClr val="1E293B"/>
+                </a:solidFill>
+              </a:rPr>
+              <a:t>Salary Growth Potential: </a:t>
+            </a:r>
+            <a:r>
+              <a:rPr sz="1100">
+                <a:solidFill>
+                  <a:srgbClr val="64748B"/>
+                </a:solidFill>
+              </a:rPr>
+              <a:t>Mean projected compensation increase: +48.6% across successful role transitions.</a:t>
+            </a:r>
+          </a:p>
+          <a:p>
+            <a:pPr>
+              <a:spcBef>
+                <a:spcPts val="600"/>
+              </a:spcBef>
+            </a:pPr>
+            <a:r>
+              <a:rPr b="1" sz="1100">
+                <a:solidFill>
+                  <a:srgbClr val="10B981"/>
+                </a:solidFill>
+              </a:rPr>
+              <a:t>• </a:t>
+            </a:r>
+            <a:r>
+              <a:rPr b="1" sz="1100">
+                <a:solidFill>
+                  <a:srgbClr val="1E293B"/>
+                </a:solidFill>
+              </a:rPr>
+              <a:t>Curated Course Library: </a:t>
+            </a:r>
+            <a:r>
+              <a:rPr sz="1100">
+                <a:solidFill>
+                  <a:srgbClr val="64748B"/>
+                </a:solidFill>
+              </a:rPr>
+              <a:t>Catalog of 18 industry-standard professional certifications and capstone projects.</a:t>
             </a:r>
           </a:p>
         </p:txBody>
@@ -4193,23 +7787,92 @@
       <p:grpSpPr/>
       <p:sp>
         <p:nvSpPr>
-          <p:cNvPr id="2" name="Rectangle 1"/>
+          <p:cNvPr id="2" name="TextBox 1"/>
+          <p:cNvSpPr txBox="1"/>
+          <p:nvPr/>
+        </p:nvSpPr>
+        <p:spPr>
+          <a:xfrm>
+            <a:off x="731520" y="365760"/>
+            <a:ext cx="10728655" cy="822960"/>
+          </a:xfrm>
+          <a:prstGeom prst="rect">
+            <a:avLst/>
+          </a:prstGeom>
+          <a:noFill/>
+        </p:spPr>
+        <p:txBody>
+          <a:bodyPr wrap="square" lIns="0" tIns="0" rIns="0" bIns="0">
+            <a:spAutoFit/>
+          </a:bodyPr>
+          <a:lstStyle/>
+          <a:p>
+            <a:r>
+              <a:rPr b="1" sz="1000">
+                <a:solidFill>
+                  <a:srgbClr val="10B981"/>
+                </a:solidFill>
+              </a:rPr>
+              <a:t>LIVE USER INTERFACE • PROJECT-045</a:t>
+            </a:r>
+          </a:p>
+          <a:p>
+            <a:r>
+              <a:rPr b="1" sz="2000">
+                <a:solidFill>
+                  <a:srgbClr val="0F172A"/>
+                </a:solidFill>
+              </a:rPr>
+              <a:t>AI Career Path Recommender Command Dashboard</a:t>
+            </a:r>
+          </a:p>
+        </p:txBody>
+      </p:sp>
+      <p:pic>
+        <p:nvPicPr>
+          <p:cNvPr id="3" name="Picture 2" descr="01_career_dashboard.png"/>
+          <p:cNvPicPr>
+            <a:picLocks noChangeAspect="1"/>
+          </p:cNvPicPr>
+          <p:nvPr/>
+        </p:nvPicPr>
+        <p:blipFill>
+          <a:blip r:embed="rId2"/>
+          <a:stretch>
+            <a:fillRect/>
+          </a:stretch>
+        </p:blipFill>
+        <p:spPr>
+          <a:xfrm>
+            <a:off x="731520" y="1371600"/>
+            <a:ext cx="6583680" cy="4937760"/>
+          </a:xfrm>
+          <a:prstGeom prst="rect">
+            <a:avLst/>
+          </a:prstGeom>
+        </p:spPr>
+      </p:pic>
+      <p:sp>
+        <p:nvSpPr>
+          <p:cNvPr id="4" name="Rectangle 3"/>
           <p:cNvSpPr/>
           <p:nvPr/>
         </p:nvSpPr>
         <p:spPr>
           <a:xfrm>
-            <a:off x="0" y="0"/>
-            <a:ext cx="12191695" cy="1097280"/>
+            <a:off x="7589520" y="1371600"/>
+            <a:ext cx="3870655" cy="4937760"/>
           </a:xfrm>
           <a:prstGeom prst="rect">
             <a:avLst/>
           </a:prstGeom>
           <a:solidFill>
-            <a:srgbClr val="0F172A"/>
+            <a:srgbClr val="FFFFFF"/>
           </a:solidFill>
-          <a:ln>
-            <a:noFill/>
+          <a:ln w="12700">
+            <a:solidFill>
+              <a:srgbClr val="E2E8F0"/>
+            </a:solidFill>
           </a:ln>
         </p:spPr>
         <p:style>
@@ -4236,14 +7899,14 @@
       </p:sp>
       <p:sp>
         <p:nvSpPr>
-          <p:cNvPr id="3" name="TextBox 2"/>
+          <p:cNvPr id="5" name="TextBox 4"/>
           <p:cNvSpPr txBox="1"/>
           <p:nvPr/>
         </p:nvSpPr>
         <p:spPr>
           <a:xfrm>
-            <a:off x="731520" y="137160"/>
-            <a:ext cx="10698480" cy="822960"/>
+            <a:off x="7772400" y="1554480"/>
+            <a:ext cx="3504895" cy="4572000"/>
           </a:xfrm>
           <a:prstGeom prst="rect">
             <a:avLst/>
@@ -4251,115 +7914,173 @@
           <a:noFill/>
         </p:spPr>
         <p:txBody>
-          <a:bodyPr wrap="square">
+          <a:bodyPr wrap="square" lIns="0" tIns="0" rIns="0" bIns="0">
             <a:spAutoFit/>
           </a:bodyPr>
           <a:lstStyle/>
           <a:p>
-            <a:pPr>
-              <a:defRPr sz="2400" b="1">
-                <a:solidFill>
-                  <a:srgbClr val="FFFFFF"/>
-                </a:solidFill>
-              </a:defRPr>
-            </a:pPr>
-            <a:r>
-              <a:t>5. Experimental Results &amp; Performance Benchmarks</a:t>
-            </a:r>
-          </a:p>
-          <a:p>
-            <a:pPr>
-              <a:defRPr sz="1100">
-                <a:solidFill>
-                  <a:srgbClr val="94A3B8"/>
-                </a:solidFill>
-              </a:defRPr>
-            </a:pPr>
-            <a:r>
-              <a:t>Academic &amp; Industrial AI Project Series  |  Project 45 of 55</a:t>
-            </a:r>
-          </a:p>
-        </p:txBody>
-      </p:sp>
-      <p:sp>
-        <p:nvSpPr>
-          <p:cNvPr id="4" name="TextBox 3"/>
-          <p:cNvSpPr txBox="1"/>
-          <p:nvPr/>
-        </p:nvSpPr>
-        <p:spPr>
-          <a:xfrm>
-            <a:off x="731520" y="1371600"/>
-            <a:ext cx="10698480" cy="5029200"/>
-          </a:xfrm>
-          <a:prstGeom prst="rect">
-            <a:avLst/>
-          </a:prstGeom>
-          <a:noFill/>
-        </p:spPr>
-        <p:txBody>
-          <a:bodyPr wrap="square">
-            <a:spAutoFit/>
-          </a:bodyPr>
-          <a:lstStyle/>
-          <a:p>
-            <a:pPr>
-              <a:spcBef>
-                <a:spcPts val="1200"/>
-              </a:spcBef>
-              <a:defRPr sz="1500" b="1">
-                <a:solidFill>
-                  <a:srgbClr val="10B981"/>
-                </a:solidFill>
-              </a:defRPr>
-            </a:pPr>
-            <a:r>
-              <a:t>★ Validation Accuracy / Score: Achieved 94.8% on independent validation test holdout partitions.</a:t>
-            </a:r>
-          </a:p>
-          <a:p>
-            <a:pPr>
-              <a:spcBef>
-                <a:spcPts val="1200"/>
-              </a:spcBef>
-              <a:defRPr sz="1500" b="1">
-                <a:solidFill>
-                  <a:srgbClr val="10B981"/>
-                </a:solidFill>
-              </a:defRPr>
-            </a:pPr>
-            <a:r>
-              <a:t>★ F1-Score / Macro Precision: Balanced metric of 0.932 across positive and negative classification targets.</a:t>
-            </a:r>
-          </a:p>
-          <a:p>
-            <a:pPr>
-              <a:spcBef>
-                <a:spcPts val="1200"/>
-              </a:spcBef>
-              <a:defRPr sz="1500" b="1">
-                <a:solidFill>
-                  <a:srgbClr val="10B981"/>
-                </a:solidFill>
-              </a:defRPr>
-            </a:pPr>
-            <a:r>
-              <a:t>★ Inference Latency Profile: Median latency of 18.4 ms per inference query on edge CPU hardware.</a:t>
-            </a:r>
-          </a:p>
-          <a:p>
-            <a:pPr>
-              <a:spcBef>
-                <a:spcPts val="1200"/>
-              </a:spcBef>
-              <a:defRPr sz="1500" b="1">
-                <a:solidFill>
-                  <a:srgbClr val="10B981"/>
-                </a:solidFill>
-              </a:defRPr>
-            </a:pPr>
-            <a:r>
-              <a:t>★ False Positive Rate (FPR): Maintained below 2.8%, satisfying stringent operational false alarm constraints.</a:t>
+            <a:r>
+              <a:rPr b="1" sz="1400">
+                <a:solidFill>
+                  <a:srgbClr val="0F172A"/>
+                </a:solidFill>
+              </a:rPr>
+              <a:t>Command Dashboard Features</a:t>
+            </a:r>
+          </a:p>
+          <a:p>
+            <a:pPr>
+              <a:spcBef>
+                <a:spcPts val="600"/>
+              </a:spcBef>
+            </a:pPr>
+            <a:r>
+              <a:rPr b="1" sz="1100">
+                <a:solidFill>
+                  <a:srgbClr val="10B981"/>
+                </a:solidFill>
+              </a:rPr>
+              <a:t>• </a:t>
+            </a:r>
+            <a:r>
+              <a:rPr b="1" sz="1100">
+                <a:solidFill>
+                  <a:srgbClr val="1E293B"/>
+                </a:solidFill>
+              </a:rPr>
+              <a:t>Dedicated Port 5045: </a:t>
+            </a:r>
+            <a:r>
+              <a:rPr sz="1100">
+                <a:solidFill>
+                  <a:srgbClr val="64748B"/>
+                </a:solidFill>
+              </a:rPr>
+              <a:t>Direct HTTP/WebSocket communication on isolated port 5045.</a:t>
+            </a:r>
+          </a:p>
+          <a:p>
+            <a:pPr>
+              <a:spcBef>
+                <a:spcPts val="600"/>
+              </a:spcBef>
+            </a:pPr>
+            <a:r>
+              <a:rPr b="1" sz="1100">
+                <a:solidFill>
+                  <a:srgbClr val="10B981"/>
+                </a:solidFill>
+              </a:rPr>
+              <a:t>• </a:t>
+            </a:r>
+            <a:r>
+              <a:rPr b="1" sz="1100">
+                <a:solidFill>
+                  <a:srgbClr val="1E293B"/>
+                </a:solidFill>
+              </a:rPr>
+              <a:t>Real-Time KPI Cards: </a:t>
+            </a:r>
+            <a:r>
+              <a:rPr sz="1100">
+                <a:solidFill>
+                  <a:srgbClr val="64748B"/>
+                </a:solidFill>
+              </a:rPr>
+              <a:t>Displays Active Roadmaps, Career-Ready Ratio, Mean Readiness Score, and Audit Blocks.</a:t>
+            </a:r>
+          </a:p>
+          <a:p>
+            <a:pPr>
+              <a:spcBef>
+                <a:spcPts val="600"/>
+              </a:spcBef>
+            </a:pPr>
+            <a:r>
+              <a:rPr b="1" sz="1100">
+                <a:solidFill>
+                  <a:srgbClr val="10B981"/>
+                </a:solidFill>
+              </a:rPr>
+              <a:t>• </a:t>
+            </a:r>
+            <a:r>
+              <a:rPr b="1" sz="1100">
+                <a:solidFill>
+                  <a:srgbClr val="1E293B"/>
+                </a:solidFill>
+              </a:rPr>
+              <a:t>Interactive Career Profiler: </a:t>
+            </a:r>
+            <a:r>
+              <a:rPr sz="1100">
+                <a:solidFill>
+                  <a:srgbClr val="64748B"/>
+                </a:solidFill>
+              </a:rPr>
+              <a:t>Configurable candidate profiles, target aspiration selection, and study parameters.</a:t>
+            </a:r>
+          </a:p>
+          <a:p>
+            <a:pPr>
+              <a:spcBef>
+                <a:spcPts val="600"/>
+              </a:spcBef>
+            </a:pPr>
+            <a:r>
+              <a:rPr b="1" sz="1100">
+                <a:solidFill>
+                  <a:srgbClr val="10B981"/>
+                </a:solidFill>
+              </a:rPr>
+              <a:t>• </a:t>
+            </a:r>
+            <a:r>
+              <a:rPr b="1" sz="1100">
+                <a:solidFill>
+                  <a:srgbClr val="1E293B"/>
+                </a:solidFill>
+              </a:rPr>
+              <a:t>Instant Diagnostic Output: </a:t>
+            </a:r>
+            <a:r>
+              <a:rPr sz="1100">
+                <a:solidFill>
+                  <a:srgbClr val="64748B"/>
+                </a:solidFill>
+              </a:rPr>
+              <a:t>Real-time readiness badge, missing skills breakdown, and course recommendations.</a:t>
+            </a:r>
+          </a:p>
+          <a:p>
+            <a:pPr>
+              <a:spcBef>
+                <a:spcPts val="600"/>
+              </a:spcBef>
+            </a:pPr>
+            <a:r>
+              <a:rPr b="1" sz="1100">
+                <a:solidFill>
+                  <a:srgbClr val="10B981"/>
+                </a:solidFill>
+              </a:rPr>
+              <a:t>• </a:t>
+            </a:r>
+            <a:r>
+              <a:rPr b="1" sz="1100">
+                <a:solidFill>
+                  <a:srgbClr val="1E293B"/>
+                </a:solidFill>
+              </a:rPr>
+              <a:t>Hardware Status Indicator: </a:t>
+            </a:r>
+            <a:r>
+              <a:rPr sz="1100">
+                <a:solidFill>
+                  <a:srgbClr val="64748B"/>
+                </a:solidFill>
+              </a:rPr>
+              <a:t>Confirms Apple Silicon MPS acceleration active with 13.2 ms latency.</a:t>
             </a:r>
           </a:p>
         </p:txBody>
@@ -4384,23 +8105,92 @@
       <p:grpSpPr/>
       <p:sp>
         <p:nvSpPr>
-          <p:cNvPr id="2" name="Rectangle 1"/>
+          <p:cNvPr id="2" name="TextBox 1"/>
+          <p:cNvSpPr txBox="1"/>
+          <p:nvPr/>
+        </p:nvSpPr>
+        <p:spPr>
+          <a:xfrm>
+            <a:off x="731520" y="365760"/>
+            <a:ext cx="10728655" cy="822960"/>
+          </a:xfrm>
+          <a:prstGeom prst="rect">
+            <a:avLst/>
+          </a:prstGeom>
+          <a:noFill/>
+        </p:spPr>
+        <p:txBody>
+          <a:bodyPr wrap="square" lIns="0" tIns="0" rIns="0" bIns="0">
+            <a:spAutoFit/>
+          </a:bodyPr>
+          <a:lstStyle/>
+          <a:p>
+            <a:r>
+              <a:rPr b="1" sz="1000">
+                <a:solidFill>
+                  <a:srgbClr val="10B981"/>
+                </a:solidFill>
+              </a:rPr>
+              <a:t>VISUAL AI ENGINE • PROJECT-045</a:t>
+            </a:r>
+          </a:p>
+          <a:p>
+            <a:r>
+              <a:rPr b="1" sz="2000">
+                <a:solidFill>
+                  <a:srgbClr val="0F172A"/>
+                </a:solidFill>
+              </a:rPr>
+              <a:t>60 FPS Topological Competency Graph &amp; Learning Arcs</a:t>
+            </a:r>
+          </a:p>
+        </p:txBody>
+      </p:sp>
+      <p:pic>
+        <p:nvPicPr>
+          <p:cNvPr id="3" name="Picture 2" descr="02_topological_graph_canvas.png"/>
+          <p:cNvPicPr>
+            <a:picLocks noChangeAspect="1"/>
+          </p:cNvPicPr>
+          <p:nvPr/>
+        </p:nvPicPr>
+        <p:blipFill>
+          <a:blip r:embed="rId2"/>
+          <a:stretch>
+            <a:fillRect/>
+          </a:stretch>
+        </p:blipFill>
+        <p:spPr>
+          <a:xfrm>
+            <a:off x="731520" y="1371600"/>
+            <a:ext cx="6583680" cy="4937760"/>
+          </a:xfrm>
+          <a:prstGeom prst="rect">
+            <a:avLst/>
+          </a:prstGeom>
+        </p:spPr>
+      </p:pic>
+      <p:sp>
+        <p:nvSpPr>
+          <p:cNvPr id="4" name="Rectangle 3"/>
           <p:cNvSpPr/>
           <p:nvPr/>
         </p:nvSpPr>
         <p:spPr>
           <a:xfrm>
-            <a:off x="0" y="0"/>
-            <a:ext cx="12191695" cy="1097280"/>
+            <a:off x="7589520" y="1371600"/>
+            <a:ext cx="3870655" cy="4937760"/>
           </a:xfrm>
           <a:prstGeom prst="rect">
             <a:avLst/>
           </a:prstGeom>
           <a:solidFill>
-            <a:srgbClr val="0F172A"/>
+            <a:srgbClr val="FFFFFF"/>
           </a:solidFill>
-          <a:ln>
-            <a:noFill/>
+          <a:ln w="12700">
+            <a:solidFill>
+              <a:srgbClr val="E2E8F0"/>
+            </a:solidFill>
           </a:ln>
         </p:spPr>
         <p:style>
@@ -4427,14 +8217,14 @@
       </p:sp>
       <p:sp>
         <p:nvSpPr>
-          <p:cNvPr id="3" name="TextBox 2"/>
+          <p:cNvPr id="5" name="TextBox 4"/>
           <p:cNvSpPr txBox="1"/>
           <p:nvPr/>
         </p:nvSpPr>
         <p:spPr>
           <a:xfrm>
-            <a:off x="731520" y="137160"/>
-            <a:ext cx="10698480" cy="822960"/>
+            <a:off x="7772400" y="1554480"/>
+            <a:ext cx="3504895" cy="4572000"/>
           </a:xfrm>
           <a:prstGeom prst="rect">
             <a:avLst/>
@@ -4442,163 +8232,173 @@
           <a:noFill/>
         </p:spPr>
         <p:txBody>
-          <a:bodyPr wrap="square">
+          <a:bodyPr wrap="square" lIns="0" tIns="0" rIns="0" bIns="0">
             <a:spAutoFit/>
           </a:bodyPr>
           <a:lstStyle/>
           <a:p>
-            <a:pPr>
-              <a:defRPr sz="2400" b="1">
-                <a:solidFill>
-                  <a:srgbClr val="FFFFFF"/>
-                </a:solidFill>
-              </a:defRPr>
-            </a:pPr>
-            <a:r>
-              <a:t>6. Technology Stack &amp; Production Deployment</a:t>
-            </a:r>
-          </a:p>
-          <a:p>
-            <a:pPr>
-              <a:defRPr sz="1100">
-                <a:solidFill>
-                  <a:srgbClr val="94A3B8"/>
-                </a:solidFill>
-              </a:defRPr>
-            </a:pPr>
-            <a:r>
-              <a:t>Academic &amp; Industrial AI Project Series  |  Project 45 of 55</a:t>
-            </a:r>
-          </a:p>
-        </p:txBody>
-      </p:sp>
-      <p:sp>
-        <p:nvSpPr>
-          <p:cNvPr id="4" name="TextBox 3"/>
-          <p:cNvSpPr txBox="1"/>
-          <p:nvPr/>
-        </p:nvSpPr>
-        <p:spPr>
-          <a:xfrm>
-            <a:off x="731520" y="1371600"/>
-            <a:ext cx="10698480" cy="5029200"/>
-          </a:xfrm>
-          <a:prstGeom prst="rect">
-            <a:avLst/>
-          </a:prstGeom>
-          <a:noFill/>
-        </p:spPr>
-        <p:txBody>
-          <a:bodyPr wrap="square">
-            <a:spAutoFit/>
-          </a:bodyPr>
-          <a:lstStyle/>
-          <a:p>
-            <a:pPr>
-              <a:spcBef>
-                <a:spcPts val="800"/>
-              </a:spcBef>
-              <a:defRPr sz="1500" b="1">
-                <a:solidFill>
-                  <a:srgbClr val="1E3A8A"/>
-                </a:solidFill>
-              </a:defRPr>
-            </a:pPr>
-            <a:r>
-              <a:t>⚙ Core Machine Learning Framework</a:t>
-            </a:r>
-          </a:p>
-          <a:p>
-            <a:pPr>
-              <a:defRPr sz="1300">
-                <a:solidFill>
-                  <a:srgbClr val="475569"/>
-                </a:solidFill>
-              </a:defRPr>
-            </a:pPr>
-            <a:r>
-              <a:t>PyTorch 2.0+ / Scikit-learn / HuggingFace Transformers / OpenCV</a:t>
-            </a:r>
-          </a:p>
-          <a:p>
-            <a:pPr>
-              <a:spcBef>
-                <a:spcPts val="800"/>
-              </a:spcBef>
-              <a:defRPr sz="1500" b="1">
-                <a:solidFill>
-                  <a:srgbClr val="1E3A8A"/>
-                </a:solidFill>
-              </a:defRPr>
-            </a:pPr>
-            <a:r>
-              <a:t>⚙ Asynchronous REST Backend</a:t>
-            </a:r>
-          </a:p>
-          <a:p>
-            <a:pPr>
-              <a:defRPr sz="1300">
-                <a:solidFill>
-                  <a:srgbClr val="475569"/>
-                </a:solidFill>
-              </a:defRPr>
-            </a:pPr>
-            <a:r>
-              <a:t>FastAPI / Uvicorn ASGI Server / Pydantic V2 Type Safety</a:t>
-            </a:r>
-          </a:p>
-          <a:p>
-            <a:pPr>
-              <a:spcBef>
-                <a:spcPts val="800"/>
-              </a:spcBef>
-              <a:defRPr sz="1500" b="1">
-                <a:solidFill>
-                  <a:srgbClr val="1E3A8A"/>
-                </a:solidFill>
-              </a:defRPr>
-            </a:pPr>
-            <a:r>
-              <a:t>⚙ Data Persistence &amp; Storage</a:t>
-            </a:r>
-          </a:p>
-          <a:p>
-            <a:pPr>
-              <a:defRPr sz="1300">
-                <a:solidFill>
-                  <a:srgbClr val="475569"/>
-                </a:solidFill>
-              </a:defRPr>
-            </a:pPr>
-            <a:r>
-              <a:t>SQLite / PostgreSQL with transactional integrity &amp; audit trail</a:t>
-            </a:r>
-          </a:p>
-          <a:p>
-            <a:pPr>
-              <a:spcBef>
-                <a:spcPts val="800"/>
-              </a:spcBef>
-              <a:defRPr sz="1500" b="1">
-                <a:solidFill>
-                  <a:srgbClr val="1E3A8A"/>
-                </a:solidFill>
-              </a:defRPr>
-            </a:pPr>
-            <a:r>
-              <a:t>⚙ Interactive Frontend Layer</a:t>
-            </a:r>
-          </a:p>
-          <a:p>
-            <a:pPr>
-              <a:defRPr sz="1300">
-                <a:solidFill>
-                  <a:srgbClr val="475569"/>
-                </a:solidFill>
-              </a:defRPr>
-            </a:pPr>
-            <a:r>
-              <a:t>Modern Responsive Web Portal (HTML5, Tailwind/CSS, JavaScript ES6+)</a:t>
+            <a:r>
+              <a:rPr b="1" sz="1400">
+                <a:solidFill>
+                  <a:srgbClr val="0F172A"/>
+                </a:solidFill>
+              </a:rPr>
+              <a:t>Vector Space Graph Rendering</a:t>
+            </a:r>
+          </a:p>
+          <a:p>
+            <a:pPr>
+              <a:spcBef>
+                <a:spcPts val="600"/>
+              </a:spcBef>
+            </a:pPr>
+            <a:r>
+              <a:rPr b="1" sz="1100">
+                <a:solidFill>
+                  <a:srgbClr val="10B981"/>
+                </a:solidFill>
+              </a:rPr>
+              <a:t>• </a:t>
+            </a:r>
+            <a:r>
+              <a:rPr b="1" sz="1100">
+                <a:solidFill>
+                  <a:srgbClr val="1E293B"/>
+                </a:solidFill>
+              </a:rPr>
+              <a:t>Real-Time Canvas Rendering: </a:t>
+            </a:r>
+            <a:r>
+              <a:rPr sz="1100">
+                <a:solidFill>
+                  <a:srgbClr val="64748B"/>
+                </a:solidFill>
+              </a:rPr>
+              <a:t>60 FPS HTML5 Canvas visualizes high-dimensional competency convergence.</a:t>
+            </a:r>
+          </a:p>
+          <a:p>
+            <a:pPr>
+              <a:spcBef>
+                <a:spcPts val="600"/>
+              </a:spcBef>
+            </a:pPr>
+            <a:r>
+              <a:rPr b="1" sz="1100">
+                <a:solidFill>
+                  <a:srgbClr val="10B981"/>
+                </a:solidFill>
+              </a:rPr>
+              <a:t>• </a:t>
+            </a:r>
+            <a:r>
+              <a:rPr b="1" sz="1100">
+                <a:solidFill>
+                  <a:srgbClr val="1E293B"/>
+                </a:solidFill>
+              </a:rPr>
+              <a:t>Competency Node Coloring: </a:t>
+            </a:r>
+            <a:r>
+              <a:rPr sz="1100">
+                <a:solidFill>
+                  <a:srgbClr val="64748B"/>
+                </a:solidFill>
+              </a:rPr>
+              <a:t>Green nodes indicate acquired competencies; rose nodes indicate missing skill gaps.</a:t>
+            </a:r>
+          </a:p>
+          <a:p>
+            <a:pPr>
+              <a:spcBef>
+                <a:spcPts val="600"/>
+              </a:spcBef>
+            </a:pPr>
+            <a:r>
+              <a:rPr b="1" sz="1100">
+                <a:solidFill>
+                  <a:srgbClr val="10B981"/>
+                </a:solidFill>
+              </a:rPr>
+              <a:t>• </a:t>
+            </a:r>
+            <a:r>
+              <a:rPr b="1" sz="1100">
+                <a:solidFill>
+                  <a:srgbClr val="1E293B"/>
+                </a:solidFill>
+              </a:rPr>
+              <a:t>Animated Learning Arcs: </a:t>
+            </a:r>
+            <a:r>
+              <a:rPr sz="1100">
+                <a:solidFill>
+                  <a:srgbClr val="64748B"/>
+                </a:solidFill>
+              </a:rPr>
+              <a:t>Dynamic pulsating arcs connect candidate knowledge graph to target role destination.</a:t>
+            </a:r>
+          </a:p>
+          <a:p>
+            <a:pPr>
+              <a:spcBef>
+                <a:spcPts val="600"/>
+              </a:spcBef>
+            </a:pPr>
+            <a:r>
+              <a:rPr b="1" sz="1100">
+                <a:solidFill>
+                  <a:srgbClr val="10B981"/>
+                </a:solidFill>
+              </a:rPr>
+              <a:t>• </a:t>
+            </a:r>
+            <a:r>
+              <a:rPr b="1" sz="1100">
+                <a:solidFill>
+                  <a:srgbClr val="1E293B"/>
+                </a:solidFill>
+              </a:rPr>
+              <a:t>Interactive Trajectory Interpolation: </a:t>
+            </a:r>
+            <a:r>
+              <a:rPr sz="1100">
+                <a:solidFill>
+                  <a:srgbClr val="64748B"/>
+                </a:solidFill>
+              </a:rPr>
+              <a:t>Demonstrates step-by-step prerequisite progression along learning paths.</a:t>
+            </a:r>
+          </a:p>
+          <a:p>
+            <a:pPr>
+              <a:spcBef>
+                <a:spcPts val="600"/>
+              </a:spcBef>
+            </a:pPr>
+            <a:r>
+              <a:rPr b="1" sz="1100">
+                <a:solidFill>
+                  <a:srgbClr val="10B981"/>
+                </a:solidFill>
+              </a:rPr>
+              <a:t>• </a:t>
+            </a:r>
+            <a:r>
+              <a:rPr b="1" sz="1100">
+                <a:solidFill>
+                  <a:srgbClr val="1E293B"/>
+                </a:solidFill>
+              </a:rPr>
+              <a:t>Zero-Jank Execution: </a:t>
+            </a:r>
+            <a:r>
+              <a:rPr sz="1100">
+                <a:solidFill>
+                  <a:srgbClr val="64748B"/>
+                </a:solidFill>
+              </a:rPr>
+              <a:t>Offloaded GPU rasterization ensures smooth rendering during heavy batch evaluation.</a:t>
             </a:r>
           </a:p>
         </p:txBody>
@@ -4623,23 +8423,92 @@
       <p:grpSpPr/>
       <p:sp>
         <p:nvSpPr>
-          <p:cNvPr id="2" name="Rectangle 1"/>
+          <p:cNvPr id="2" name="TextBox 1"/>
+          <p:cNvSpPr txBox="1"/>
+          <p:nvPr/>
+        </p:nvSpPr>
+        <p:spPr>
+          <a:xfrm>
+            <a:off x="731520" y="365760"/>
+            <a:ext cx="10728655" cy="822960"/>
+          </a:xfrm>
+          <a:prstGeom prst="rect">
+            <a:avLst/>
+          </a:prstGeom>
+          <a:noFill/>
+        </p:spPr>
+        <p:txBody>
+          <a:bodyPr wrap="square" lIns="0" tIns="0" rIns="0" bIns="0">
+            <a:spAutoFit/>
+          </a:bodyPr>
+          <a:lstStyle/>
+          <a:p>
+            <a:r>
+              <a:rPr b="1" sz="1000">
+                <a:solidFill>
+                  <a:srgbClr val="10B981"/>
+                </a:solidFill>
+              </a:rPr>
+              <a:t>NEURAL EVALUATION • PROJECT-045</a:t>
+            </a:r>
+          </a:p>
+          <a:p>
+            <a:r>
+              <a:rPr b="1" sz="2000">
+                <a:solidFill>
+                  <a:srgbClr val="0F172A"/>
+                </a:solidFill>
+              </a:rPr>
+              <a:t>Multi-Target Trajectory Regressor Multi-Head Breakdown</a:t>
+            </a:r>
+          </a:p>
+        </p:txBody>
+      </p:sp>
+      <p:pic>
+        <p:nvPicPr>
+          <p:cNvPr id="3" name="Picture 2" descr="03_trajectory_regressor_chart.png"/>
+          <p:cNvPicPr>
+            <a:picLocks noChangeAspect="1"/>
+          </p:cNvPicPr>
+          <p:nvPr/>
+        </p:nvPicPr>
+        <p:blipFill>
+          <a:blip r:embed="rId2"/>
+          <a:stretch>
+            <a:fillRect/>
+          </a:stretch>
+        </p:blipFill>
+        <p:spPr>
+          <a:xfrm>
+            <a:off x="731520" y="1371600"/>
+            <a:ext cx="6583680" cy="4937760"/>
+          </a:xfrm>
+          <a:prstGeom prst="rect">
+            <a:avLst/>
+          </a:prstGeom>
+        </p:spPr>
+      </p:pic>
+      <p:sp>
+        <p:nvSpPr>
+          <p:cNvPr id="4" name="Rectangle 3"/>
           <p:cNvSpPr/>
           <p:nvPr/>
         </p:nvSpPr>
         <p:spPr>
           <a:xfrm>
-            <a:off x="0" y="0"/>
-            <a:ext cx="12191695" cy="1097280"/>
+            <a:off x="7589520" y="1371600"/>
+            <a:ext cx="3870655" cy="4937760"/>
           </a:xfrm>
           <a:prstGeom prst="rect">
             <a:avLst/>
           </a:prstGeom>
           <a:solidFill>
-            <a:srgbClr val="0F172A"/>
+            <a:srgbClr val="FFFFFF"/>
           </a:solidFill>
-          <a:ln>
-            <a:noFill/>
+          <a:ln w="12700">
+            <a:solidFill>
+              <a:srgbClr val="E2E8F0"/>
+            </a:solidFill>
           </a:ln>
         </p:spPr>
         <p:style>
@@ -4666,14 +8535,14 @@
       </p:sp>
       <p:sp>
         <p:nvSpPr>
-          <p:cNvPr id="3" name="TextBox 2"/>
+          <p:cNvPr id="5" name="TextBox 4"/>
           <p:cNvSpPr txBox="1"/>
           <p:nvPr/>
         </p:nvSpPr>
         <p:spPr>
           <a:xfrm>
-            <a:off x="731520" y="137160"/>
-            <a:ext cx="10698480" cy="822960"/>
+            <a:off x="7772400" y="1554480"/>
+            <a:ext cx="3504895" cy="4572000"/>
           </a:xfrm>
           <a:prstGeom prst="rect">
             <a:avLst/>
@@ -4681,46 +8550,205 @@
           <a:noFill/>
         </p:spPr>
         <p:txBody>
-          <a:bodyPr wrap="square">
+          <a:bodyPr wrap="square" lIns="0" tIns="0" rIns="0" bIns="0">
             <a:spAutoFit/>
           </a:bodyPr>
           <a:lstStyle/>
           <a:p>
-            <a:pPr>
-              <a:defRPr sz="2400" b="1">
-                <a:solidFill>
-                  <a:srgbClr val="FFFFFF"/>
-                </a:solidFill>
-              </a:defRPr>
-            </a:pPr>
-            <a:r>
-              <a:t>7. Conclusion &amp; Future Roadmap</a:t>
-            </a:r>
-          </a:p>
-          <a:p>
-            <a:pPr>
-              <a:defRPr sz="1100">
-                <a:solidFill>
-                  <a:srgbClr val="94A3B8"/>
-                </a:solidFill>
-              </a:defRPr>
-            </a:pPr>
-            <a:r>
-              <a:t>Academic &amp; Industrial AI Project Series  |  Project 45 of 55</a:t>
-            </a:r>
-          </a:p>
-        </p:txBody>
-      </p:sp>
-      <p:sp>
-        <p:nvSpPr>
-          <p:cNvPr id="4" name="TextBox 3"/>
+            <a:r>
+              <a:rPr b="1" sz="1400">
+                <a:solidFill>
+                  <a:srgbClr val="0F172A"/>
+                </a:solidFill>
+              </a:rPr>
+              <a:t>5-Head Competency Breakdown</a:t>
+            </a:r>
+          </a:p>
+          <a:p>
+            <a:pPr>
+              <a:spcBef>
+                <a:spcPts val="600"/>
+              </a:spcBef>
+            </a:pPr>
+            <a:r>
+              <a:rPr b="1" sz="1100">
+                <a:solidFill>
+                  <a:srgbClr val="10B981"/>
+                </a:solidFill>
+              </a:rPr>
+              <a:t>• </a:t>
+            </a:r>
+            <a:r>
+              <a:rPr b="1" sz="1100">
+                <a:solidFill>
+                  <a:srgbClr val="1E293B"/>
+                </a:solidFill>
+              </a:rPr>
+              <a:t>Role Readiness %: </a:t>
+            </a:r>
+            <a:r>
+              <a:rPr sz="1100">
+                <a:solidFill>
+                  <a:srgbClr val="64748B"/>
+                </a:solidFill>
+              </a:rPr>
+              <a:t>Calibrated percentage indicating baseline capability for target role (MAE: 2.77%).</a:t>
+            </a:r>
+          </a:p>
+          <a:p>
+            <a:pPr>
+              <a:spcBef>
+                <a:spcPts val="600"/>
+              </a:spcBef>
+            </a:pPr>
+            <a:r>
+              <a:rPr b="1" sz="1100">
+                <a:solidFill>
+                  <a:srgbClr val="10B981"/>
+                </a:solidFill>
+              </a:rPr>
+              <a:t>• </a:t>
+            </a:r>
+            <a:r>
+              <a:rPr b="1" sz="1100">
+                <a:solidFill>
+                  <a:srgbClr val="1E293B"/>
+                </a:solidFill>
+              </a:rPr>
+              <a:t>Skill Gap %: </a:t>
+            </a:r>
+            <a:r>
+              <a:rPr sz="1100">
+                <a:solidFill>
+                  <a:srgbClr val="64748B"/>
+                </a:solidFill>
+              </a:rPr>
+              <a:t>Inverse competency delta indicating required learning effort (MAE: 2.81%).</a:t>
+            </a:r>
+          </a:p>
+          <a:p>
+            <a:pPr>
+              <a:spcBef>
+                <a:spcPts val="600"/>
+              </a:spcBef>
+            </a:pPr>
+            <a:r>
+              <a:rPr b="1" sz="1100">
+                <a:solidFill>
+                  <a:srgbClr val="10B981"/>
+                </a:solidFill>
+              </a:rPr>
+              <a:t>• </a:t>
+            </a:r>
+            <a:r>
+              <a:rPr b="1" sz="1100">
+                <a:solidFill>
+                  <a:srgbClr val="1E293B"/>
+                </a:solidFill>
+              </a:rPr>
+              <a:t>Estimated Transition Weeks: </a:t>
+            </a:r>
+            <a:r>
+              <a:rPr sz="1100">
+                <a:solidFill>
+                  <a:srgbClr val="64748B"/>
+                </a:solidFill>
+              </a:rPr>
+              <a:t>Time to role readiness based on study hours and project velocity (MAE: 0.78 wks).</a:t>
+            </a:r>
+          </a:p>
+          <a:p>
+            <a:pPr>
+              <a:spcBef>
+                <a:spcPts val="600"/>
+              </a:spcBef>
+            </a:pPr>
+            <a:r>
+              <a:rPr b="1" sz="1100">
+                <a:solidFill>
+                  <a:srgbClr val="10B981"/>
+                </a:solidFill>
+              </a:rPr>
+              <a:t>• </a:t>
+            </a:r>
+            <a:r>
+              <a:rPr b="1" sz="1100">
+                <a:solidFill>
+                  <a:srgbClr val="1E293B"/>
+                </a:solidFill>
+              </a:rPr>
+              <a:t>Salary Growth Potential %: </a:t>
+            </a:r>
+            <a:r>
+              <a:rPr sz="1100">
+                <a:solidFill>
+                  <a:srgbClr val="64748B"/>
+                </a:solidFill>
+              </a:rPr>
+              <a:t>Projected career earnings increase post-reskilling completion (MAE: 2.75%).</a:t>
+            </a:r>
+          </a:p>
+          <a:p>
+            <a:pPr>
+              <a:spcBef>
+                <a:spcPts val="600"/>
+              </a:spcBef>
+            </a:pPr>
+            <a:r>
+              <a:rPr b="1" sz="1100">
+                <a:solidFill>
+                  <a:srgbClr val="10B981"/>
+                </a:solidFill>
+              </a:rPr>
+              <a:t>• </a:t>
+            </a:r>
+            <a:r>
+              <a:rPr b="1" sz="1100">
+                <a:solidFill>
+                  <a:srgbClr val="1E293B"/>
+                </a:solidFill>
+              </a:rPr>
+              <a:t>Trajectory Alignment %: </a:t>
+            </a:r>
+            <a:r>
+              <a:rPr sz="1100">
+                <a:solidFill>
+                  <a:srgbClr val="64748B"/>
+                </a:solidFill>
+              </a:rPr>
+              <a:t>Topological consistency across candidate history and industry benchmarks.</a:t>
+            </a:r>
+          </a:p>
+        </p:txBody>
+      </p:sp>
+    </p:spTree>
+  </p:cSld>
+  <p:clrMapOvr>
+    <a:masterClrMapping/>
+  </p:clrMapOvr>
+</p:sld>
+</file>
+
+<file path=ppt/slides/slide9.xml><?xml version="1.0" encoding="utf-8"?>
+<p:sld xmlns:a="http://schemas.openxmlformats.org/drawingml/2006/main" xmlns:p="http://schemas.openxmlformats.org/presentationml/2006/main" xmlns:r="http://schemas.openxmlformats.org/officeDocument/2006/relationships">
+  <p:cSld>
+    <p:spTree>
+      <p:nvGrpSpPr>
+        <p:cNvPr id="1" name=""/>
+        <p:cNvGrpSpPr/>
+        <p:nvPr/>
+      </p:nvGrpSpPr>
+      <p:grpSpPr/>
+      <p:sp>
+        <p:nvSpPr>
+          <p:cNvPr id="2" name="TextBox 1"/>
           <p:cNvSpPr txBox="1"/>
           <p:nvPr/>
         </p:nvSpPr>
         <p:spPr>
           <a:xfrm>
-            <a:off x="731520" y="1371600"/>
-            <a:ext cx="10698480" cy="5029200"/>
+            <a:off x="731520" y="365760"/>
+            <a:ext cx="10728655" cy="822960"/>
           </a:xfrm>
           <a:prstGeom prst="rect">
             <a:avLst/>
@@ -4728,89 +8756,285 @@
           <a:noFill/>
         </p:spPr>
         <p:txBody>
-          <a:bodyPr wrap="square">
+          <a:bodyPr wrap="square" lIns="0" tIns="0" rIns="0" bIns="0">
             <a:spAutoFit/>
           </a:bodyPr>
           <a:lstStyle/>
           <a:p>
-            <a:pPr>
-              <a:spcBef>
-                <a:spcPts val="1000"/>
-              </a:spcBef>
-              <a:defRPr sz="1500" b="1">
+            <a:r>
+              <a:rPr b="1" sz="1000">
+                <a:solidFill>
+                  <a:srgbClr val="10B981"/>
+                </a:solidFill>
+              </a:rPr>
+              <a:t>TRAJECTORY WORKFLOW • PROJECT-045</a:t>
+            </a:r>
+          </a:p>
+          <a:p>
+            <a:r>
+              <a:rPr b="1" sz="2000">
                 <a:solidFill>
                   <a:srgbClr val="0F172A"/>
                 </a:solidFill>
-              </a:defRPr>
-            </a:pPr>
-            <a:r>
-              <a:t>■ Project Accomplishments</a:t>
-            </a:r>
-          </a:p>
-          <a:p>
-            <a:pPr>
-              <a:defRPr sz="1300">
-                <a:solidFill>
-                  <a:srgbClr val="475569"/>
-                </a:solidFill>
-              </a:defRPr>
-            </a:pPr>
-            <a:r>
-              <a:t>Engineered a robust, end-to-end prototype validating the initial abstract with reproducible experiments.</a:t>
-            </a:r>
-          </a:p>
-          <a:p>
-            <a:pPr>
-              <a:spcBef>
-                <a:spcPts val="1000"/>
-              </a:spcBef>
-              <a:defRPr sz="1500" b="1">
+              </a:rPr>
+              <a:t>AI / ML Engineer High-Readiness Roadmap</a:t>
+            </a:r>
+          </a:p>
+        </p:txBody>
+      </p:sp>
+      <p:pic>
+        <p:nvPicPr>
+          <p:cNvPr id="3" name="Picture 2" descr="04_ai_engineer_high_readiness.png"/>
+          <p:cNvPicPr>
+            <a:picLocks noChangeAspect="1"/>
+          </p:cNvPicPr>
+          <p:nvPr/>
+        </p:nvPicPr>
+        <p:blipFill>
+          <a:blip r:embed="rId2"/>
+          <a:stretch>
+            <a:fillRect/>
+          </a:stretch>
+        </p:blipFill>
+        <p:spPr>
+          <a:xfrm>
+            <a:off x="731520" y="1371600"/>
+            <a:ext cx="6583680" cy="4937760"/>
+          </a:xfrm>
+          <a:prstGeom prst="rect">
+            <a:avLst/>
+          </a:prstGeom>
+        </p:spPr>
+      </p:pic>
+      <p:sp>
+        <p:nvSpPr>
+          <p:cNvPr id="4" name="Rectangle 3"/>
+          <p:cNvSpPr/>
+          <p:nvPr/>
+        </p:nvSpPr>
+        <p:spPr>
+          <a:xfrm>
+            <a:off x="7589520" y="1371600"/>
+            <a:ext cx="3870655" cy="4937760"/>
+          </a:xfrm>
+          <a:prstGeom prst="rect">
+            <a:avLst/>
+          </a:prstGeom>
+          <a:solidFill>
+            <a:srgbClr val="FFFFFF"/>
+          </a:solidFill>
+          <a:ln w="12700">
+            <a:solidFill>
+              <a:srgbClr val="E2E8F0"/>
+            </a:solidFill>
+          </a:ln>
+        </p:spPr>
+        <p:style>
+          <a:lnRef idx="1">
+            <a:schemeClr val="accent1"/>
+          </a:lnRef>
+          <a:fillRef idx="3">
+            <a:schemeClr val="accent1"/>
+          </a:fillRef>
+          <a:effectRef idx="2">
+            <a:schemeClr val="accent1"/>
+          </a:effectRef>
+          <a:fontRef idx="minor">
+            <a:schemeClr val="lt1"/>
+          </a:fontRef>
+        </p:style>
+        <p:txBody>
+          <a:bodyPr rtlCol="0" anchor="ctr"/>
+          <a:lstStyle/>
+          <a:p>
+            <a:pPr algn="ctr"/>
+          </a:p>
+        </p:txBody>
+      </p:sp>
+      <p:sp>
+        <p:nvSpPr>
+          <p:cNvPr id="5" name="TextBox 4"/>
+          <p:cNvSpPr txBox="1"/>
+          <p:nvPr/>
+        </p:nvSpPr>
+        <p:spPr>
+          <a:xfrm>
+            <a:off x="7772400" y="1554480"/>
+            <a:ext cx="3504895" cy="4572000"/>
+          </a:xfrm>
+          <a:prstGeom prst="rect">
+            <a:avLst/>
+          </a:prstGeom>
+          <a:noFill/>
+        </p:spPr>
+        <p:txBody>
+          <a:bodyPr wrap="square" lIns="0" tIns="0" rIns="0" bIns="0">
+            <a:spAutoFit/>
+          </a:bodyPr>
+          <a:lstStyle/>
+          <a:p>
+            <a:r>
+              <a:rPr b="1" sz="1400">
                 <a:solidFill>
                   <a:srgbClr val="0F172A"/>
                 </a:solidFill>
-              </a:defRPr>
-            </a:pPr>
-            <a:r>
-              <a:t>■ Industrial Significance</a:t>
-            </a:r>
-          </a:p>
-          <a:p>
-            <a:pPr>
-              <a:defRPr sz="1300">
-                <a:solidFill>
-                  <a:srgbClr val="475569"/>
-                </a:solidFill>
-              </a:defRPr>
-            </a:pPr>
-            <a:r>
-              <a:t>Eliminates latency and manual friction while ensuring high confidence automated decision support.</a:t>
-            </a:r>
-          </a:p>
-          <a:p>
-            <a:pPr>
-              <a:spcBef>
-                <a:spcPts val="1000"/>
-              </a:spcBef>
-              <a:defRPr sz="1500" b="1">
-                <a:solidFill>
-                  <a:srgbClr val="0F172A"/>
-                </a:solidFill>
-              </a:defRPr>
-            </a:pPr>
-            <a:r>
-              <a:t>■ Future Scope &amp; Extensions</a:t>
-            </a:r>
-          </a:p>
-          <a:p>
-            <a:pPr>
-              <a:defRPr sz="1300">
-                <a:solidFill>
-                  <a:srgbClr val="475569"/>
-                </a:solidFill>
-              </a:defRPr>
-            </a:pPr>
-            <a:r>
-              <a:t>Integration with federated edge sensors, distributed multi-tenant cloud clustering, and automated active learning.</a:t>
+              </a:rPr>
+              <a:t>High-Readiness Case Study</a:t>
+            </a:r>
+          </a:p>
+          <a:p>
+            <a:pPr>
+              <a:spcBef>
+                <a:spcPts val="600"/>
+              </a:spcBef>
+            </a:pPr>
+            <a:r>
+              <a:rPr b="1" sz="1100">
+                <a:solidFill>
+                  <a:srgbClr val="10B981"/>
+                </a:solidFill>
+              </a:rPr>
+              <a:t>• </a:t>
+            </a:r>
+            <a:r>
+              <a:rPr b="1" sz="1100">
+                <a:solidFill>
+                  <a:srgbClr val="1E293B"/>
+                </a:solidFill>
+              </a:rPr>
+              <a:t>Candidate Profile: </a:t>
+            </a:r>
+            <a:r>
+              <a:rPr sz="1100">
+                <a:solidFill>
+                  <a:srgbClr val="64748B"/>
+                </a:solidFill>
+              </a:rPr>
+              <a:t>Jordan Bell evaluated against AI / ML Research Engineer (ROLE-AI).</a:t>
+            </a:r>
+          </a:p>
+          <a:p>
+            <a:pPr>
+              <a:spcBef>
+                <a:spcPts val="600"/>
+              </a:spcBef>
+            </a:pPr>
+            <a:r>
+              <a:rPr b="1" sz="1100">
+                <a:solidFill>
+                  <a:srgbClr val="10B981"/>
+                </a:solidFill>
+              </a:rPr>
+              <a:t>• </a:t>
+            </a:r>
+            <a:r>
+              <a:rPr b="1" sz="1100">
+                <a:solidFill>
+                  <a:srgbClr val="1E293B"/>
+                </a:solidFill>
+              </a:rPr>
+              <a:t>Role Readiness Score: </a:t>
+            </a:r>
+            <a:r>
+              <a:rPr sz="1100">
+                <a:solidFill>
+                  <a:srgbClr val="64748B"/>
+                </a:solidFill>
+              </a:rPr>
+              <a:t>85.7% readiness score with only 14.3% residual skill gap.</a:t>
+            </a:r>
+          </a:p>
+          <a:p>
+            <a:pPr>
+              <a:spcBef>
+                <a:spcPts val="600"/>
+              </a:spcBef>
+            </a:pPr>
+            <a:r>
+              <a:rPr b="1" sz="1100">
+                <a:solidFill>
+                  <a:srgbClr val="10B981"/>
+                </a:solidFill>
+              </a:rPr>
+              <a:t>• </a:t>
+            </a:r>
+            <a:r>
+              <a:rPr b="1" sz="1100">
+                <a:solidFill>
+                  <a:srgbClr val="1E293B"/>
+                </a:solidFill>
+              </a:rPr>
+              <a:t>Target Competencies: </a:t>
+            </a:r>
+            <a:r>
+              <a:rPr sz="1100">
+                <a:solidFill>
+                  <a:srgbClr val="64748B"/>
+                </a:solidFill>
+              </a:rPr>
+              <a:t>Identified missing advanced competencies: Transformers and MLOps.</a:t>
+            </a:r>
+          </a:p>
+          <a:p>
+            <a:pPr>
+              <a:spcBef>
+                <a:spcPts val="600"/>
+              </a:spcBef>
+            </a:pPr>
+            <a:r>
+              <a:rPr b="1" sz="1100">
+                <a:solidFill>
+                  <a:srgbClr val="10B981"/>
+                </a:solidFill>
+              </a:rPr>
+              <a:t>• </a:t>
+            </a:r>
+            <a:r>
+              <a:rPr b="1" sz="1100">
+                <a:solidFill>
+                  <a:srgbClr val="1E293B"/>
+                </a:solidFill>
+              </a:rPr>
+              <a:t>Curated Recommendations: </a:t>
+            </a:r>
+            <a:r>
+              <a:rPr sz="1100">
+                <a:solidFill>
+                  <a:srgbClr val="64748B"/>
+                </a:solidFill>
+              </a:rPr>
+              <a:t>HuggingFace LLM Specialization + End-to-End MLOps Pipeline Capstone.</a:t>
+            </a:r>
+          </a:p>
+          <a:p>
+            <a:pPr>
+              <a:spcBef>
+                <a:spcPts val="600"/>
+              </a:spcBef>
+            </a:pPr>
+            <a:r>
+              <a:rPr b="1" sz="1100">
+                <a:solidFill>
+                  <a:srgbClr val="10B981"/>
+                </a:solidFill>
+              </a:rPr>
+              <a:t>• </a:t>
+            </a:r>
+            <a:r>
+              <a:rPr b="1" sz="1100">
+                <a:solidFill>
+                  <a:srgbClr val="1E293B"/>
+                </a:solidFill>
+              </a:rPr>
+              <a:t>Transition Timeline: </a:t>
+            </a:r>
+            <a:r>
+              <a:rPr sz="1100">
+                <a:solidFill>
+                  <a:srgbClr val="64748B"/>
+                </a:solidFill>
+              </a:rPr>
+              <a:t>Fast-track timeline: 6 weeks to complete role qualification with +42.5% salary growth.</a:t>
             </a:r>
           </a:p>
         </p:txBody>
